--- a/week02/Lab02.pptx
+++ b/week02/Lab02.pptx
@@ -5,40 +5,30 @@
     <p:sldMasterId id="2147483648" r:id="rId1"/>
   </p:sldMasterIdLst>
   <p:notesMasterIdLst>
-    <p:notesMasterId r:id="rId6"/>
+    <p:notesMasterId r:id="rId18"/>
   </p:notesMasterIdLst>
   <p:sldIdLst>
-    <p:sldId id="256" r:id="rId3"/>
-    <p:sldId id="583" r:id="rId4"/>
-    <p:sldId id="568" r:id="rId5"/>
-    <p:sldId id="468" r:id="rId7"/>
-    <p:sldId id="569" r:id="rId8"/>
-    <p:sldId id="470" r:id="rId9"/>
-    <p:sldId id="570" r:id="rId10"/>
-    <p:sldId id="571" r:id="rId11"/>
-    <p:sldId id="572" r:id="rId12"/>
-    <p:sldId id="469" r:id="rId13"/>
-    <p:sldId id="459" r:id="rId14"/>
-    <p:sldId id="616" r:id="rId15"/>
-    <p:sldId id="617" r:id="rId16"/>
-    <p:sldId id="585" r:id="rId17"/>
-    <p:sldId id="604" r:id="rId18"/>
-    <p:sldId id="586" r:id="rId19"/>
-    <p:sldId id="606" r:id="rId20"/>
-    <p:sldId id="587" r:id="rId21"/>
-    <p:sldId id="607" r:id="rId22"/>
-    <p:sldId id="589" r:id="rId23"/>
-    <p:sldId id="588" r:id="rId24"/>
-    <p:sldId id="567" r:id="rId25"/>
-    <p:sldId id="479" r:id="rId26"/>
-    <p:sldId id="564" r:id="rId27"/>
-    <p:sldId id="566" r:id="rId28"/>
-    <p:sldId id="573" r:id="rId29"/>
+    <p:sldId id="256" r:id="rId2"/>
+    <p:sldId id="583" r:id="rId3"/>
+    <p:sldId id="568" r:id="rId4"/>
+    <p:sldId id="468" r:id="rId5"/>
+    <p:sldId id="569" r:id="rId6"/>
+    <p:sldId id="470" r:id="rId7"/>
+    <p:sldId id="570" r:id="rId8"/>
+    <p:sldId id="571" r:id="rId9"/>
+    <p:sldId id="572" r:id="rId10"/>
+    <p:sldId id="469" r:id="rId11"/>
+    <p:sldId id="459" r:id="rId12"/>
+    <p:sldId id="567" r:id="rId13"/>
+    <p:sldId id="479" r:id="rId14"/>
+    <p:sldId id="564" r:id="rId15"/>
+    <p:sldId id="566" r:id="rId16"/>
+    <p:sldId id="573" r:id="rId17"/>
   </p:sldIdLst>
   <p:sldSz cx="12192000" cy="6858000"/>
   <p:notesSz cx="6858000" cy="9144000"/>
   <p:custDataLst>
-    <p:tags r:id="rId33"/>
+    <p:tags r:id="rId19"/>
   </p:custDataLst>
   <p:defaultTextStyle>
     <a:defPPr>
@@ -135,6 +125,11 @@
       </a:defRPr>
     </a:lvl9pPr>
   </p:defaultTextStyle>
+  <p:extLst>
+    <p:ext uri="{EFAFB233-063F-42B5-8137-9DF3F51BA10A}">
+      <p15:sldGuideLst xmlns:p15="http://schemas.microsoft.com/office/powerpoint/2012/main"/>
+    </p:ext>
+  </p:extLst>
 </p:presentation>
 </file>
 
@@ -220,6 +215,7 @@
           <a:p>
             <a:fld id="{D1237EF7-A117-46B7-88A8-1B7FB98FF0F2}" type="datetimeFigureOut">
               <a:rPr lang="zh-CN" altLang="en-US" smtClean="0"/>
+              <a:t>2026/3/9</a:t>
             </a:fld>
             <a:endParaRPr lang="zh-CN" altLang="en-US"/>
           </a:p>
@@ -286,7 +282,6 @@
               <a:rPr lang="zh-CN" altLang="en-US"/>
               <a:t>单击此处编辑母版文本样式</a:t>
             </a:r>
-            <a:endParaRPr lang="zh-CN" altLang="en-US"/>
           </a:p>
           <a:p>
             <a:pPr lvl="1"/>
@@ -294,7 +289,6 @@
               <a:rPr lang="zh-CN" altLang="en-US"/>
               <a:t>二级</a:t>
             </a:r>
-            <a:endParaRPr lang="zh-CN" altLang="en-US"/>
           </a:p>
           <a:p>
             <a:pPr lvl="2"/>
@@ -302,7 +296,6 @@
               <a:rPr lang="zh-CN" altLang="en-US"/>
               <a:t>三级</a:t>
             </a:r>
-            <a:endParaRPr lang="zh-CN" altLang="en-US"/>
           </a:p>
           <a:p>
             <a:pPr lvl="3"/>
@@ -310,7 +303,6 @@
               <a:rPr lang="zh-CN" altLang="en-US"/>
               <a:t>四级</a:t>
             </a:r>
-            <a:endParaRPr lang="zh-CN" altLang="en-US"/>
           </a:p>
           <a:p>
             <a:pPr lvl="4"/>
@@ -318,7 +310,6 @@
               <a:rPr lang="zh-CN" altLang="en-US"/>
               <a:t>五级</a:t>
             </a:r>
-            <a:endParaRPr lang="zh-CN" altLang="en-US"/>
           </a:p>
         </p:txBody>
       </p:sp>
@@ -382,6 +373,7 @@
           <a:p>
             <a:fld id="{7B705520-EB74-4E10-9207-DDFEA7EA0F0E}" type="slidenum">
               <a:rPr lang="zh-CN" altLang="en-US" smtClean="0"/>
+              <a:t>‹#›</a:t>
             </a:fld>
             <a:endParaRPr lang="zh-CN" altLang="en-US"/>
           </a:p>
@@ -494,12 +486,19 @@
         <p:cNvGrpSpPr/>
         <p:nvPr/>
       </p:nvGrpSpPr>
-      <p:grpSpPr/>
+      <p:grpSpPr>
+        <a:xfrm>
+          <a:off x="0" y="0"/>
+          <a:ext cx="0" cy="0"/>
+          <a:chOff x="0" y="0"/>
+          <a:chExt cx="0" cy="0"/>
+        </a:xfrm>
+      </p:grpSpPr>
       <p:sp>
         <p:nvSpPr>
           <p:cNvPr id="2" name="幻灯片图像占位符 1"/>
           <p:cNvSpPr>
-            <a:spLocks noGrp="1"/>
+            <a:spLocks noGrp="1" noRot="1" noChangeAspect="1"/>
           </p:cNvSpPr>
           <p:nvPr>
             <p:ph type="sldImg" idx="2"/>
@@ -520,6 +519,7 @@
         <p:spPr/>
         <p:txBody>
           <a:bodyPr/>
+          <a:lstStyle/>
           <a:p>
             <a:r>
               <a:rPr lang="en-US" altLang="zh-CN" dirty="0">
@@ -531,7 +531,6 @@
               <a:rPr lang="zh-CN" altLang="en-US"/>
               <a:t>指数</a:t>
             </a:r>
-            <a:endParaRPr lang="zh-CN" altLang="en-US"/>
           </a:p>
           <a:p>
             <a:r>
@@ -552,13 +551,8 @@
             </a:r>
             <a:r>
               <a:rPr lang="zh-CN" altLang="en-US"/>
-              <a:t>的</a:t>
-            </a:r>
-            <a:r>
-              <a:rPr lang="zh-CN" altLang="en-US"/>
-              <a:t>情况</a:t>
-            </a:r>
-            <a:endParaRPr lang="zh-CN" altLang="en-US"/>
+              <a:t>的情况</a:t>
+            </a:r>
           </a:p>
           <a:p>
             <a:r>
@@ -579,13 +573,8 @@
             </a:r>
             <a:r>
               <a:rPr lang="zh-CN" altLang="en-US"/>
-              <a:t>语言里也如此</a:t>
-            </a:r>
-            <a:r>
-              <a:rPr lang="zh-CN" altLang="en-US"/>
-              <a:t>吗</a:t>
-            </a:r>
-            <a:endParaRPr lang="zh-CN" altLang="en-US"/>
+              <a:t>语言里也如此吗</a:t>
+            </a:r>
           </a:p>
         </p:txBody>
       </p:sp>
@@ -606,12 +595,19 @@
         <p:cNvGrpSpPr/>
         <p:nvPr/>
       </p:nvGrpSpPr>
-      <p:grpSpPr/>
+      <p:grpSpPr>
+        <a:xfrm>
+          <a:off x="0" y="0"/>
+          <a:ext cx="0" cy="0"/>
+          <a:chOff x="0" y="0"/>
+          <a:chExt cx="0" cy="0"/>
+        </a:xfrm>
+      </p:grpSpPr>
       <p:sp>
         <p:nvSpPr>
           <p:cNvPr id="2" name="幻灯片图像占位符 1"/>
           <p:cNvSpPr>
-            <a:spLocks noGrp="1"/>
+            <a:spLocks noGrp="1" noRot="1" noChangeAspect="1"/>
           </p:cNvSpPr>
           <p:nvPr>
             <p:ph type="sldImg" idx="2"/>
@@ -632,6 +628,7 @@
         <p:spPr/>
         <p:txBody>
           <a:bodyPr/>
+          <a:lstStyle/>
           <a:p>
             <a:endParaRPr lang="zh-CN" altLang="en-US"/>
           </a:p>
@@ -654,12 +651,19 @@
         <p:cNvGrpSpPr/>
         <p:nvPr/>
       </p:nvGrpSpPr>
-      <p:grpSpPr/>
+      <p:grpSpPr>
+        <a:xfrm>
+          <a:off x="0" y="0"/>
+          <a:ext cx="0" cy="0"/>
+          <a:chOff x="0" y="0"/>
+          <a:chExt cx="0" cy="0"/>
+        </a:xfrm>
+      </p:grpSpPr>
       <p:sp>
         <p:nvSpPr>
           <p:cNvPr id="2" name="幻灯片图像占位符 1"/>
           <p:cNvSpPr>
-            <a:spLocks noGrp="1"/>
+            <a:spLocks noGrp="1" noRot="1" noChangeAspect="1"/>
           </p:cNvSpPr>
           <p:nvPr>
             <p:ph type="sldImg" idx="2"/>
@@ -680,8 +684,44 @@
         <p:spPr/>
         <p:txBody>
           <a:bodyPr/>
-          <a:p>
-            <a:endParaRPr lang="zh-CN" altLang="en-US"/>
+          <a:lstStyle/>
+          <a:p>
+            <a:r>
+              <a:rPr lang="zh-CN" altLang="en-US"/>
+              <a:t>溢出的问题</a:t>
+            </a:r>
+          </a:p>
+          <a:p>
+            <a:r>
+              <a:rPr lang="zh-CN" altLang="en-US"/>
+              <a:t>结合先加后用，先用后加的问题</a:t>
+            </a:r>
+            <a:r>
+              <a:rPr lang="en-US" altLang="zh-CN"/>
+              <a:t> </a:t>
+            </a:r>
+            <a:r>
+              <a:rPr lang="zh-CN" altLang="en-US"/>
+              <a:t>（找到临界点的数字，</a:t>
+            </a:r>
+            <a:r>
+              <a:rPr lang="en-US" altLang="zh-CN"/>
+              <a:t>/2 * </a:t>
+            </a:r>
+            <a:r>
+              <a:rPr lang="zh-CN" altLang="en-US"/>
+              <a:t>一个</a:t>
+            </a:r>
+            <a:r>
+              <a:rPr lang="en-US" altLang="zh-CN"/>
+              <a:t> i++</a:t>
+            </a:r>
+          </a:p>
+          <a:p>
+            <a:r>
+              <a:rPr lang="zh-CN" altLang="en-US"/>
+              <a:t>或者结合移位进行判断</a:t>
+            </a:r>
           </a:p>
         </p:txBody>
       </p:sp>
@@ -702,12 +742,19 @@
         <p:cNvGrpSpPr/>
         <p:nvPr/>
       </p:nvGrpSpPr>
-      <p:grpSpPr/>
+      <p:grpSpPr>
+        <a:xfrm>
+          <a:off x="0" y="0"/>
+          <a:ext cx="0" cy="0"/>
+          <a:chOff x="0" y="0"/>
+          <a:chExt cx="0" cy="0"/>
+        </a:xfrm>
+      </p:grpSpPr>
       <p:sp>
         <p:nvSpPr>
           <p:cNvPr id="2" name="幻灯片图像占位符 1"/>
           <p:cNvSpPr>
-            <a:spLocks noGrp="1"/>
+            <a:spLocks noGrp="1" noRot="1" noChangeAspect="1"/>
           </p:cNvSpPr>
           <p:nvPr>
             <p:ph type="sldImg" idx="2"/>
@@ -728,8 +775,45 @@
         <p:spPr/>
         <p:txBody>
           <a:bodyPr/>
+          <a:lstStyle/>
+          <a:p>
+            <a:r>
+              <a:rPr lang="zh-CN" altLang="en-US"/>
+              <a:t>浮点数的大小</a:t>
+            </a:r>
+            <a:r>
+              <a:rPr lang="en-US" altLang="zh-CN"/>
+              <a:t> </a:t>
+            </a:r>
+            <a:r>
+              <a:rPr lang="zh-CN" altLang="en-US"/>
+              <a:t>以及</a:t>
+            </a:r>
+            <a:r>
+              <a:rPr lang="en-US" altLang="zh-CN"/>
+              <a:t> </a:t>
+            </a:r>
+            <a:r>
+              <a:rPr lang="zh-CN" altLang="en-US"/>
+              <a:t>浮点数的比对</a:t>
+            </a:r>
+          </a:p>
           <a:p>
             <a:endParaRPr lang="zh-CN" altLang="en-US"/>
+          </a:p>
+          <a:p>
+            <a:r>
+              <a:rPr lang="zh-CN" altLang="en-US"/>
+              <a:t>使用</a:t>
+            </a:r>
+            <a:r>
+              <a:rPr lang="en-US" altLang="zh-CN"/>
+              <a:t>lecture</a:t>
+            </a:r>
+            <a:r>
+              <a:rPr lang="zh-CN" altLang="en-US"/>
+              <a:t>上介绍的方法来解决</a:t>
+            </a:r>
           </a:p>
         </p:txBody>
       </p:sp>
@@ -750,12 +834,19 @@
         <p:cNvGrpSpPr/>
         <p:nvPr/>
       </p:nvGrpSpPr>
-      <p:grpSpPr/>
+      <p:grpSpPr>
+        <a:xfrm>
+          <a:off x="0" y="0"/>
+          <a:ext cx="0" cy="0"/>
+          <a:chOff x="0" y="0"/>
+          <a:chExt cx="0" cy="0"/>
+        </a:xfrm>
+      </p:grpSpPr>
       <p:sp>
         <p:nvSpPr>
           <p:cNvPr id="2" name="幻灯片图像占位符 1"/>
           <p:cNvSpPr>
-            <a:spLocks noGrp="1"/>
+            <a:spLocks noGrp="1" noRot="1" noChangeAspect="1"/>
           </p:cNvSpPr>
           <p:nvPr>
             <p:ph type="sldImg" idx="2"/>
@@ -776,21 +867,11 @@
         <p:spPr/>
         <p:txBody>
           <a:bodyPr/>
+          <a:lstStyle/>
           <a:p>
             <a:r>
               <a:rPr lang="zh-CN" altLang="en-US"/>
-              <a:t>溢出的</a:t>
-            </a:r>
-            <a:r>
-              <a:rPr lang="zh-CN" altLang="en-US"/>
-              <a:t>问题</a:t>
-            </a:r>
-            <a:endParaRPr lang="zh-CN" altLang="en-US"/>
-          </a:p>
-          <a:p>
-            <a:r>
-              <a:rPr lang="zh-CN" altLang="en-US"/>
-              <a:t>结合先加后用，先用后加的问题</a:t>
+              <a:t>数据类型转换：强制转换</a:t>
             </a:r>
             <a:r>
               <a:rPr lang="en-US" altLang="zh-CN"/>
@@ -798,36 +879,65 @@
             </a:r>
             <a:r>
               <a:rPr lang="zh-CN" altLang="en-US"/>
-              <a:t>（找到临界点的数字，</a:t>
-            </a:r>
-            <a:r>
-              <a:rPr lang="en-US" altLang="zh-CN"/>
-              <a:t>/2 * </a:t>
-            </a:r>
-            <a:r>
-              <a:rPr lang="zh-CN" altLang="en-US"/>
-              <a:t>一个</a:t>
+              <a:t>以及</a:t>
             </a:r>
             <a:r>
               <a:rPr lang="en-US" altLang="zh-CN"/>
               <a:t> </a:t>
             </a:r>
             <a:r>
+              <a:rPr lang="zh-CN" altLang="en-US"/>
+              <a:t>自动转换</a:t>
+            </a:r>
+          </a:p>
+          <a:p>
+            <a:endParaRPr lang="zh-CN" altLang="en-US"/>
+          </a:p>
+          <a:p>
+            <a:r>
+              <a:rPr lang="zh-CN" altLang="en-US"/>
+              <a:t>记录</a:t>
+            </a:r>
+            <a:r>
               <a:rPr lang="en-US" altLang="zh-CN"/>
-              <a:t>i++</a:t>
-            </a:r>
-            <a:endParaRPr lang="en-US" altLang="zh-CN"/>
-          </a:p>
-          <a:p>
+              <a:t>c</a:t>
+            </a:r>
             <a:r>
               <a:rPr lang="zh-CN" altLang="en-US"/>
-              <a:t>或者结合移位进行</a:t>
+              <a:t>和</a:t>
+            </a:r>
+            <a:r>
+              <a:rPr lang="en-US" altLang="zh-CN"/>
+              <a:t>d</a:t>
             </a:r>
             <a:r>
               <a:rPr lang="zh-CN" altLang="en-US"/>
-              <a:t>判断</a:t>
-            </a:r>
-            <a:endParaRPr lang="zh-CN" altLang="en-US"/>
+              <a:t>中的</a:t>
+            </a:r>
+            <a:r>
+              <a:rPr lang="en-US" altLang="zh-CN"/>
+              <a:t>16</a:t>
+            </a:r>
+            <a:r>
+              <a:rPr lang="zh-CN" altLang="en-US"/>
+              <a:t>进制数</a:t>
+            </a:r>
+            <a:r>
+              <a:rPr lang="en-US" altLang="zh-CN"/>
+              <a:t> </a:t>
+            </a:r>
+            <a:r>
+              <a:rPr lang="zh-CN" altLang="en-US"/>
+              <a:t>进行展示（可以打印，也可以用</a:t>
+            </a:r>
+            <a:r>
+              <a:rPr lang="en-US" altLang="zh-CN"/>
+              <a:t>debug</a:t>
+            </a:r>
+            <a:r>
+              <a:rPr lang="zh-CN" altLang="en-US"/>
+              <a:t>的方式进行展示</a:t>
+            </a:r>
           </a:p>
         </p:txBody>
       </p:sp>
@@ -848,12 +958,19 @@
         <p:cNvGrpSpPr/>
         <p:nvPr/>
       </p:nvGrpSpPr>
-      <p:grpSpPr/>
+      <p:grpSpPr>
+        <a:xfrm>
+          <a:off x="0" y="0"/>
+          <a:ext cx="0" cy="0"/>
+          <a:chOff x="0" y="0"/>
+          <a:chExt cx="0" cy="0"/>
+        </a:xfrm>
+      </p:grpSpPr>
       <p:sp>
         <p:nvSpPr>
           <p:cNvPr id="2" name="幻灯片图像占位符 1"/>
           <p:cNvSpPr>
-            <a:spLocks noGrp="1"/>
+            <a:spLocks noGrp="1" noRot="1" noChangeAspect="1"/>
           </p:cNvSpPr>
           <p:nvPr>
             <p:ph type="sldImg" idx="2"/>
@@ -874,226 +991,7 @@
         <p:spPr/>
         <p:txBody>
           <a:bodyPr/>
-          <a:p>
-            <a:r>
-              <a:rPr lang="zh-CN" altLang="en-US"/>
-              <a:t>浮点数的大小</a:t>
-            </a:r>
-            <a:r>
-              <a:rPr lang="en-US" altLang="zh-CN"/>
-              <a:t> </a:t>
-            </a:r>
-            <a:r>
-              <a:rPr lang="zh-CN" altLang="en-US"/>
-              <a:t>以及</a:t>
-            </a:r>
-            <a:r>
-              <a:rPr lang="en-US" altLang="zh-CN"/>
-              <a:t> </a:t>
-            </a:r>
-            <a:r>
-              <a:rPr lang="zh-CN" altLang="en-US"/>
-              <a:t>浮点数的</a:t>
-            </a:r>
-            <a:r>
-              <a:rPr lang="zh-CN" altLang="en-US"/>
-              <a:t>比对</a:t>
-            </a:r>
-            <a:endParaRPr lang="zh-CN" altLang="en-US"/>
-          </a:p>
-          <a:p>
-            <a:endParaRPr lang="zh-CN" altLang="en-US"/>
-          </a:p>
-          <a:p>
-            <a:r>
-              <a:rPr lang="zh-CN" altLang="en-US"/>
-              <a:t>使用</a:t>
-            </a:r>
-            <a:r>
-              <a:rPr lang="en-US" altLang="zh-CN"/>
-              <a:t>lecture</a:t>
-            </a:r>
-            <a:r>
-              <a:rPr lang="zh-CN" altLang="en-US"/>
-              <a:t>上介绍的方法来</a:t>
-            </a:r>
-            <a:r>
-              <a:rPr lang="zh-CN" altLang="en-US"/>
-              <a:t>解决</a:t>
-            </a:r>
-            <a:endParaRPr lang="zh-CN" altLang="en-US"/>
-          </a:p>
-        </p:txBody>
-      </p:sp>
-    </p:spTree>
-  </p:cSld>
-  <p:clrMapOvr>
-    <a:masterClrMapping/>
-  </p:clrMapOvr>
-</p:notes>
-</file>
-
-<file path=ppt/notesSlides/notesSlide15.xml><?xml version="1.0" encoding="utf-8"?>
-<p:notes xmlns:a="http://schemas.openxmlformats.org/drawingml/2006/main" xmlns:r="http://schemas.openxmlformats.org/officeDocument/2006/relationships" xmlns:p="http://schemas.openxmlformats.org/presentationml/2006/main">
-  <p:cSld>
-    <p:spTree>
-      <p:nvGrpSpPr>
-        <p:cNvPr id="1" name=""/>
-        <p:cNvGrpSpPr/>
-        <p:nvPr/>
-      </p:nvGrpSpPr>
-      <p:grpSpPr/>
-      <p:sp>
-        <p:nvSpPr>
-          <p:cNvPr id="2" name="幻灯片图像占位符 1"/>
-          <p:cNvSpPr>
-            <a:spLocks noGrp="1"/>
-          </p:cNvSpPr>
-          <p:nvPr>
-            <p:ph type="sldImg" idx="2"/>
-          </p:nvPr>
-        </p:nvSpPr>
-        <p:spPr/>
-      </p:sp>
-      <p:sp>
-        <p:nvSpPr>
-          <p:cNvPr id="3" name="文本占位符 2"/>
-          <p:cNvSpPr>
-            <a:spLocks noGrp="1"/>
-          </p:cNvSpPr>
-          <p:nvPr>
-            <p:ph type="body" idx="3"/>
-          </p:nvPr>
-        </p:nvSpPr>
-        <p:spPr/>
-        <p:txBody>
-          <a:bodyPr/>
-          <a:p>
-            <a:r>
-              <a:rPr lang="zh-CN" altLang="en-US"/>
-              <a:t>数据类型转换：强制转换</a:t>
-            </a:r>
-            <a:r>
-              <a:rPr lang="en-US" altLang="zh-CN"/>
-              <a:t> </a:t>
-            </a:r>
-            <a:r>
-              <a:rPr lang="zh-CN" altLang="en-US"/>
-              <a:t>以及</a:t>
-            </a:r>
-            <a:r>
-              <a:rPr lang="en-US" altLang="zh-CN"/>
-              <a:t> </a:t>
-            </a:r>
-            <a:r>
-              <a:rPr lang="zh-CN" altLang="en-US"/>
-              <a:t>自动</a:t>
-            </a:r>
-            <a:r>
-              <a:rPr lang="zh-CN" altLang="en-US"/>
-              <a:t>转换</a:t>
-            </a:r>
-            <a:endParaRPr lang="zh-CN" altLang="en-US"/>
-          </a:p>
-          <a:p>
-            <a:endParaRPr lang="zh-CN" altLang="en-US"/>
-          </a:p>
-          <a:p>
-            <a:r>
-              <a:rPr lang="zh-CN" altLang="en-US"/>
-              <a:t>记录</a:t>
-            </a:r>
-            <a:r>
-              <a:rPr lang="en-US" altLang="zh-CN"/>
-              <a:t>c</a:t>
-            </a:r>
-            <a:r>
-              <a:rPr lang="zh-CN" altLang="en-US"/>
-              <a:t>和</a:t>
-            </a:r>
-            <a:r>
-              <a:rPr lang="en-US" altLang="zh-CN"/>
-              <a:t>d</a:t>
-            </a:r>
-            <a:r>
-              <a:rPr lang="zh-CN" altLang="en-US"/>
-              <a:t>中的</a:t>
-            </a:r>
-            <a:r>
-              <a:rPr lang="en-US" altLang="zh-CN"/>
-              <a:t>16</a:t>
-            </a:r>
-            <a:r>
-              <a:rPr lang="zh-CN" altLang="en-US"/>
-              <a:t>进制数</a:t>
-            </a:r>
-            <a:r>
-              <a:rPr lang="en-US" altLang="zh-CN"/>
-              <a:t> </a:t>
-            </a:r>
-            <a:r>
-              <a:rPr lang="zh-CN" altLang="en-US"/>
-              <a:t>进行展示（可以打印，也可以用</a:t>
-            </a:r>
-            <a:r>
-              <a:rPr lang="en-US" altLang="zh-CN"/>
-              <a:t>debug</a:t>
-            </a:r>
-            <a:r>
-              <a:rPr lang="zh-CN" altLang="en-US"/>
-              <a:t>的方式进行</a:t>
-            </a:r>
-            <a:r>
-              <a:rPr lang="zh-CN" altLang="en-US"/>
-              <a:t>展示</a:t>
-            </a:r>
-            <a:endParaRPr lang="zh-CN" altLang="en-US"/>
-          </a:p>
-        </p:txBody>
-      </p:sp>
-    </p:spTree>
-  </p:cSld>
-  <p:clrMapOvr>
-    <a:masterClrMapping/>
-  </p:clrMapOvr>
-</p:notes>
-</file>
-
-<file path=ppt/notesSlides/notesSlide16.xml><?xml version="1.0" encoding="utf-8"?>
-<p:notes xmlns:a="http://schemas.openxmlformats.org/drawingml/2006/main" xmlns:r="http://schemas.openxmlformats.org/officeDocument/2006/relationships" xmlns:p="http://schemas.openxmlformats.org/presentationml/2006/main">
-  <p:cSld>
-    <p:spTree>
-      <p:nvGrpSpPr>
-        <p:cNvPr id="1" name=""/>
-        <p:cNvGrpSpPr/>
-        <p:nvPr/>
-      </p:nvGrpSpPr>
-      <p:grpSpPr/>
-      <p:sp>
-        <p:nvSpPr>
-          <p:cNvPr id="2" name="幻灯片图像占位符 1"/>
-          <p:cNvSpPr>
-            <a:spLocks noGrp="1"/>
-          </p:cNvSpPr>
-          <p:nvPr>
-            <p:ph type="sldImg" idx="2"/>
-          </p:nvPr>
-        </p:nvSpPr>
-        <p:spPr/>
-      </p:sp>
-      <p:sp>
-        <p:nvSpPr>
-          <p:cNvPr id="3" name="文本占位符 2"/>
-          <p:cNvSpPr>
-            <a:spLocks noGrp="1"/>
-          </p:cNvSpPr>
-          <p:nvPr>
-            <p:ph type="body" idx="3"/>
-          </p:nvPr>
-        </p:nvSpPr>
-        <p:spPr/>
-        <p:txBody>
-          <a:bodyPr/>
+          <a:lstStyle/>
           <a:p>
             <a:endParaRPr lang="en-US" altLang="zh-CN"/>
           </a:p>
@@ -1166,13 +1064,8 @@
             </a:pPr>
             <a:r>
               <a:rPr lang="zh-CN" altLang="en-US" dirty="0"/>
-              <a:t>两种</a:t>
-            </a:r>
-            <a:r>
-              <a:rPr lang="zh-CN" altLang="en-US" dirty="0"/>
-              <a:t>方法：</a:t>
-            </a:r>
-            <a:endParaRPr lang="zh-CN" altLang="en-US" dirty="0"/>
+              <a:t>两种方法：</a:t>
+            </a:r>
           </a:p>
           <a:p>
             <a:pPr marL="542925" indent="-542925" eaLnBrk="1" hangingPunct="1">
@@ -1186,13 +1079,8 @@
             </a:r>
             <a:r>
               <a:rPr lang="zh-CN" altLang="en-US" dirty="0"/>
-              <a:t>中的成员</a:t>
-            </a:r>
-            <a:r>
-              <a:rPr lang="zh-CN" altLang="en-US" dirty="0"/>
-              <a:t>函数</a:t>
-            </a:r>
-            <a:endParaRPr lang="zh-CN" altLang="en-US" dirty="0"/>
+              <a:t>中的成员函数</a:t>
+            </a:r>
           </a:p>
           <a:p>
             <a:pPr marL="542925" indent="-542925" eaLnBrk="1" hangingPunct="1">
@@ -1214,13 +1102,8 @@
             </a:r>
             <a:r>
               <a:rPr lang="zh-CN" altLang="en-US" dirty="0"/>
-              <a:t>的关系</a:t>
-            </a:r>
-            <a:r>
-              <a:rPr lang="zh-CN" altLang="en-US" dirty="0"/>
-              <a:t>是？</a:t>
-            </a:r>
-            <a:endParaRPr lang="zh-CN" altLang="en-US" dirty="0"/>
+              <a:t>的关系是？</a:t>
+            </a:r>
           </a:p>
           <a:p>
             <a:pPr marL="542925" indent="-542925" eaLnBrk="1" hangingPunct="1">
@@ -1254,13 +1137,8 @@
             </a:r>
             <a:r>
               <a:rPr lang="zh-CN" altLang="en-US" dirty="0"/>
-              <a:t>？操纵</a:t>
-            </a:r>
-            <a:r>
-              <a:rPr lang="zh-CN" altLang="en-US" dirty="0"/>
-              <a:t>符</a:t>
-            </a:r>
-            <a:endParaRPr lang="zh-CN" altLang="en-US" dirty="0"/>
+              <a:t>？操纵符</a:t>
+            </a:r>
           </a:p>
         </p:txBody>
       </p:sp>
@@ -1305,6 +1183,7 @@
                   <a:prstClr val="black"/>
                 </a:solidFill>
               </a:rPr>
+              <a:t>4</a:t>
             </a:fld>
             <a:endParaRPr lang="en-US" altLang="zh-CN">
               <a:solidFill>
@@ -1424,6 +1303,7 @@
                   <a:prstClr val="black"/>
                 </a:solidFill>
               </a:rPr>
+              <a:t>5</a:t>
             </a:fld>
             <a:endParaRPr lang="en-US" altLang="zh-CN">
               <a:solidFill>
@@ -1508,13 +1388,8 @@
             </a:r>
             <a:r>
               <a:rPr lang="zh-CN" altLang="en-US" dirty="0"/>
-              <a:t>为什么也用</a:t>
-            </a:r>
-            <a:r>
-              <a:rPr lang="zh-CN" altLang="en-US" dirty="0"/>
-              <a:t>科学计数法？</a:t>
-            </a:r>
-            <a:endParaRPr lang="zh-CN" altLang="en-US" dirty="0"/>
+              <a:t>为什么也用科学计数法？</a:t>
+            </a:r>
           </a:p>
         </p:txBody>
       </p:sp>
@@ -1559,6 +1434,7 @@
                   <a:prstClr val="black"/>
                 </a:solidFill>
               </a:rPr>
+              <a:t>6</a:t>
             </a:fld>
             <a:endParaRPr lang="en-US" altLang="zh-CN">
               <a:solidFill>
@@ -1585,12 +1461,19 @@
         <p:cNvGrpSpPr/>
         <p:nvPr/>
       </p:nvGrpSpPr>
-      <p:grpSpPr/>
+      <p:grpSpPr>
+        <a:xfrm>
+          <a:off x="0" y="0"/>
+          <a:ext cx="0" cy="0"/>
+          <a:chOff x="0" y="0"/>
+          <a:chExt cx="0" cy="0"/>
+        </a:xfrm>
+      </p:grpSpPr>
       <p:sp>
         <p:nvSpPr>
           <p:cNvPr id="2" name="幻灯片图像占位符 1"/>
           <p:cNvSpPr>
-            <a:spLocks noGrp="1"/>
+            <a:spLocks noGrp="1" noRot="1" noChangeAspect="1"/>
           </p:cNvSpPr>
           <p:nvPr>
             <p:ph type="sldImg" idx="2"/>
@@ -1611,6 +1494,7 @@
         <p:spPr/>
         <p:txBody>
           <a:bodyPr/>
+          <a:lstStyle/>
           <a:p>
             <a:r>
               <a:rPr lang="zh-CN" altLang="en-US"/>
@@ -1638,13 +1522,8 @@
             </a:r>
             <a:r>
               <a:rPr lang="zh-CN" altLang="en-US"/>
-              <a:t>（代码</a:t>
-            </a:r>
-            <a:r>
-              <a:rPr lang="zh-CN" altLang="en-US"/>
-              <a:t>中）</a:t>
-            </a:r>
-            <a:endParaRPr lang="zh-CN" altLang="en-US"/>
+              <a:t>（代码中）</a:t>
+            </a:r>
           </a:p>
         </p:txBody>
       </p:sp>
@@ -1665,12 +1544,19 @@
         <p:cNvGrpSpPr/>
         <p:nvPr/>
       </p:nvGrpSpPr>
-      <p:grpSpPr/>
+      <p:grpSpPr>
+        <a:xfrm>
+          <a:off x="0" y="0"/>
+          <a:ext cx="0" cy="0"/>
+          <a:chOff x="0" y="0"/>
+          <a:chExt cx="0" cy="0"/>
+        </a:xfrm>
+      </p:grpSpPr>
       <p:sp>
         <p:nvSpPr>
           <p:cNvPr id="2" name="幻灯片图像占位符 1"/>
           <p:cNvSpPr>
-            <a:spLocks noGrp="1"/>
+            <a:spLocks noGrp="1" noRot="1" noChangeAspect="1"/>
           </p:cNvSpPr>
           <p:nvPr>
             <p:ph type="sldImg" idx="2"/>
@@ -1691,6 +1577,7 @@
         <p:spPr/>
         <p:txBody>
           <a:bodyPr/>
+          <a:lstStyle/>
           <a:p>
             <a:endParaRPr lang="zh-CN" altLang="en-US"/>
           </a:p>
@@ -1713,12 +1600,19 @@
         <p:cNvGrpSpPr/>
         <p:nvPr/>
       </p:nvGrpSpPr>
-      <p:grpSpPr/>
+      <p:grpSpPr>
+        <a:xfrm>
+          <a:off x="0" y="0"/>
+          <a:ext cx="0" cy="0"/>
+          <a:chOff x="0" y="0"/>
+          <a:chExt cx="0" cy="0"/>
+        </a:xfrm>
+      </p:grpSpPr>
       <p:sp>
         <p:nvSpPr>
           <p:cNvPr id="2" name="幻灯片图像占位符 1"/>
           <p:cNvSpPr>
-            <a:spLocks noGrp="1"/>
+            <a:spLocks noGrp="1" noRot="1" noChangeAspect="1"/>
           </p:cNvSpPr>
           <p:nvPr>
             <p:ph type="sldImg" idx="2"/>
@@ -1739,6 +1633,7 @@
         <p:spPr/>
         <p:txBody>
           <a:bodyPr/>
+          <a:lstStyle/>
           <a:p>
             <a:r>
               <a:rPr lang="en-US" altLang="zh-CN"/>
@@ -1754,17 +1649,8 @@
             </a:r>
             <a:r>
               <a:rPr lang="zh-CN" altLang="en-US"/>
-              <a:t>来操作？（从代码的运行结果来</a:t>
-            </a:r>
-            <a:r>
-              <a:rPr lang="zh-CN" altLang="en-US"/>
-              <a:t>看是</a:t>
-            </a:r>
-            <a:r>
-              <a:rPr lang="zh-CN" altLang="en-US"/>
-              <a:t>的）</a:t>
-            </a:r>
-            <a:endParaRPr lang="zh-CN" altLang="en-US"/>
+              <a:t>来操作？（从代码的运行结果来看是的）</a:t>
+            </a:r>
           </a:p>
         </p:txBody>
       </p:sp>
@@ -1878,6 +1764,7 @@
                   <a:prstClr val="black"/>
                 </a:solidFill>
               </a:rPr>
+              <a:t>10</a:t>
             </a:fld>
             <a:endParaRPr lang="en-US" altLang="zh-CN">
               <a:solidFill>
@@ -1904,12 +1791,19 @@
         <p:cNvGrpSpPr/>
         <p:nvPr/>
       </p:nvGrpSpPr>
-      <p:grpSpPr/>
+      <p:grpSpPr>
+        <a:xfrm>
+          <a:off x="0" y="0"/>
+          <a:ext cx="0" cy="0"/>
+          <a:chOff x="0" y="0"/>
+          <a:chExt cx="0" cy="0"/>
+        </a:xfrm>
+      </p:grpSpPr>
       <p:sp>
         <p:nvSpPr>
           <p:cNvPr id="2" name="幻灯片图像占位符 1"/>
           <p:cNvSpPr>
-            <a:spLocks noGrp="1"/>
+            <a:spLocks noGrp="1" noRot="1" noChangeAspect="1"/>
           </p:cNvSpPr>
           <p:nvPr>
             <p:ph type="sldImg" idx="2"/>
@@ -1930,6 +1824,7 @@
         <p:spPr/>
         <p:txBody>
           <a:bodyPr/>
+          <a:lstStyle/>
           <a:p>
             <a:r>
               <a:rPr lang="en-US" altLang="zh-CN"/>
@@ -1953,13 +1848,8 @@
             </a:r>
             <a:r>
               <a:rPr lang="zh-CN" altLang="en-US"/>
-              <a:t>实现原理上</a:t>
-            </a:r>
-            <a:r>
-              <a:rPr lang="zh-CN" altLang="en-US"/>
-              <a:t>区分</a:t>
-            </a:r>
-            <a:endParaRPr lang="zh-CN" altLang="en-US"/>
+              <a:t>实现原理上区分</a:t>
+            </a:r>
           </a:p>
         </p:txBody>
       </p:sp>
@@ -2016,7 +1906,6 @@
               <a:rPr lang="zh-CN" altLang="en-US"/>
               <a:t>单击此处编辑母版标题样式</a:t>
             </a:r>
-            <a:endParaRPr lang="zh-CN" altLang="en-US"/>
           </a:p>
         </p:txBody>
       </p:sp>
@@ -2081,7 +1970,6 @@
               <a:rPr lang="zh-CN" altLang="en-US" dirty="0"/>
               <a:t>单击此处编辑母版副标题样式</a:t>
             </a:r>
-            <a:endParaRPr lang="zh-CN" altLang="en-US" dirty="0"/>
           </a:p>
         </p:txBody>
       </p:sp>
@@ -2102,6 +1990,7 @@
           <a:p>
             <a:fld id="{FC19A4FA-3D9A-4114-B0D5-759CBD56F1AB}" type="datetimeFigureOut">
               <a:rPr lang="zh-CN" altLang="en-US" smtClean="0"/>
+              <a:t>2026/3/9</a:t>
             </a:fld>
             <a:endParaRPr lang="zh-CN" altLang="en-US"/>
           </a:p>
@@ -2143,6 +2032,7 @@
           <a:p>
             <a:fld id="{506F4176-339E-4C4B-80E4-BBE9C4467EFE}" type="slidenum">
               <a:rPr lang="zh-CN" altLang="en-US" smtClean="0"/>
+              <a:t>‹#›</a:t>
             </a:fld>
             <a:endParaRPr lang="zh-CN" altLang="en-US"/>
           </a:p>
@@ -2223,7 +2113,6 @@
               <a:rPr lang="zh-CN" altLang="en-US"/>
               <a:t>单击此处编辑母版标题样式</a:t>
             </a:r>
-            <a:endParaRPr lang="zh-CN" altLang="en-US"/>
           </a:p>
         </p:txBody>
       </p:sp>
@@ -2247,7 +2136,6 @@
               <a:rPr lang="zh-CN" altLang="en-US"/>
               <a:t>单击此处编辑母版文本样式</a:t>
             </a:r>
-            <a:endParaRPr lang="zh-CN" altLang="en-US"/>
           </a:p>
           <a:p>
             <a:pPr lvl="1"/>
@@ -2255,7 +2143,6 @@
               <a:rPr lang="zh-CN" altLang="en-US"/>
               <a:t>第二级</a:t>
             </a:r>
-            <a:endParaRPr lang="zh-CN" altLang="en-US"/>
           </a:p>
           <a:p>
             <a:pPr lvl="2"/>
@@ -2263,7 +2150,6 @@
               <a:rPr lang="zh-CN" altLang="en-US"/>
               <a:t>第三级</a:t>
             </a:r>
-            <a:endParaRPr lang="zh-CN" altLang="en-US"/>
           </a:p>
           <a:p>
             <a:pPr lvl="3"/>
@@ -2271,7 +2157,6 @@
               <a:rPr lang="zh-CN" altLang="en-US"/>
               <a:t>第四级</a:t>
             </a:r>
-            <a:endParaRPr lang="zh-CN" altLang="en-US"/>
           </a:p>
           <a:p>
             <a:pPr lvl="4"/>
@@ -2279,7 +2164,6 @@
               <a:rPr lang="zh-CN" altLang="en-US"/>
               <a:t>第五级</a:t>
             </a:r>
-            <a:endParaRPr lang="zh-CN" altLang="en-US"/>
           </a:p>
         </p:txBody>
       </p:sp>
@@ -2300,6 +2184,7 @@
           <a:p>
             <a:fld id="{FC19A4FA-3D9A-4114-B0D5-759CBD56F1AB}" type="datetimeFigureOut">
               <a:rPr lang="zh-CN" altLang="en-US" smtClean="0"/>
+              <a:t>2026/3/9</a:t>
             </a:fld>
             <a:endParaRPr lang="zh-CN" altLang="en-US"/>
           </a:p>
@@ -2341,6 +2226,7 @@
           <a:p>
             <a:fld id="{506F4176-339E-4C4B-80E4-BBE9C4467EFE}" type="slidenum">
               <a:rPr lang="zh-CN" altLang="en-US" smtClean="0"/>
+              <a:t>‹#›</a:t>
             </a:fld>
             <a:endParaRPr lang="zh-CN" altLang="en-US"/>
           </a:p>
@@ -2395,7 +2281,6 @@
               <a:rPr lang="zh-CN" altLang="en-US"/>
               <a:t>单击此处编辑母版标题样式</a:t>
             </a:r>
-            <a:endParaRPr lang="zh-CN" altLang="en-US"/>
           </a:p>
         </p:txBody>
       </p:sp>
@@ -2424,7 +2309,6 @@
               <a:rPr lang="zh-CN" altLang="en-US"/>
               <a:t>单击此处编辑母版文本样式</a:t>
             </a:r>
-            <a:endParaRPr lang="zh-CN" altLang="en-US"/>
           </a:p>
           <a:p>
             <a:pPr lvl="1"/>
@@ -2432,7 +2316,6 @@
               <a:rPr lang="zh-CN" altLang="en-US"/>
               <a:t>第二级</a:t>
             </a:r>
-            <a:endParaRPr lang="zh-CN" altLang="en-US"/>
           </a:p>
           <a:p>
             <a:pPr lvl="2"/>
@@ -2440,7 +2323,6 @@
               <a:rPr lang="zh-CN" altLang="en-US"/>
               <a:t>第三级</a:t>
             </a:r>
-            <a:endParaRPr lang="zh-CN" altLang="en-US"/>
           </a:p>
           <a:p>
             <a:pPr lvl="3"/>
@@ -2448,7 +2330,6 @@
               <a:rPr lang="zh-CN" altLang="en-US"/>
               <a:t>第四级</a:t>
             </a:r>
-            <a:endParaRPr lang="zh-CN" altLang="en-US"/>
           </a:p>
           <a:p>
             <a:pPr lvl="4"/>
@@ -2456,7 +2337,6 @@
               <a:rPr lang="zh-CN" altLang="en-US"/>
               <a:t>第五级</a:t>
             </a:r>
-            <a:endParaRPr lang="zh-CN" altLang="en-US"/>
           </a:p>
         </p:txBody>
       </p:sp>
@@ -2477,6 +2357,7 @@
           <a:p>
             <a:fld id="{FC19A4FA-3D9A-4114-B0D5-759CBD56F1AB}" type="datetimeFigureOut">
               <a:rPr lang="zh-CN" altLang="en-US" smtClean="0"/>
+              <a:t>2026/3/9</a:t>
             </a:fld>
             <a:endParaRPr lang="zh-CN" altLang="en-US"/>
           </a:p>
@@ -2518,6 +2399,7 @@
           <a:p>
             <a:fld id="{506F4176-339E-4C4B-80E4-BBE9C4467EFE}" type="slidenum">
               <a:rPr lang="zh-CN" altLang="en-US" smtClean="0"/>
+              <a:t>‹#›</a:t>
             </a:fld>
             <a:endParaRPr lang="zh-CN" altLang="en-US"/>
           </a:p>
@@ -2572,7 +2454,6 @@
               <a:rPr lang="zh-CN" altLang="en-US" dirty="0"/>
               <a:t>单击此处编辑母版标题样式</a:t>
             </a:r>
-            <a:endParaRPr lang="zh-CN" altLang="en-US" dirty="0"/>
           </a:p>
         </p:txBody>
       </p:sp>
@@ -2612,7 +2493,6 @@
               <a:rPr lang="zh-CN" altLang="en-US" dirty="0"/>
               <a:t>单击此处编辑母版文本样式</a:t>
             </a:r>
-            <a:endParaRPr lang="zh-CN" altLang="en-US" dirty="0"/>
           </a:p>
           <a:p>
             <a:pPr lvl="1"/>
@@ -2620,7 +2500,6 @@
               <a:rPr lang="zh-CN" altLang="en-US" dirty="0"/>
               <a:t>第二级</a:t>
             </a:r>
-            <a:endParaRPr lang="zh-CN" altLang="en-US" dirty="0"/>
           </a:p>
           <a:p>
             <a:pPr lvl="2"/>
@@ -2628,7 +2507,6 @@
               <a:rPr lang="zh-CN" altLang="en-US" dirty="0"/>
               <a:t>第三级</a:t>
             </a:r>
-            <a:endParaRPr lang="zh-CN" altLang="en-US" dirty="0"/>
           </a:p>
           <a:p>
             <a:pPr lvl="3"/>
@@ -2636,7 +2514,6 @@
               <a:rPr lang="zh-CN" altLang="en-US" dirty="0"/>
               <a:t>第四级</a:t>
             </a:r>
-            <a:endParaRPr lang="zh-CN" altLang="en-US" dirty="0"/>
           </a:p>
           <a:p>
             <a:pPr lvl="4"/>
@@ -2644,7 +2521,6 @@
               <a:rPr lang="zh-CN" altLang="en-US" dirty="0"/>
               <a:t>第五级</a:t>
             </a:r>
-            <a:endParaRPr lang="zh-CN" altLang="en-US" dirty="0"/>
           </a:p>
         </p:txBody>
       </p:sp>
@@ -2665,6 +2541,7 @@
           <a:p>
             <a:fld id="{FC19A4FA-3D9A-4114-B0D5-759CBD56F1AB}" type="datetimeFigureOut">
               <a:rPr lang="zh-CN" altLang="en-US" smtClean="0"/>
+              <a:t>2026/3/9</a:t>
             </a:fld>
             <a:endParaRPr lang="zh-CN" altLang="en-US"/>
           </a:p>
@@ -2706,6 +2583,7 @@
           <a:p>
             <a:fld id="{506F4176-339E-4C4B-80E4-BBE9C4467EFE}" type="slidenum">
               <a:rPr lang="zh-CN" altLang="en-US" smtClean="0"/>
+              <a:t>‹#›</a:t>
             </a:fld>
             <a:endParaRPr lang="zh-CN" altLang="en-US"/>
           </a:p>
@@ -2788,7 +2666,6 @@
               <a:rPr lang="zh-CN" altLang="en-US"/>
               <a:t>单击此处编辑母版标题样式</a:t>
             </a:r>
-            <a:endParaRPr lang="zh-CN" altLang="en-US"/>
           </a:p>
         </p:txBody>
       </p:sp>
@@ -2817,7 +2694,6 @@
               <a:rPr lang="zh-CN" altLang="en-US"/>
               <a:t>单击此处编辑母版文本样式</a:t>
             </a:r>
-            <a:endParaRPr lang="zh-CN" altLang="en-US"/>
           </a:p>
           <a:p>
             <a:pPr lvl="1"/>
@@ -2825,7 +2701,6 @@
               <a:rPr lang="zh-CN" altLang="en-US"/>
               <a:t>第二级</a:t>
             </a:r>
-            <a:endParaRPr lang="zh-CN" altLang="en-US"/>
           </a:p>
           <a:p>
             <a:pPr lvl="2"/>
@@ -2833,7 +2708,6 @@
               <a:rPr lang="zh-CN" altLang="en-US"/>
               <a:t>第三级</a:t>
             </a:r>
-            <a:endParaRPr lang="zh-CN" altLang="en-US"/>
           </a:p>
           <a:p>
             <a:pPr lvl="3"/>
@@ -2841,7 +2715,6 @@
               <a:rPr lang="zh-CN" altLang="en-US"/>
               <a:t>第四级</a:t>
             </a:r>
-            <a:endParaRPr lang="zh-CN" altLang="en-US"/>
           </a:p>
           <a:p>
             <a:pPr lvl="4"/>
@@ -2849,7 +2722,6 @@
               <a:rPr lang="zh-CN" altLang="en-US"/>
               <a:t>第五级</a:t>
             </a:r>
-            <a:endParaRPr lang="zh-CN" altLang="en-US"/>
           </a:p>
         </p:txBody>
       </p:sp>
@@ -2878,7 +2750,6 @@
               <a:rPr lang="zh-CN" altLang="en-US"/>
               <a:t>单击此处编辑母版文本样式</a:t>
             </a:r>
-            <a:endParaRPr lang="zh-CN" altLang="en-US"/>
           </a:p>
           <a:p>
             <a:pPr lvl="1"/>
@@ -2886,7 +2757,6 @@
               <a:rPr lang="zh-CN" altLang="en-US"/>
               <a:t>第二级</a:t>
             </a:r>
-            <a:endParaRPr lang="zh-CN" altLang="en-US"/>
           </a:p>
           <a:p>
             <a:pPr lvl="2"/>
@@ -2894,7 +2764,6 @@
               <a:rPr lang="zh-CN" altLang="en-US"/>
               <a:t>第三级</a:t>
             </a:r>
-            <a:endParaRPr lang="zh-CN" altLang="en-US"/>
           </a:p>
           <a:p>
             <a:pPr lvl="3"/>
@@ -2902,7 +2771,6 @@
               <a:rPr lang="zh-CN" altLang="en-US"/>
               <a:t>第四级</a:t>
             </a:r>
-            <a:endParaRPr lang="zh-CN" altLang="en-US"/>
           </a:p>
           <a:p>
             <a:pPr lvl="4"/>
@@ -2910,7 +2778,6 @@
               <a:rPr lang="zh-CN" altLang="en-US"/>
               <a:t>第五级</a:t>
             </a:r>
-            <a:endParaRPr lang="zh-CN" altLang="en-US"/>
           </a:p>
         </p:txBody>
       </p:sp>
@@ -2931,6 +2798,7 @@
           <a:p>
             <a:fld id="{FC19A4FA-3D9A-4114-B0D5-759CBD56F1AB}" type="datetimeFigureOut">
               <a:rPr lang="zh-CN" altLang="en-US" smtClean="0"/>
+              <a:t>2026/3/9</a:t>
             </a:fld>
             <a:endParaRPr lang="zh-CN" altLang="en-US"/>
           </a:p>
@@ -2972,6 +2840,7 @@
           <a:p>
             <a:fld id="{506F4176-339E-4C4B-80E4-BBE9C4467EFE}" type="slidenum">
               <a:rPr lang="zh-CN" altLang="en-US" smtClean="0"/>
+              <a:t>‹#›</a:t>
             </a:fld>
             <a:endParaRPr lang="zh-CN" altLang="en-US"/>
           </a:p>
@@ -3054,7 +2923,6 @@
               <a:rPr lang="zh-CN" altLang="en-US"/>
               <a:t>单击此处编辑母版标题样式</a:t>
             </a:r>
-            <a:endParaRPr lang="zh-CN" altLang="en-US"/>
           </a:p>
         </p:txBody>
       </p:sp>
@@ -3120,7 +2988,6 @@
               <a:rPr lang="zh-CN" altLang="en-US"/>
               <a:t>单击此处编辑母版文本样式</a:t>
             </a:r>
-            <a:endParaRPr lang="zh-CN" altLang="en-US"/>
           </a:p>
         </p:txBody>
       </p:sp>
@@ -3149,7 +3016,6 @@
               <a:rPr lang="zh-CN" altLang="en-US"/>
               <a:t>单击此处编辑母版文本样式</a:t>
             </a:r>
-            <a:endParaRPr lang="zh-CN" altLang="en-US"/>
           </a:p>
           <a:p>
             <a:pPr lvl="1"/>
@@ -3157,7 +3023,6 @@
               <a:rPr lang="zh-CN" altLang="en-US"/>
               <a:t>第二级</a:t>
             </a:r>
-            <a:endParaRPr lang="zh-CN" altLang="en-US"/>
           </a:p>
           <a:p>
             <a:pPr lvl="2"/>
@@ -3165,7 +3030,6 @@
               <a:rPr lang="zh-CN" altLang="en-US"/>
               <a:t>第三级</a:t>
             </a:r>
-            <a:endParaRPr lang="zh-CN" altLang="en-US"/>
           </a:p>
           <a:p>
             <a:pPr lvl="3"/>
@@ -3173,7 +3037,6 @@
               <a:rPr lang="zh-CN" altLang="en-US"/>
               <a:t>第四级</a:t>
             </a:r>
-            <a:endParaRPr lang="zh-CN" altLang="en-US"/>
           </a:p>
           <a:p>
             <a:pPr lvl="4"/>
@@ -3181,7 +3044,6 @@
               <a:rPr lang="zh-CN" altLang="en-US"/>
               <a:t>第五级</a:t>
             </a:r>
-            <a:endParaRPr lang="zh-CN" altLang="en-US"/>
           </a:p>
         </p:txBody>
       </p:sp>
@@ -3247,7 +3109,6 @@
               <a:rPr lang="zh-CN" altLang="en-US"/>
               <a:t>单击此处编辑母版文本样式</a:t>
             </a:r>
-            <a:endParaRPr lang="zh-CN" altLang="en-US"/>
           </a:p>
         </p:txBody>
       </p:sp>
@@ -3276,7 +3137,6 @@
               <a:rPr lang="zh-CN" altLang="en-US"/>
               <a:t>单击此处编辑母版文本样式</a:t>
             </a:r>
-            <a:endParaRPr lang="zh-CN" altLang="en-US"/>
           </a:p>
           <a:p>
             <a:pPr lvl="1"/>
@@ -3284,7 +3144,6 @@
               <a:rPr lang="zh-CN" altLang="en-US"/>
               <a:t>第二级</a:t>
             </a:r>
-            <a:endParaRPr lang="zh-CN" altLang="en-US"/>
           </a:p>
           <a:p>
             <a:pPr lvl="2"/>
@@ -3292,7 +3151,6 @@
               <a:rPr lang="zh-CN" altLang="en-US"/>
               <a:t>第三级</a:t>
             </a:r>
-            <a:endParaRPr lang="zh-CN" altLang="en-US"/>
           </a:p>
           <a:p>
             <a:pPr lvl="3"/>
@@ -3300,7 +3158,6 @@
               <a:rPr lang="zh-CN" altLang="en-US"/>
               <a:t>第四级</a:t>
             </a:r>
-            <a:endParaRPr lang="zh-CN" altLang="en-US"/>
           </a:p>
           <a:p>
             <a:pPr lvl="4"/>
@@ -3308,7 +3165,6 @@
               <a:rPr lang="zh-CN" altLang="en-US"/>
               <a:t>第五级</a:t>
             </a:r>
-            <a:endParaRPr lang="zh-CN" altLang="en-US"/>
           </a:p>
         </p:txBody>
       </p:sp>
@@ -3329,6 +3185,7 @@
           <a:p>
             <a:fld id="{FC19A4FA-3D9A-4114-B0D5-759CBD56F1AB}" type="datetimeFigureOut">
               <a:rPr lang="zh-CN" altLang="en-US" smtClean="0"/>
+              <a:t>2026/3/9</a:t>
             </a:fld>
             <a:endParaRPr lang="zh-CN" altLang="en-US"/>
           </a:p>
@@ -3370,6 +3227,7 @@
           <a:p>
             <a:fld id="{506F4176-339E-4C4B-80E4-BBE9C4467EFE}" type="slidenum">
               <a:rPr lang="zh-CN" altLang="en-US" smtClean="0"/>
+              <a:t>‹#›</a:t>
             </a:fld>
             <a:endParaRPr lang="zh-CN" altLang="en-US"/>
           </a:p>
@@ -3456,7 +3314,6 @@
               <a:rPr lang="zh-CN" altLang="en-US"/>
               <a:t>单击此处编辑母版标题样式</a:t>
             </a:r>
-            <a:endParaRPr lang="zh-CN" altLang="en-US"/>
           </a:p>
         </p:txBody>
       </p:sp>
@@ -3576,7 +3433,6 @@
               <a:rPr lang="zh-CN" altLang="en-US"/>
               <a:t>单击此处编辑母版文本样式</a:t>
             </a:r>
-            <a:endParaRPr lang="zh-CN" altLang="en-US"/>
           </a:p>
         </p:txBody>
       </p:sp>
@@ -3597,6 +3453,7 @@
           <a:p>
             <a:fld id="{FC19A4FA-3D9A-4114-B0D5-759CBD56F1AB}" type="datetimeFigureOut">
               <a:rPr lang="zh-CN" altLang="en-US" smtClean="0"/>
+              <a:t>2026/3/9</a:t>
             </a:fld>
             <a:endParaRPr lang="zh-CN" altLang="en-US"/>
           </a:p>
@@ -3638,6 +3495,7 @@
           <a:p>
             <a:fld id="{506F4176-339E-4C4B-80E4-BBE9C4467EFE}" type="slidenum">
               <a:rPr lang="zh-CN" altLang="en-US" smtClean="0"/>
+              <a:t>‹#›</a:t>
             </a:fld>
             <a:endParaRPr lang="zh-CN" altLang="en-US"/>
           </a:p>
@@ -3715,7 +3573,6 @@
               <a:rPr lang="zh-CN" altLang="en-US"/>
               <a:t>单击此处编辑母版标题样式</a:t>
             </a:r>
-            <a:endParaRPr lang="zh-CN" altLang="en-US"/>
           </a:p>
         </p:txBody>
       </p:sp>
@@ -3736,6 +3593,7 @@
           <a:p>
             <a:fld id="{FC19A4FA-3D9A-4114-B0D5-759CBD56F1AB}" type="datetimeFigureOut">
               <a:rPr lang="zh-CN" altLang="en-US" smtClean="0"/>
+              <a:t>2026/3/9</a:t>
             </a:fld>
             <a:endParaRPr lang="zh-CN" altLang="en-US"/>
           </a:p>
@@ -3777,6 +3635,7 @@
           <a:p>
             <a:fld id="{506F4176-339E-4C4B-80E4-BBE9C4467EFE}" type="slidenum">
               <a:rPr lang="zh-CN" altLang="en-US" smtClean="0"/>
+              <a:t>‹#›</a:t>
             </a:fld>
             <a:endParaRPr lang="zh-CN" altLang="en-US"/>
           </a:p>
@@ -3824,6 +3683,7 @@
           <a:p>
             <a:fld id="{FC19A4FA-3D9A-4114-B0D5-759CBD56F1AB}" type="datetimeFigureOut">
               <a:rPr lang="zh-CN" altLang="en-US" smtClean="0"/>
+              <a:t>2026/3/9</a:t>
             </a:fld>
             <a:endParaRPr lang="zh-CN" altLang="en-US"/>
           </a:p>
@@ -3865,6 +3725,7 @@
           <a:p>
             <a:fld id="{506F4176-339E-4C4B-80E4-BBE9C4467EFE}" type="slidenum">
               <a:rPr lang="zh-CN" altLang="en-US" smtClean="0"/>
+              <a:t>‹#›</a:t>
             </a:fld>
             <a:endParaRPr lang="zh-CN" altLang="en-US"/>
           </a:p>
@@ -3923,7 +3784,6 @@
               <a:rPr lang="zh-CN" altLang="en-US"/>
               <a:t>单击此处编辑母版标题样式</a:t>
             </a:r>
-            <a:endParaRPr lang="zh-CN" altLang="en-US"/>
           </a:p>
         </p:txBody>
       </p:sp>
@@ -3980,7 +3840,6 @@
               <a:rPr lang="zh-CN" altLang="en-US"/>
               <a:t>单击此处编辑母版文本样式</a:t>
             </a:r>
-            <a:endParaRPr lang="zh-CN" altLang="en-US"/>
           </a:p>
           <a:p>
             <a:pPr lvl="1"/>
@@ -3988,7 +3847,6 @@
               <a:rPr lang="zh-CN" altLang="en-US"/>
               <a:t>第二级</a:t>
             </a:r>
-            <a:endParaRPr lang="zh-CN" altLang="en-US"/>
           </a:p>
           <a:p>
             <a:pPr lvl="2"/>
@@ -3996,7 +3854,6 @@
               <a:rPr lang="zh-CN" altLang="en-US"/>
               <a:t>第三级</a:t>
             </a:r>
-            <a:endParaRPr lang="zh-CN" altLang="en-US"/>
           </a:p>
           <a:p>
             <a:pPr lvl="3"/>
@@ -4004,7 +3861,6 @@
               <a:rPr lang="zh-CN" altLang="en-US"/>
               <a:t>第四级</a:t>
             </a:r>
-            <a:endParaRPr lang="zh-CN" altLang="en-US"/>
           </a:p>
           <a:p>
             <a:pPr lvl="4"/>
@@ -4012,7 +3868,6 @@
               <a:rPr lang="zh-CN" altLang="en-US"/>
               <a:t>第五级</a:t>
             </a:r>
-            <a:endParaRPr lang="zh-CN" altLang="en-US"/>
           </a:p>
         </p:txBody>
       </p:sp>
@@ -4078,7 +3933,6 @@
               <a:rPr lang="zh-CN" altLang="en-US"/>
               <a:t>单击此处编辑母版文本样式</a:t>
             </a:r>
-            <a:endParaRPr lang="zh-CN" altLang="en-US"/>
           </a:p>
         </p:txBody>
       </p:sp>
@@ -4099,6 +3953,7 @@
           <a:p>
             <a:fld id="{FC19A4FA-3D9A-4114-B0D5-759CBD56F1AB}" type="datetimeFigureOut">
               <a:rPr lang="zh-CN" altLang="en-US" smtClean="0"/>
+              <a:t>2026/3/9</a:t>
             </a:fld>
             <a:endParaRPr lang="zh-CN" altLang="en-US"/>
           </a:p>
@@ -4140,6 +3995,7 @@
           <a:p>
             <a:fld id="{506F4176-339E-4C4B-80E4-BBE9C4467EFE}" type="slidenum">
               <a:rPr lang="zh-CN" altLang="en-US" smtClean="0"/>
+              <a:t>‹#›</a:t>
             </a:fld>
             <a:endParaRPr lang="zh-CN" altLang="en-US"/>
           </a:p>
@@ -4198,7 +4054,6 @@
               <a:rPr lang="zh-CN" altLang="en-US"/>
               <a:t>单击此处编辑母版标题样式</a:t>
             </a:r>
-            <a:endParaRPr lang="zh-CN" altLang="en-US"/>
           </a:p>
         </p:txBody>
       </p:sp>
@@ -4325,7 +4180,6 @@
               <a:rPr lang="zh-CN" altLang="en-US"/>
               <a:t>单击此处编辑母版文本样式</a:t>
             </a:r>
-            <a:endParaRPr lang="zh-CN" altLang="en-US"/>
           </a:p>
         </p:txBody>
       </p:sp>
@@ -4346,6 +4200,7 @@
           <a:p>
             <a:fld id="{FC19A4FA-3D9A-4114-B0D5-759CBD56F1AB}" type="datetimeFigureOut">
               <a:rPr lang="zh-CN" altLang="en-US" smtClean="0"/>
+              <a:t>2026/3/9</a:t>
             </a:fld>
             <a:endParaRPr lang="zh-CN" altLang="en-US"/>
           </a:p>
@@ -4387,6 +4242,7 @@
           <a:p>
             <a:fld id="{506F4176-339E-4C4B-80E4-BBE9C4467EFE}" type="slidenum">
               <a:rPr lang="zh-CN" altLang="en-US" smtClean="0"/>
+              <a:t>‹#›</a:t>
             </a:fld>
             <a:endParaRPr lang="zh-CN" altLang="en-US"/>
           </a:p>
@@ -4451,7 +4307,6 @@
               <a:rPr lang="zh-CN" altLang="en-US" dirty="0"/>
               <a:t>单击此处编辑母版标题样式</a:t>
             </a:r>
-            <a:endParaRPr lang="zh-CN" altLang="en-US" dirty="0"/>
           </a:p>
         </p:txBody>
       </p:sp>
@@ -4485,7 +4340,6 @@
               <a:rPr lang="zh-CN" altLang="en-US" dirty="0"/>
               <a:t>单击此处编辑母版文本样式</a:t>
             </a:r>
-            <a:endParaRPr lang="zh-CN" altLang="en-US" dirty="0"/>
           </a:p>
           <a:p>
             <a:pPr lvl="1"/>
@@ -4493,7 +4347,6 @@
               <a:rPr lang="zh-CN" altLang="en-US" dirty="0"/>
               <a:t>第二级</a:t>
             </a:r>
-            <a:endParaRPr lang="zh-CN" altLang="en-US" dirty="0"/>
           </a:p>
           <a:p>
             <a:pPr lvl="2"/>
@@ -4501,7 +4354,6 @@
               <a:rPr lang="zh-CN" altLang="en-US" dirty="0"/>
               <a:t>第三级</a:t>
             </a:r>
-            <a:endParaRPr lang="zh-CN" altLang="en-US" dirty="0"/>
           </a:p>
           <a:p>
             <a:pPr lvl="3"/>
@@ -4509,7 +4361,6 @@
               <a:rPr lang="zh-CN" altLang="en-US" dirty="0"/>
               <a:t>第四级</a:t>
             </a:r>
-            <a:endParaRPr lang="zh-CN" altLang="en-US" dirty="0"/>
           </a:p>
           <a:p>
             <a:pPr lvl="4"/>
@@ -4517,7 +4368,6 @@
               <a:rPr lang="zh-CN" altLang="en-US" dirty="0"/>
               <a:t>第五级</a:t>
             </a:r>
-            <a:endParaRPr lang="zh-CN" altLang="en-US" dirty="0"/>
           </a:p>
         </p:txBody>
       </p:sp>
@@ -4556,6 +4406,7 @@
           <a:p>
             <a:fld id="{FC19A4FA-3D9A-4114-B0D5-759CBD56F1AB}" type="datetimeFigureOut">
               <a:rPr lang="zh-CN" altLang="en-US" smtClean="0"/>
+              <a:t>2026/3/9</a:t>
             </a:fld>
             <a:endParaRPr lang="zh-CN" altLang="en-US"/>
           </a:p>
@@ -4633,6 +4484,7 @@
           <a:p>
             <a:fld id="{506F4176-339E-4C4B-80E4-BBE9C4467EFE}" type="slidenum">
               <a:rPr lang="zh-CN" altLang="en-US" smtClean="0"/>
+              <a:t>‹#›</a:t>
             </a:fld>
             <a:endParaRPr lang="zh-CN" altLang="en-US"/>
           </a:p>
@@ -4647,7 +4499,7 @@
           <p:nvPr userDrawn="1"/>
         </p:nvPicPr>
         <p:blipFill>
-          <a:blip r:embed="rId12" cstate="print">
+          <a:blip r:embed="rId13" cstate="print">
             <a:extLst>
               <a:ext uri="{28A0092B-C50C-407E-A947-70E740481C1C}">
                 <a14:useLocalDpi xmlns:a14="http://schemas.microsoft.com/office/drawing/2010/main" val="0"/>
@@ -5290,11 +5142,6 @@
               </a:rPr>
               <a:t>(d)</a:t>
             </a:r>
-            <a:endParaRPr lang="en-US" altLang="zh-CN" sz="2400" dirty="0">
-              <a:solidFill>
-                <a:prstClr val="black"/>
-              </a:solidFill>
-            </a:endParaRPr>
           </a:p>
         </p:txBody>
       </p:sp>
@@ -5344,11 +5191,6 @@
               </a:rPr>
               <a:t>&gt;</a:t>
             </a:r>
-            <a:endParaRPr lang="en-US" altLang="zh-CN" sz="2400" b="1" dirty="0">
-              <a:solidFill>
-                <a:prstClr val="black"/>
-              </a:solidFill>
-            </a:endParaRPr>
           </a:p>
         </p:txBody>
       </p:sp>
@@ -5618,7 +5460,6 @@
               <a:rPr lang="en-US" altLang="zh-CN" sz="1600" dirty="0"/>
               <a:t>#include &lt;iostream&gt;</a:t>
             </a:r>
-            <a:endParaRPr lang="en-US" altLang="zh-CN" sz="1600" dirty="0"/>
           </a:p>
           <a:p>
             <a:r>
@@ -5633,14 +5474,12 @@
               <a:rPr lang="en-US" altLang="zh-CN" sz="1600" b="1" dirty="0"/>
               <a:t>&gt;</a:t>
             </a:r>
-            <a:endParaRPr lang="en-US" altLang="zh-CN" sz="1600" b="1" dirty="0"/>
           </a:p>
           <a:p>
             <a:r>
               <a:rPr lang="en-US" altLang="zh-CN" sz="1600" dirty="0"/>
               <a:t>using namespace std;</a:t>
             </a:r>
-            <a:endParaRPr lang="en-US" altLang="zh-CN" sz="1600" dirty="0"/>
           </a:p>
           <a:p>
             <a:endParaRPr lang="en-US" altLang="zh-CN" sz="1600" dirty="0"/>
@@ -5650,14 +5489,12 @@
               <a:rPr lang="en-US" altLang="zh-CN" sz="1600" dirty="0"/>
               <a:t>int main()</a:t>
             </a:r>
-            <a:endParaRPr lang="en-US" altLang="zh-CN" sz="1600" dirty="0"/>
           </a:p>
           <a:p>
             <a:r>
               <a:rPr lang="en-US" altLang="zh-CN" sz="1600" dirty="0"/>
               <a:t>{</a:t>
             </a:r>
-            <a:endParaRPr lang="en-US" altLang="zh-CN" sz="1600" dirty="0"/>
           </a:p>
           <a:p>
             <a:r>
@@ -5696,7 +5533,6 @@
               <a:rPr lang="en-US" altLang="zh-CN" sz="1600" dirty="0"/>
               <a:t>);</a:t>
             </a:r>
-            <a:endParaRPr lang="en-US" altLang="zh-CN" sz="1600" dirty="0"/>
           </a:p>
           <a:p>
             <a:r>
@@ -5735,7 +5571,6 @@
               <a:rPr lang="en-US" altLang="zh-CN" sz="1600" dirty="0"/>
               <a:t>;</a:t>
             </a:r>
-            <a:endParaRPr lang="en-US" altLang="zh-CN" sz="1600" dirty="0"/>
           </a:p>
           <a:p>
             <a:endParaRPr lang="en-US" altLang="zh-CN" sz="1600" dirty="0"/>
@@ -5761,7 +5596,6 @@
               <a:rPr lang="en-US" altLang="zh-CN" sz="1600" dirty="0"/>
               <a:t>;</a:t>
             </a:r>
-            <a:endParaRPr lang="en-US" altLang="zh-CN" sz="1600" dirty="0"/>
           </a:p>
           <a:p>
             <a:r>
@@ -5800,7 +5634,6 @@
               <a:rPr lang="en-US" altLang="zh-CN" sz="1600" dirty="0"/>
               <a:t>;</a:t>
             </a:r>
-            <a:endParaRPr lang="en-US" altLang="zh-CN" sz="1600" dirty="0"/>
           </a:p>
           <a:p>
             <a:r>
@@ -5839,7 +5672,6 @@
               <a:rPr lang="en-US" altLang="zh-CN" sz="1600" dirty="0"/>
               <a:t>;</a:t>
             </a:r>
-            <a:endParaRPr lang="en-US" altLang="zh-CN" sz="1600" dirty="0"/>
           </a:p>
           <a:p>
             <a:endParaRPr lang="en-US" altLang="zh-CN" sz="1600" dirty="0"/>
@@ -5865,7 +5697,6 @@
               <a:rPr lang="en-US" altLang="zh-CN" sz="1600" dirty="0"/>
               <a:t>;</a:t>
             </a:r>
-            <a:endParaRPr lang="en-US" altLang="zh-CN" sz="1600" dirty="0"/>
           </a:p>
           <a:p>
             <a:r>
@@ -5904,7 +5735,6 @@
               <a:rPr lang="en-US" altLang="zh-CN" sz="1600" dirty="0"/>
               <a:t>;</a:t>
             </a:r>
-            <a:endParaRPr lang="en-US" altLang="zh-CN" sz="1600" dirty="0"/>
           </a:p>
           <a:p>
             <a:r>
@@ -5943,7 +5773,6 @@
               <a:rPr lang="en-US" altLang="zh-CN" sz="1600" dirty="0"/>
               <a:t>;</a:t>
             </a:r>
-            <a:endParaRPr lang="en-US" altLang="zh-CN" sz="1600" dirty="0"/>
           </a:p>
           <a:p>
             <a:endParaRPr lang="en-US" altLang="zh-CN" sz="1600" dirty="0"/>
@@ -5969,7 +5798,6 @@
               <a:rPr lang="en-US" altLang="zh-CN" sz="1600" dirty="0"/>
               <a:t>::fixed);</a:t>
             </a:r>
-            <a:endParaRPr lang="en-US" altLang="zh-CN" sz="1600" dirty="0"/>
           </a:p>
           <a:p>
             <a:r>
@@ -6008,7 +5836,6 @@
               <a:rPr lang="en-US" altLang="zh-CN" sz="1600" dirty="0"/>
               <a:t>;</a:t>
             </a:r>
-            <a:endParaRPr lang="en-US" altLang="zh-CN" sz="1600" dirty="0"/>
           </a:p>
           <a:p>
             <a:endParaRPr lang="en-US" altLang="zh-CN" sz="1600" dirty="0"/>
@@ -6018,7 +5845,6 @@
               <a:rPr lang="en-US" altLang="zh-CN" sz="1600" dirty="0"/>
               <a:t>    return 0;</a:t>
             </a:r>
-            <a:endParaRPr lang="en-US" altLang="zh-CN" sz="1600" dirty="0"/>
           </a:p>
           <a:p>
             <a:r>
@@ -6038,7 +5864,7 @@
           <p:nvPr/>
         </p:nvPicPr>
         <p:blipFill>
-          <a:blip r:embed="rId1"/>
+          <a:blip r:embed="rId3"/>
           <a:stretch>
             <a:fillRect/>
           </a:stretch>
@@ -6940,7 +6766,7 @@
           <p:nvPr/>
         </p:nvPicPr>
         <p:blipFill>
-          <a:blip r:embed="rId1">
+          <a:blip r:embed="rId3">
             <a:extLst>
               <a:ext uri="{28A0092B-C50C-407E-A947-70E740481C1C}">
                 <a14:useLocalDpi xmlns:a14="http://schemas.microsoft.com/office/drawing/2010/main" val="0"/>
@@ -7004,7 +6830,7 @@
           <p:nvPr/>
         </p:nvPicPr>
         <p:blipFill>
-          <a:blip r:embed="rId2">
+          <a:blip r:embed="rId4">
             <a:extLst>
               <a:ext uri="{28A0092B-C50C-407E-A947-70E740481C1C}">
                 <a14:useLocalDpi xmlns:a14="http://schemas.microsoft.com/office/drawing/2010/main" val="0"/>
@@ -7082,7 +6908,7 @@
             <p:nvPr/>
           </p:nvPicPr>
           <p:blipFill>
-            <a:blip r:embed="rId3">
+            <a:blip r:embed="rId5">
               <a:extLst>
                 <a:ext uri="{28A0092B-C50C-407E-A947-70E740481C1C}">
                   <a14:useLocalDpi xmlns:a14="http://schemas.microsoft.com/office/drawing/2010/main" val="0"/>
@@ -7191,7 +7017,7 @@
             <p:nvPr/>
           </p:nvPicPr>
           <p:blipFill>
-            <a:blip r:embed="rId4">
+            <a:blip r:embed="rId6">
               <a:extLst>
                 <a:ext uri="{28A0092B-C50C-407E-A947-70E740481C1C}">
                   <a14:useLocalDpi xmlns:a14="http://schemas.microsoft.com/office/drawing/2010/main" val="0"/>
@@ -7663,3343 +7489,6 @@
         <p:cNvGrpSpPr/>
         <p:nvPr/>
       </p:nvGrpSpPr>
-      <p:grpSpPr/>
-      <p:sp>
-        <p:nvSpPr>
-          <p:cNvPr id="2" name="标题 1"/>
-          <p:cNvSpPr>
-            <a:spLocks noGrp="1"/>
-          </p:cNvSpPr>
-          <p:nvPr>
-            <p:ph type="title"/>
-          </p:nvPr>
-        </p:nvSpPr>
-        <p:spPr/>
-        <p:txBody>
-          <a:bodyPr/>
-          <a:p>
-            <a:r>
-              <a:rPr lang="en-US" altLang="zh-CN"/>
-              <a:t>2. </a:t>
-            </a:r>
-            <a:r>
-              <a:rPr lang="en-US" altLang="zh-CN" b="1" dirty="0">
-                <a:sym typeface="+mn-ea"/>
-              </a:rPr>
-              <a:t>Debug </a:t>
-            </a:r>
-            <a:r>
-              <a:rPr lang="en-US" altLang="zh-CN" dirty="0">
-                <a:sym typeface="+mn-ea"/>
-              </a:rPr>
-              <a:t>C/C++ by using gdb in VScode</a:t>
-            </a:r>
-            <a:endParaRPr lang="en-US" altLang="zh-CN"/>
-          </a:p>
-        </p:txBody>
-      </p:sp>
-      <p:sp>
-        <p:nvSpPr>
-          <p:cNvPr id="3" name="内容占位符 2"/>
-          <p:cNvSpPr>
-            <a:spLocks noGrp="1"/>
-          </p:cNvSpPr>
-          <p:nvPr>
-            <p:ph idx="1"/>
-          </p:nvPr>
-        </p:nvSpPr>
-        <p:spPr>
-          <a:xfrm>
-            <a:off x="508000" y="1327150"/>
-            <a:ext cx="7114540" cy="4850130"/>
-          </a:xfrm>
-        </p:spPr>
-        <p:txBody>
-          <a:bodyPr/>
-          <a:p>
-            <a:r>
-              <a:rPr lang="en-US" altLang="zh-CN"/>
-              <a:t>2.1 </a:t>
-            </a:r>
-            <a:r>
-              <a:rPr lang="en-US" altLang="zh-CN" b="1"/>
-              <a:t>Install “gdb” (the debug tool of  C/C++)</a:t>
-            </a:r>
-            <a:endParaRPr lang="en-US" altLang="zh-CN" b="1"/>
-          </a:p>
-          <a:p>
-            <a:pPr lvl="1"/>
-            <a:r>
-              <a:rPr lang="en-US" altLang="zh-CN"/>
-              <a:t>using cmd “</a:t>
-            </a:r>
-            <a:r>
-              <a:rPr lang="en-US" altLang="zh-CN" b="1"/>
-              <a:t>which gdb</a:t>
-            </a:r>
-            <a:r>
-              <a:rPr lang="en-US" altLang="zh-CN"/>
-              <a:t>” to check whether gdb is installed or no</a:t>
-            </a:r>
-            <a:endParaRPr lang="en-US" altLang="zh-CN"/>
-          </a:p>
-          <a:p>
-            <a:pPr lvl="2"/>
-            <a:r>
-              <a:rPr lang="en-US" altLang="zh-CN"/>
-              <a:t>if there is no info about gbd after running command “</a:t>
-            </a:r>
-            <a:r>
-              <a:rPr lang="en-US" altLang="zh-CN" b="1"/>
-              <a:t>which gdb</a:t>
-            </a:r>
-            <a:r>
-              <a:rPr lang="en-US" altLang="zh-CN"/>
-              <a:t>”, it means that gdb is not installed, then</a:t>
-            </a:r>
-            <a:endParaRPr lang="en-US" altLang="zh-CN"/>
-          </a:p>
-          <a:p>
-            <a:pPr lvl="3"/>
-            <a:r>
-              <a:rPr lang="en-US" altLang="zh-CN">
-                <a:sym typeface="+mn-ea"/>
-              </a:rPr>
-              <a:t>1. using “</a:t>
-            </a:r>
-            <a:r>
-              <a:rPr lang="en-US" altLang="zh-CN" sz="2400" b="1">
-                <a:sym typeface="+mn-ea"/>
-              </a:rPr>
-              <a:t>sudo apt undate</a:t>
-            </a:r>
-            <a:r>
-              <a:rPr lang="en-US" altLang="zh-CN">
-                <a:sym typeface="+mn-ea"/>
-              </a:rPr>
-              <a:t>” to update package list</a:t>
-            </a:r>
-            <a:endParaRPr lang="en-US" altLang="zh-CN"/>
-          </a:p>
-          <a:p>
-            <a:pPr lvl="3"/>
-            <a:r>
-              <a:rPr lang="en-US" altLang="zh-CN">
-                <a:sym typeface="+mn-ea"/>
-              </a:rPr>
-              <a:t>2. using “</a:t>
-            </a:r>
-            <a:r>
-              <a:rPr lang="en-US" altLang="zh-CN" sz="2400" b="1">
-                <a:sym typeface="+mn-ea"/>
-              </a:rPr>
-              <a:t>sudo apt install gdb</a:t>
-            </a:r>
-            <a:r>
-              <a:rPr lang="en-US" altLang="zh-CN">
-                <a:sym typeface="+mn-ea"/>
-              </a:rPr>
-              <a:t>” to install gdb</a:t>
-            </a:r>
-            <a:endParaRPr lang="en-US" altLang="zh-CN">
-              <a:sym typeface="+mn-ea"/>
-            </a:endParaRPr>
-          </a:p>
-          <a:p>
-            <a:pPr lvl="3"/>
-            <a:endParaRPr lang="en-US" altLang="zh-CN"/>
-          </a:p>
-          <a:p>
-            <a:pPr lvl="2"/>
-            <a:r>
-              <a:rPr lang="en-US" altLang="zh-CN"/>
-              <a:t>If the installation directory of gdb is displayed after running  command “</a:t>
-            </a:r>
-            <a:r>
-              <a:rPr lang="en-US" altLang="zh-CN" b="1"/>
-              <a:t>which gdb</a:t>
-            </a:r>
-            <a:r>
-              <a:rPr lang="en-US" altLang="zh-CN"/>
-              <a:t>” is executed, it means that gdb has been successfully installed.</a:t>
-            </a:r>
-            <a:endParaRPr lang="en-US" altLang="zh-CN"/>
-          </a:p>
-          <a:p>
-            <a:pPr marL="457200" lvl="1" indent="0">
-              <a:buNone/>
-            </a:pPr>
-            <a:endParaRPr lang="en-US" altLang="zh-CN"/>
-          </a:p>
-        </p:txBody>
-      </p:sp>
-      <p:pic>
-        <p:nvPicPr>
-          <p:cNvPr id="5" name="图片 4"/>
-          <p:cNvPicPr>
-            <a:picLocks noChangeAspect="1"/>
-          </p:cNvPicPr>
-          <p:nvPr/>
-        </p:nvPicPr>
-        <p:blipFill>
-          <a:blip r:embed="rId1"/>
-          <a:stretch>
-            <a:fillRect/>
-          </a:stretch>
-        </p:blipFill>
-        <p:spPr>
-          <a:xfrm>
-            <a:off x="7513320" y="1734820"/>
-            <a:ext cx="4378960" cy="1627505"/>
-          </a:xfrm>
-          <a:prstGeom prst="rect">
-            <a:avLst/>
-          </a:prstGeom>
-        </p:spPr>
-      </p:pic>
-      <p:pic>
-        <p:nvPicPr>
-          <p:cNvPr id="6" name="图片 5"/>
-          <p:cNvPicPr>
-            <a:picLocks noChangeAspect="1"/>
-          </p:cNvPicPr>
-          <p:nvPr>
-            <p:custDataLst>
-              <p:tags r:id="rId2"/>
-            </p:custDataLst>
-          </p:nvPr>
-        </p:nvPicPr>
-        <p:blipFill>
-          <a:blip r:embed="rId3"/>
-          <a:stretch>
-            <a:fillRect/>
-          </a:stretch>
-        </p:blipFill>
-        <p:spPr>
-          <a:xfrm>
-            <a:off x="7622540" y="4403090"/>
-            <a:ext cx="4269105" cy="581660"/>
-          </a:xfrm>
-          <a:prstGeom prst="rect">
-            <a:avLst/>
-          </a:prstGeom>
-        </p:spPr>
-      </p:pic>
-    </p:spTree>
-  </p:cSld>
-  <p:clrMapOvr>
-    <a:masterClrMapping/>
-  </p:clrMapOvr>
-</p:sld>
-</file>
-
-<file path=ppt/slides/slide13.xml><?xml version="1.0" encoding="utf-8"?>
-<p:sld xmlns:a="http://schemas.openxmlformats.org/drawingml/2006/main" xmlns:r="http://schemas.openxmlformats.org/officeDocument/2006/relationships" xmlns:p="http://schemas.openxmlformats.org/presentationml/2006/main">
-  <p:cSld>
-    <p:spTree>
-      <p:nvGrpSpPr>
-        <p:cNvPr id="1" name=""/>
-        <p:cNvGrpSpPr/>
-        <p:nvPr/>
-      </p:nvGrpSpPr>
-      <p:grpSpPr/>
-      <p:sp>
-        <p:nvSpPr>
-          <p:cNvPr id="2" name="标题 1"/>
-          <p:cNvSpPr>
-            <a:spLocks noGrp="1"/>
-          </p:cNvSpPr>
-          <p:nvPr>
-            <p:ph type="title"/>
-          </p:nvPr>
-        </p:nvSpPr>
-        <p:spPr/>
-        <p:txBody>
-          <a:bodyPr/>
-          <a:p>
-            <a:r>
-              <a:rPr lang="en-US" altLang="zh-CN"/>
-              <a:t>commands for install gdb</a:t>
-            </a:r>
-            <a:endParaRPr lang="en-US" altLang="zh-CN"/>
-          </a:p>
-        </p:txBody>
-      </p:sp>
-      <p:pic>
-        <p:nvPicPr>
-          <p:cNvPr id="4" name="内容占位符 3"/>
-          <p:cNvPicPr>
-            <a:picLocks noChangeAspect="1"/>
-          </p:cNvPicPr>
-          <p:nvPr>
-            <p:ph idx="1"/>
-          </p:nvPr>
-        </p:nvPicPr>
-        <p:blipFill>
-          <a:blip r:embed="rId1"/>
-          <a:stretch>
-            <a:fillRect/>
-          </a:stretch>
-        </p:blipFill>
-        <p:spPr>
-          <a:xfrm>
-            <a:off x="2376170" y="1020445"/>
-            <a:ext cx="6833235" cy="5369560"/>
-          </a:xfrm>
-          <a:prstGeom prst="rect">
-            <a:avLst/>
-          </a:prstGeom>
-        </p:spPr>
-      </p:pic>
-    </p:spTree>
-  </p:cSld>
-  <p:clrMapOvr>
-    <a:masterClrMapping/>
-  </p:clrMapOvr>
-</p:sld>
-</file>
-
-<file path=ppt/slides/slide14.xml><?xml version="1.0" encoding="utf-8"?>
-<p:sld xmlns:a="http://schemas.openxmlformats.org/drawingml/2006/main" xmlns:r="http://schemas.openxmlformats.org/officeDocument/2006/relationships" xmlns:p="http://schemas.openxmlformats.org/presentationml/2006/main">
-  <p:cSld>
-    <p:spTree>
-      <p:nvGrpSpPr>
-        <p:cNvPr id="1" name=""/>
-        <p:cNvGrpSpPr/>
-        <p:nvPr/>
-      </p:nvGrpSpPr>
-      <p:grpSpPr/>
-      <p:sp>
-        <p:nvSpPr>
-          <p:cNvPr id="2" name="标题 1"/>
-          <p:cNvSpPr>
-            <a:spLocks noGrp="1"/>
-          </p:cNvSpPr>
-          <p:nvPr>
-            <p:ph type="title"/>
-          </p:nvPr>
-        </p:nvSpPr>
-        <p:spPr/>
-        <p:txBody>
-          <a:bodyPr/>
-          <a:p>
-            <a:r>
-              <a:rPr lang="en-US" altLang="zh-CN">
-                <a:sym typeface="+mn-ea"/>
-              </a:rPr>
-              <a:t>2. </a:t>
-            </a:r>
-            <a:r>
-              <a:rPr lang="en-US" altLang="zh-CN" b="1" dirty="0">
-                <a:sym typeface="+mn-ea"/>
-              </a:rPr>
-              <a:t>Debug </a:t>
-            </a:r>
-            <a:r>
-              <a:rPr lang="en-US" altLang="zh-CN" dirty="0">
-                <a:sym typeface="+mn-ea"/>
-              </a:rPr>
-              <a:t>C/C++ by using gdb in VScode</a:t>
-            </a:r>
-            <a:endParaRPr lang="en-US" altLang="zh-CN"/>
-          </a:p>
-        </p:txBody>
-      </p:sp>
-      <p:sp>
-        <p:nvSpPr>
-          <p:cNvPr id="3" name="内容占位符 2"/>
-          <p:cNvSpPr>
-            <a:spLocks noGrp="1"/>
-          </p:cNvSpPr>
-          <p:nvPr>
-            <p:ph idx="1"/>
-          </p:nvPr>
-        </p:nvSpPr>
-        <p:spPr>
-          <a:xfrm>
-            <a:off x="550545" y="1327150"/>
-            <a:ext cx="8206105" cy="4850130"/>
-          </a:xfrm>
-        </p:spPr>
-        <p:txBody>
-          <a:bodyPr/>
-          <a:p>
-            <a:r>
-              <a:rPr lang="en-US" altLang="zh-CN"/>
-              <a:t>2.2 </a:t>
-            </a:r>
-            <a:r>
-              <a:rPr lang="en-US" altLang="zh-CN"/>
-              <a:t>configure VSCode for using gdb to debug C/C++ code</a:t>
-            </a:r>
-            <a:endParaRPr lang="zh-CN" altLang="en-US"/>
-          </a:p>
-          <a:p>
-            <a:pPr lvl="1"/>
-            <a:r>
-              <a:rPr lang="en-US" altLang="zh-CN"/>
-              <a:t>create and edit “.vscode” folder and json files</a:t>
-            </a:r>
-            <a:endParaRPr lang="en-US" altLang="zh-CN"/>
-          </a:p>
-          <a:p>
-            <a:pPr lvl="2"/>
-            <a:r>
-              <a:rPr lang="en-US" altLang="zh-CN"/>
-              <a:t>step1. create a new folder named “.vscode” in the directory of C/C++ codes</a:t>
-            </a:r>
-            <a:endParaRPr lang="en-US" altLang="zh-CN"/>
-          </a:p>
-          <a:p>
-            <a:pPr lvl="2"/>
-            <a:endParaRPr lang="en-US" altLang="zh-CN" sz="1800"/>
-          </a:p>
-          <a:p>
-            <a:pPr lvl="2"/>
-            <a:r>
-              <a:rPr lang="en-US" altLang="zh-CN"/>
-              <a:t>step2. create a new json file named “launch.json” in the “.vscode” folder which is created in step1</a:t>
-            </a:r>
-            <a:endParaRPr lang="zh-CN" altLang="en-US"/>
-          </a:p>
-          <a:p>
-            <a:pPr lvl="3"/>
-            <a:r>
-              <a:rPr lang="en-US" altLang="zh-CN"/>
-              <a:t>edit “</a:t>
-            </a:r>
-            <a:r>
-              <a:rPr lang="en-US" altLang="zh-CN">
-                <a:sym typeface="+mn-ea"/>
-              </a:rPr>
-              <a:t>launch.json</a:t>
-            </a:r>
-            <a:r>
-              <a:rPr lang="en-US" altLang="zh-CN"/>
-              <a:t>” to set gdb for debugging the execute file which is created by “g++ -g" / “gcc -g”</a:t>
-            </a:r>
-            <a:endParaRPr lang="en-US" altLang="zh-CN"/>
-          </a:p>
-          <a:p>
-            <a:pPr lvl="4"/>
-            <a:r>
-              <a:rPr lang="en-US" altLang="zh-CN"/>
-              <a:t>tips: option “-g” used with gcc/g++ is to generate information for debugging  while compiling the C/C++ source code.</a:t>
-            </a:r>
-            <a:endParaRPr lang="en-US" altLang="zh-CN"/>
-          </a:p>
-        </p:txBody>
-      </p:sp>
-      <p:sp>
-        <p:nvSpPr>
-          <p:cNvPr id="4" name="文本框 3"/>
-          <p:cNvSpPr txBox="1"/>
-          <p:nvPr/>
-        </p:nvSpPr>
-        <p:spPr>
-          <a:xfrm>
-            <a:off x="2015490" y="4364038"/>
-            <a:ext cx="5080000" cy="635000"/>
-          </a:xfrm>
-          <a:prstGeom prst="rect">
-            <a:avLst/>
-          </a:prstGeom>
-        </p:spPr>
-        <p:txBody>
-          <a:bodyPr/>
-          <a:p>
-            <a:endParaRPr sz="1600"/>
-          </a:p>
-        </p:txBody>
-      </p:sp>
-      <p:sp>
-        <p:nvSpPr>
-          <p:cNvPr id="6" name="文本框 5"/>
-          <p:cNvSpPr txBox="1"/>
-          <p:nvPr/>
-        </p:nvSpPr>
-        <p:spPr>
-          <a:xfrm>
-            <a:off x="2015490" y="6246813"/>
-            <a:ext cx="5080000" cy="635000"/>
-          </a:xfrm>
-          <a:prstGeom prst="rect">
-            <a:avLst/>
-          </a:prstGeom>
-        </p:spPr>
-        <p:txBody>
-          <a:bodyPr/>
-          <a:p>
-            <a:endParaRPr sz="1600"/>
-          </a:p>
-        </p:txBody>
-      </p:sp>
-      <p:sp>
-        <p:nvSpPr>
-          <p:cNvPr id="7" name="文本框 6"/>
-          <p:cNvSpPr txBox="1"/>
-          <p:nvPr/>
-        </p:nvSpPr>
-        <p:spPr>
-          <a:xfrm>
-            <a:off x="3556000" y="1936750"/>
-            <a:ext cx="5080000" cy="635000"/>
-          </a:xfrm>
-          <a:prstGeom prst="rect">
-            <a:avLst/>
-          </a:prstGeom>
-        </p:spPr>
-        <p:txBody>
-          <a:bodyPr/>
-          <a:p>
-            <a:endParaRPr sz="1600"/>
-          </a:p>
-        </p:txBody>
-      </p:sp>
-      <p:sp>
-        <p:nvSpPr>
-          <p:cNvPr id="9" name="文本框 8"/>
-          <p:cNvSpPr txBox="1"/>
-          <p:nvPr/>
-        </p:nvSpPr>
-        <p:spPr>
-          <a:xfrm>
-            <a:off x="3556000" y="4286250"/>
-            <a:ext cx="5080000" cy="635000"/>
-          </a:xfrm>
-          <a:prstGeom prst="rect">
-            <a:avLst/>
-          </a:prstGeom>
-        </p:spPr>
-        <p:txBody>
-          <a:bodyPr/>
-          <a:p>
-            <a:endParaRPr sz="1600"/>
-          </a:p>
-        </p:txBody>
-      </p:sp>
-      <p:sp>
-        <p:nvSpPr>
-          <p:cNvPr id="10" name="文本框 9"/>
-          <p:cNvSpPr txBox="1"/>
-          <p:nvPr/>
-        </p:nvSpPr>
-        <p:spPr>
-          <a:xfrm>
-            <a:off x="6713220" y="6247130"/>
-            <a:ext cx="5108575" cy="368300"/>
-          </a:xfrm>
-          <a:prstGeom prst="rect">
-            <a:avLst/>
-          </a:prstGeom>
-          <a:noFill/>
-        </p:spPr>
-        <p:txBody>
-          <a:bodyPr wrap="square" rtlCol="0" anchor="t">
-            <a:spAutoFit/>
-          </a:bodyPr>
-          <a:p>
-            <a:r>
-              <a:rPr lang="en-US" altLang="zh-CN"/>
-              <a:t>https://code.visualstudio.com/docs/cpp/config-linux</a:t>
-            </a:r>
-            <a:endParaRPr lang="zh-CN" altLang="en-US"/>
-          </a:p>
-        </p:txBody>
-      </p:sp>
-      <p:pic>
-        <p:nvPicPr>
-          <p:cNvPr id="5" name="图片 4"/>
-          <p:cNvPicPr>
-            <a:picLocks noChangeAspect="1"/>
-          </p:cNvPicPr>
-          <p:nvPr/>
-        </p:nvPicPr>
-        <p:blipFill>
-          <a:blip r:embed="rId1"/>
-          <a:stretch>
-            <a:fillRect/>
-          </a:stretch>
-        </p:blipFill>
-        <p:spPr>
-          <a:xfrm>
-            <a:off x="9122410" y="2483485"/>
-            <a:ext cx="2616200" cy="1511300"/>
-          </a:xfrm>
-          <a:prstGeom prst="rect">
-            <a:avLst/>
-          </a:prstGeom>
-        </p:spPr>
-      </p:pic>
-    </p:spTree>
-  </p:cSld>
-  <p:clrMapOvr>
-    <a:masterClrMapping/>
-  </p:clrMapOvr>
-</p:sld>
-</file>
-
-<file path=ppt/slides/slide15.xml><?xml version="1.0" encoding="utf-8"?>
-<p:sld xmlns:a="http://schemas.openxmlformats.org/drawingml/2006/main" xmlns:r="http://schemas.openxmlformats.org/officeDocument/2006/relationships" xmlns:p="http://schemas.openxmlformats.org/presentationml/2006/main">
-  <p:cSld>
-    <p:spTree>
-      <p:nvGrpSpPr>
-        <p:cNvPr id="1" name=""/>
-        <p:cNvGrpSpPr/>
-        <p:nvPr/>
-      </p:nvGrpSpPr>
-      <p:grpSpPr/>
-      <p:sp>
-        <p:nvSpPr>
-          <p:cNvPr id="10" name="文本框 9"/>
-          <p:cNvSpPr txBox="1"/>
-          <p:nvPr/>
-        </p:nvSpPr>
-        <p:spPr>
-          <a:xfrm>
-            <a:off x="1297940" y="140970"/>
-            <a:ext cx="5154295" cy="6311900"/>
-          </a:xfrm>
-          <a:prstGeom prst="rect">
-            <a:avLst/>
-          </a:prstGeom>
-          <a:solidFill>
-            <a:schemeClr val="accent3">
-              <a:lumMod val="40000"/>
-              <a:lumOff val="60000"/>
-            </a:schemeClr>
-          </a:solidFill>
-        </p:spPr>
-        <p:txBody>
-          <a:bodyPr wrap="square" rtlCol="0">
-            <a:noAutofit/>
-          </a:bodyPr>
-          <a:p>
-            <a:r>
-              <a:rPr lang="en-US" altLang="zh-CN" sz="1400"/>
-              <a:t>{</a:t>
-            </a:r>
-            <a:endParaRPr lang="en-US" altLang="zh-CN" sz="1400"/>
-          </a:p>
-          <a:p>
-            <a:r>
-              <a:rPr lang="en-US" altLang="zh-CN" sz="1400"/>
-              <a:t>    "version": "0.2.0",</a:t>
-            </a:r>
-            <a:endParaRPr lang="en-US" altLang="zh-CN" sz="1400"/>
-          </a:p>
-          <a:p>
-            <a:r>
-              <a:rPr lang="en-US" altLang="zh-CN" sz="1400"/>
-              <a:t>    "configurations": [</a:t>
-            </a:r>
-            <a:endParaRPr lang="en-US" altLang="zh-CN" sz="1400"/>
-          </a:p>
-          <a:p>
-            <a:r>
-              <a:rPr lang="en-US" altLang="zh-CN" sz="1400"/>
-              <a:t>        {</a:t>
-            </a:r>
-            <a:endParaRPr lang="en-US" altLang="zh-CN" sz="1400"/>
-          </a:p>
-          <a:p>
-            <a:r>
-              <a:rPr lang="en-US" altLang="zh-CN" sz="1400"/>
-              <a:t>            "name": "(gdb) Launch",</a:t>
-            </a:r>
-            <a:endParaRPr lang="en-US" altLang="zh-CN" sz="1400"/>
-          </a:p>
-          <a:p>
-            <a:r>
-              <a:rPr lang="en-US" altLang="zh-CN" sz="1400"/>
-              <a:t>            "type": "cppdbg",</a:t>
-            </a:r>
-            <a:endParaRPr lang="en-US" altLang="zh-CN" sz="1400"/>
-          </a:p>
-          <a:p>
-            <a:r>
-              <a:rPr lang="en-US" altLang="zh-CN" sz="1400"/>
-              <a:t>            "request": "launch",</a:t>
-            </a:r>
-            <a:endParaRPr lang="en-US" altLang="zh-CN" sz="1400"/>
-          </a:p>
-          <a:p>
-            <a:r>
-              <a:rPr lang="en-US" altLang="zh-CN" sz="1400"/>
-              <a:t>            "program": "</a:t>
-            </a:r>
-            <a:r>
-              <a:rPr lang="en-US" altLang="zh-CN" sz="1400">
-                <a:highlight>
-                  <a:srgbClr val="FFFF00"/>
-                </a:highlight>
-              </a:rPr>
-              <a:t>${fileDirname}/${fileBasenameNoExtension}</a:t>
-            </a:r>
-            <a:r>
-              <a:rPr lang="en-US" altLang="zh-CN" sz="1400"/>
-              <a:t>",</a:t>
-            </a:r>
-            <a:endParaRPr lang="en-US" altLang="zh-CN" sz="1400"/>
-          </a:p>
-          <a:p>
-            <a:r>
-              <a:rPr lang="en-US" altLang="zh-CN" sz="1400"/>
-              <a:t>            "args": [],</a:t>
-            </a:r>
-            <a:endParaRPr lang="en-US" altLang="zh-CN" sz="1400"/>
-          </a:p>
-          <a:p>
-            <a:r>
-              <a:rPr lang="en-US" altLang="zh-CN" sz="1400"/>
-              <a:t>            "stopAtEntry": false,</a:t>
-            </a:r>
-            <a:endParaRPr lang="en-US" altLang="zh-CN" sz="1400"/>
-          </a:p>
-          <a:p>
-            <a:r>
-              <a:rPr lang="en-US" altLang="zh-CN" sz="1400"/>
-              <a:t>            "cwd": "${workspaceFolder}",</a:t>
-            </a:r>
-            <a:endParaRPr lang="en-US" altLang="zh-CN" sz="1400"/>
-          </a:p>
-          <a:p>
-            <a:r>
-              <a:rPr lang="en-US" altLang="zh-CN" sz="1400"/>
-              <a:t>            "environment": [],</a:t>
-            </a:r>
-            <a:endParaRPr lang="en-US" altLang="zh-CN" sz="1400"/>
-          </a:p>
-          <a:p>
-            <a:r>
-              <a:rPr lang="en-US" altLang="zh-CN" sz="1400"/>
-              <a:t>            "externalConsole": false,</a:t>
-            </a:r>
-            <a:endParaRPr lang="en-US" altLang="zh-CN" sz="1400"/>
-          </a:p>
-          <a:p>
-            <a:r>
-              <a:rPr lang="en-US" altLang="zh-CN" sz="1400"/>
-              <a:t>            "MIMode": "gdb",</a:t>
-            </a:r>
-            <a:endParaRPr lang="en-US" altLang="zh-CN" sz="1400"/>
-          </a:p>
-          <a:p>
-            <a:r>
-              <a:rPr lang="en-US" altLang="zh-CN" sz="1400"/>
-              <a:t>            "setupCommands": [</a:t>
-            </a:r>
-            <a:endParaRPr lang="en-US" altLang="zh-CN" sz="1400"/>
-          </a:p>
-          <a:p>
-            <a:r>
-              <a:rPr lang="en-US" altLang="zh-CN" sz="1400"/>
-              <a:t>                {</a:t>
-            </a:r>
-            <a:endParaRPr lang="en-US" altLang="zh-CN" sz="1400"/>
-          </a:p>
-          <a:p>
-            <a:r>
-              <a:rPr lang="en-US" altLang="zh-CN" sz="1400"/>
-              <a:t>                    "description": "Enable pretty-printing for gdb",</a:t>
-            </a:r>
-            <a:endParaRPr lang="en-US" altLang="zh-CN" sz="1400"/>
-          </a:p>
-          <a:p>
-            <a:r>
-              <a:rPr lang="en-US" altLang="zh-CN" sz="1400"/>
-              <a:t>                    "text": "-enable-pretty-printing",</a:t>
-            </a:r>
-            <a:endParaRPr lang="en-US" altLang="zh-CN" sz="1400"/>
-          </a:p>
-          <a:p>
-            <a:r>
-              <a:rPr lang="en-US" altLang="zh-CN" sz="1400"/>
-              <a:t>                    "ignoreFailures": true</a:t>
-            </a:r>
-            <a:endParaRPr lang="en-US" altLang="zh-CN" sz="1400"/>
-          </a:p>
-          <a:p>
-            <a:r>
-              <a:rPr lang="en-US" altLang="zh-CN" sz="1400"/>
-              <a:t>                },</a:t>
-            </a:r>
-            <a:endParaRPr lang="en-US" altLang="zh-CN" sz="1400"/>
-          </a:p>
-          <a:p>
-            <a:r>
-              <a:rPr lang="en-US" altLang="zh-CN" sz="1400"/>
-              <a:t>                {</a:t>
-            </a:r>
-            <a:endParaRPr lang="en-US" altLang="zh-CN" sz="1400"/>
-          </a:p>
-          <a:p>
-            <a:r>
-              <a:rPr lang="en-US" altLang="zh-CN" sz="1400"/>
-              <a:t>                    "description": "Set Disassembly Flavor to Intel",</a:t>
-            </a:r>
-            <a:endParaRPr lang="en-US" altLang="zh-CN" sz="1400"/>
-          </a:p>
-          <a:p>
-            <a:r>
-              <a:rPr lang="en-US" altLang="zh-CN" sz="1400"/>
-              <a:t>                    "text": "-gdb-set disassembly-flavor intel",</a:t>
-            </a:r>
-            <a:endParaRPr lang="en-US" altLang="zh-CN" sz="1400"/>
-          </a:p>
-          <a:p>
-            <a:r>
-              <a:rPr lang="en-US" altLang="zh-CN" sz="1400"/>
-              <a:t>                    "ignoreFailures": true</a:t>
-            </a:r>
-            <a:endParaRPr lang="en-US" altLang="zh-CN" sz="1400"/>
-          </a:p>
-          <a:p>
-            <a:r>
-              <a:rPr lang="en-US" altLang="zh-CN" sz="1400"/>
-              <a:t>                }</a:t>
-            </a:r>
-            <a:endParaRPr lang="en-US" altLang="zh-CN" sz="1400"/>
-          </a:p>
-          <a:p>
-            <a:r>
-              <a:rPr lang="en-US" altLang="zh-CN" sz="1400"/>
-              <a:t>            ]</a:t>
-            </a:r>
-            <a:endParaRPr lang="en-US" altLang="zh-CN" sz="1400"/>
-          </a:p>
-          <a:p>
-            <a:r>
-              <a:rPr lang="en-US" altLang="zh-CN" sz="1400"/>
-              <a:t>        }</a:t>
-            </a:r>
-            <a:endParaRPr lang="en-US" altLang="zh-CN" sz="1400"/>
-          </a:p>
-          <a:p>
-            <a:r>
-              <a:rPr lang="en-US" altLang="zh-CN" sz="1400"/>
-              <a:t>    ]</a:t>
-            </a:r>
-            <a:endParaRPr lang="en-US" altLang="zh-CN" sz="1400"/>
-          </a:p>
-          <a:p>
-            <a:r>
-              <a:rPr lang="en-US" altLang="zh-CN" sz="1400"/>
-              <a:t>}</a:t>
-            </a:r>
-            <a:endParaRPr lang="en-US" altLang="zh-CN" sz="1400"/>
-          </a:p>
-        </p:txBody>
-      </p:sp>
-      <p:sp>
-        <p:nvSpPr>
-          <p:cNvPr id="12" name="文本框 11"/>
-          <p:cNvSpPr txBox="1"/>
-          <p:nvPr/>
-        </p:nvSpPr>
-        <p:spPr>
-          <a:xfrm>
-            <a:off x="6829425" y="1666875"/>
-            <a:ext cx="4352290" cy="922020"/>
-          </a:xfrm>
-          <a:prstGeom prst="rect">
-            <a:avLst/>
-          </a:prstGeom>
-          <a:noFill/>
-        </p:spPr>
-        <p:txBody>
-          <a:bodyPr wrap="square" rtlCol="0">
-            <a:spAutoFit/>
-          </a:bodyPr>
-          <a:p>
-            <a:r>
-              <a:rPr lang="en-US" altLang="zh-CN">
-                <a:sym typeface="+mn-ea"/>
-              </a:rPr>
-              <a:t>&lt;---    An example of </a:t>
-            </a:r>
-            <a:r>
-              <a:rPr lang="en-US" altLang="zh-CN"/>
-              <a:t>launch.json</a:t>
-            </a:r>
-            <a:endParaRPr lang="en-US" altLang="zh-CN"/>
-          </a:p>
-          <a:p>
-            <a:endParaRPr lang="en-US" altLang="zh-CN"/>
-          </a:p>
-          <a:p>
-            <a:endParaRPr lang="en-US" altLang="zh-CN"/>
-          </a:p>
-        </p:txBody>
-      </p:sp>
-      <p:sp>
-        <p:nvSpPr>
-          <p:cNvPr id="14" name="文本框 13"/>
-          <p:cNvSpPr txBox="1"/>
-          <p:nvPr/>
-        </p:nvSpPr>
-        <p:spPr>
-          <a:xfrm>
-            <a:off x="6547485" y="4506595"/>
-            <a:ext cx="5210810" cy="368300"/>
-          </a:xfrm>
-          <a:prstGeom prst="rect">
-            <a:avLst/>
-          </a:prstGeom>
-          <a:noFill/>
-        </p:spPr>
-        <p:txBody>
-          <a:bodyPr wrap="square" rtlCol="0" anchor="t">
-            <a:spAutoFit/>
-          </a:bodyPr>
-          <a:p>
-            <a:r>
-              <a:rPr lang="en-US" altLang="zh-CN"/>
-              <a:t>https://code.visualstudio.com/docs/cpp/config-linux</a:t>
-            </a:r>
-            <a:endParaRPr lang="zh-CN" altLang="en-US"/>
-          </a:p>
-        </p:txBody>
-      </p:sp>
-      <p:pic>
-        <p:nvPicPr>
-          <p:cNvPr id="5" name="图片 4"/>
-          <p:cNvPicPr>
-            <a:picLocks noChangeAspect="1"/>
-          </p:cNvPicPr>
-          <p:nvPr>
-            <p:custDataLst>
-              <p:tags r:id="rId1"/>
-            </p:custDataLst>
-          </p:nvPr>
-        </p:nvPicPr>
-        <p:blipFill>
-          <a:blip r:embed="rId2"/>
-          <a:stretch>
-            <a:fillRect/>
-          </a:stretch>
-        </p:blipFill>
-        <p:spPr>
-          <a:xfrm>
-            <a:off x="7564120" y="2370455"/>
-            <a:ext cx="2616200" cy="1511300"/>
-          </a:xfrm>
-          <a:prstGeom prst="rect">
-            <a:avLst/>
-          </a:prstGeom>
-        </p:spPr>
-      </p:pic>
-    </p:spTree>
-  </p:cSld>
-  <p:clrMapOvr>
-    <a:masterClrMapping/>
-  </p:clrMapOvr>
-</p:sld>
-</file>
-
-<file path=ppt/slides/slide16.xml><?xml version="1.0" encoding="utf-8"?>
-<p:sld xmlns:a="http://schemas.openxmlformats.org/drawingml/2006/main" xmlns:r="http://schemas.openxmlformats.org/officeDocument/2006/relationships" xmlns:p="http://schemas.openxmlformats.org/presentationml/2006/main">
-  <p:cSld>
-    <p:spTree>
-      <p:nvGrpSpPr>
-        <p:cNvPr id="1" name=""/>
-        <p:cNvGrpSpPr/>
-        <p:nvPr/>
-      </p:nvGrpSpPr>
-      <p:grpSpPr/>
-      <p:sp>
-        <p:nvSpPr>
-          <p:cNvPr id="2" name="标题 1"/>
-          <p:cNvSpPr>
-            <a:spLocks noGrp="1"/>
-          </p:cNvSpPr>
-          <p:nvPr>
-            <p:ph type="title"/>
-          </p:nvPr>
-        </p:nvSpPr>
-        <p:spPr/>
-        <p:txBody>
-          <a:bodyPr/>
-          <a:p>
-            <a:r>
-              <a:rPr lang="en-US" altLang="zh-CN">
-                <a:sym typeface="+mn-ea"/>
-              </a:rPr>
-              <a:t>2. </a:t>
-            </a:r>
-            <a:r>
-              <a:rPr lang="en-US" altLang="zh-CN" b="1" dirty="0">
-                <a:sym typeface="+mn-ea"/>
-              </a:rPr>
-              <a:t>Debug </a:t>
-            </a:r>
-            <a:r>
-              <a:rPr lang="en-US" altLang="zh-CN" dirty="0">
-                <a:sym typeface="+mn-ea"/>
-              </a:rPr>
-              <a:t>C/C++ by using gdb in VScode</a:t>
-            </a:r>
-            <a:endParaRPr lang="en-US" altLang="zh-CN"/>
-          </a:p>
-        </p:txBody>
-      </p:sp>
-      <p:sp>
-        <p:nvSpPr>
-          <p:cNvPr id="3" name="内容占位符 2"/>
-          <p:cNvSpPr>
-            <a:spLocks noGrp="1"/>
-          </p:cNvSpPr>
-          <p:nvPr>
-            <p:ph idx="1"/>
-          </p:nvPr>
-        </p:nvSpPr>
-        <p:spPr>
-          <a:xfrm>
-            <a:off x="779145" y="1212215"/>
-            <a:ext cx="9176385" cy="5151120"/>
-          </a:xfrm>
-        </p:spPr>
-        <p:txBody>
-          <a:bodyPr/>
-          <a:p>
-            <a:r>
-              <a:rPr lang="en-US" altLang="zh-CN"/>
-              <a:t>2.3 lunch gdb to debug in VS Code by “Run and Debug” </a:t>
-            </a:r>
-            <a:endParaRPr lang="en-US" altLang="zh-CN"/>
-          </a:p>
-          <a:p>
-            <a:pPr lvl="1"/>
-            <a:r>
-              <a:rPr lang="en-US" altLang="zh-CN"/>
-              <a:t>compile the souce code with “</a:t>
-            </a:r>
-            <a:r>
-              <a:rPr lang="en-US" altLang="zh-CN" b="1"/>
-              <a:t>-g</a:t>
-            </a:r>
-            <a:r>
-              <a:rPr lang="en-US" altLang="zh-CN"/>
-              <a:t>” option to generate information for debug and generate the executable file</a:t>
-            </a:r>
-            <a:endParaRPr lang="en-US" altLang="zh-CN"/>
-          </a:p>
-          <a:p>
-            <a:pPr lvl="2"/>
-            <a:endParaRPr lang="en-US" altLang="zh-CN"/>
-          </a:p>
-          <a:p>
-            <a:pPr lvl="2"/>
-            <a:endParaRPr lang="en-US" altLang="zh-CN"/>
-          </a:p>
-          <a:p>
-            <a:pPr lvl="2"/>
-            <a:endParaRPr lang="en-US" altLang="zh-CN"/>
-          </a:p>
-          <a:p>
-            <a:pPr lvl="2"/>
-            <a:endParaRPr lang="en-US" altLang="zh-CN"/>
-          </a:p>
-          <a:p>
-            <a:pPr marL="457200" lvl="1" indent="0">
-              <a:buNone/>
-            </a:pPr>
-            <a:endParaRPr lang="en-US" altLang="zh-CN"/>
-          </a:p>
-        </p:txBody>
-      </p:sp>
-      <p:pic>
-        <p:nvPicPr>
-          <p:cNvPr id="5" name="图片 4"/>
-          <p:cNvPicPr/>
-          <p:nvPr/>
-        </p:nvPicPr>
-        <p:blipFill>
-          <a:blip r:embed="rId1"/>
-          <a:stretch>
-            <a:fillRect/>
-          </a:stretch>
-        </p:blipFill>
-        <p:spPr>
-          <a:xfrm>
-            <a:off x="1766570" y="2571433"/>
-            <a:ext cx="7677150" cy="1247775"/>
-          </a:xfrm>
-          <a:prstGeom prst="rect">
-            <a:avLst/>
-          </a:prstGeom>
-        </p:spPr>
-      </p:pic>
-      <p:sp>
-        <p:nvSpPr>
-          <p:cNvPr id="6" name="文本框 5"/>
-          <p:cNvSpPr txBox="1"/>
-          <p:nvPr/>
-        </p:nvSpPr>
-        <p:spPr>
-          <a:xfrm>
-            <a:off x="3381375" y="3633470"/>
-            <a:ext cx="5080000" cy="635000"/>
-          </a:xfrm>
-          <a:prstGeom prst="rect">
-            <a:avLst/>
-          </a:prstGeom>
-        </p:spPr>
-        <p:txBody>
-          <a:bodyPr/>
-          <a:p>
-            <a:endParaRPr sz="1600"/>
-          </a:p>
-        </p:txBody>
-      </p:sp>
-      <p:pic>
-        <p:nvPicPr>
-          <p:cNvPr id="7" name="图片 6"/>
-          <p:cNvPicPr/>
-          <p:nvPr/>
-        </p:nvPicPr>
-        <p:blipFill>
-          <a:blip r:embed="rId2"/>
-          <a:stretch>
-            <a:fillRect/>
-          </a:stretch>
-        </p:blipFill>
-        <p:spPr>
-          <a:xfrm>
-            <a:off x="2114550" y="4103370"/>
-            <a:ext cx="6267450" cy="2209800"/>
-          </a:xfrm>
-          <a:prstGeom prst="rect">
-            <a:avLst/>
-          </a:prstGeom>
-        </p:spPr>
-      </p:pic>
-      <p:sp>
-        <p:nvSpPr>
-          <p:cNvPr id="8" name="文本框 7"/>
-          <p:cNvSpPr txBox="1"/>
-          <p:nvPr/>
-        </p:nvSpPr>
-        <p:spPr>
-          <a:xfrm>
-            <a:off x="3381375" y="6478270"/>
-            <a:ext cx="5080000" cy="635000"/>
-          </a:xfrm>
-          <a:prstGeom prst="rect">
-            <a:avLst/>
-          </a:prstGeom>
-        </p:spPr>
-        <p:txBody>
-          <a:bodyPr/>
-          <a:p>
-            <a:endParaRPr sz="1600"/>
-          </a:p>
-        </p:txBody>
-      </p:sp>
-      <p:cxnSp>
-        <p:nvCxnSpPr>
-          <p:cNvPr id="10" name="曲线连接符 9"/>
-          <p:cNvCxnSpPr/>
-          <p:nvPr/>
-        </p:nvCxnSpPr>
-        <p:spPr>
-          <a:xfrm rot="5400000">
-            <a:off x="6671945" y="3952240"/>
-            <a:ext cx="2263140" cy="750570"/>
-          </a:xfrm>
-          <a:prstGeom prst="curvedConnector3">
-            <a:avLst>
-              <a:gd name="adj1" fmla="val 50028"/>
-            </a:avLst>
-          </a:prstGeom>
-          <a:ln w="31750" cap="rnd">
-            <a:solidFill>
-              <a:schemeClr val="accent1"/>
-            </a:solidFill>
-            <a:round/>
-            <a:tailEnd type="arrow" w="med" len="med"/>
-          </a:ln>
-        </p:spPr>
-        <p:style>
-          <a:lnRef idx="0">
-            <a:srgbClr val="FFFFFF"/>
-          </a:lnRef>
-          <a:fillRef idx="0">
-            <a:srgbClr val="FFFFFF"/>
-          </a:fillRef>
-          <a:effectRef idx="0">
-            <a:srgbClr val="FFFFFF"/>
-          </a:effectRef>
-          <a:fontRef idx="minor">
-            <a:schemeClr val="tx1"/>
-          </a:fontRef>
-        </p:style>
-      </p:cxnSp>
-      <p:cxnSp>
-        <p:nvCxnSpPr>
-          <p:cNvPr id="11" name="曲线连接符 10"/>
-          <p:cNvCxnSpPr/>
-          <p:nvPr/>
-        </p:nvCxnSpPr>
-        <p:spPr>
-          <a:xfrm rot="5400000">
-            <a:off x="5067300" y="4549140"/>
-            <a:ext cx="1748155" cy="174625"/>
-          </a:xfrm>
-          <a:prstGeom prst="curvedConnector3">
-            <a:avLst>
-              <a:gd name="adj1" fmla="val 50018"/>
-            </a:avLst>
-          </a:prstGeom>
-          <a:ln w="31750" cap="rnd">
-            <a:solidFill>
-              <a:schemeClr val="accent1"/>
-            </a:solidFill>
-            <a:round/>
-            <a:tailEnd type="arrow" w="med" len="med"/>
-          </a:ln>
-        </p:spPr>
-        <p:style>
-          <a:lnRef idx="0">
-            <a:srgbClr val="FFFFFF"/>
-          </a:lnRef>
-          <a:fillRef idx="0">
-            <a:srgbClr val="FFFFFF"/>
-          </a:fillRef>
-          <a:effectRef idx="0">
-            <a:srgbClr val="FFFFFF"/>
-          </a:effectRef>
-          <a:fontRef idx="minor">
-            <a:schemeClr val="tx1"/>
-          </a:fontRef>
-        </p:style>
-      </p:cxnSp>
-      <p:sp>
-        <p:nvSpPr>
-          <p:cNvPr id="12" name="文本框 11"/>
-          <p:cNvSpPr txBox="1"/>
-          <p:nvPr/>
-        </p:nvSpPr>
-        <p:spPr>
-          <a:xfrm>
-            <a:off x="9956165" y="1624331"/>
-            <a:ext cx="5080000" cy="635000"/>
-          </a:xfrm>
-          <a:prstGeom prst="rect">
-            <a:avLst/>
-          </a:prstGeom>
-        </p:spPr>
-        <p:txBody>
-          <a:bodyPr/>
-          <a:p>
-            <a:endParaRPr sz="1600"/>
-          </a:p>
-        </p:txBody>
-      </p:sp>
-      <p:sp>
-        <p:nvSpPr>
-          <p:cNvPr id="14" name="文本框 13"/>
-          <p:cNvSpPr txBox="1"/>
-          <p:nvPr/>
-        </p:nvSpPr>
-        <p:spPr>
-          <a:xfrm>
-            <a:off x="9956165" y="5993129"/>
-            <a:ext cx="5080000" cy="635000"/>
-          </a:xfrm>
-          <a:prstGeom prst="rect">
-            <a:avLst/>
-          </a:prstGeom>
-        </p:spPr>
-        <p:txBody>
-          <a:bodyPr/>
-          <a:p>
-            <a:endParaRPr sz="1600"/>
-          </a:p>
-        </p:txBody>
-      </p:sp>
-      <p:pic>
-        <p:nvPicPr>
-          <p:cNvPr id="15" name="图片 14"/>
-          <p:cNvPicPr>
-            <a:picLocks noChangeAspect="1"/>
-          </p:cNvPicPr>
-          <p:nvPr/>
-        </p:nvPicPr>
-        <p:blipFill>
-          <a:blip r:embed="rId3"/>
-          <a:stretch>
-            <a:fillRect/>
-          </a:stretch>
-        </p:blipFill>
-        <p:spPr>
-          <a:xfrm>
-            <a:off x="9218295" y="1212215"/>
-            <a:ext cx="523875" cy="466725"/>
-          </a:xfrm>
-          <a:prstGeom prst="rect">
-            <a:avLst/>
-          </a:prstGeom>
-        </p:spPr>
-      </p:pic>
-    </p:spTree>
-  </p:cSld>
-  <p:clrMapOvr>
-    <a:masterClrMapping/>
-  </p:clrMapOvr>
-</p:sld>
-</file>
-
-<file path=ppt/slides/slide17.xml><?xml version="1.0" encoding="utf-8"?>
-<p:sld xmlns:a="http://schemas.openxmlformats.org/drawingml/2006/main" xmlns:r="http://schemas.openxmlformats.org/officeDocument/2006/relationships" xmlns:p="http://schemas.openxmlformats.org/presentationml/2006/main">
-  <p:cSld>
-    <p:spTree>
-      <p:nvGrpSpPr>
-        <p:cNvPr id="1" name=""/>
-        <p:cNvGrpSpPr/>
-        <p:nvPr/>
-      </p:nvGrpSpPr>
-      <p:grpSpPr/>
-      <p:sp>
-        <p:nvSpPr>
-          <p:cNvPr id="2" name="标题 1"/>
-          <p:cNvSpPr>
-            <a:spLocks noGrp="1"/>
-          </p:cNvSpPr>
-          <p:nvPr>
-            <p:ph type="title"/>
-          </p:nvPr>
-        </p:nvSpPr>
-        <p:spPr/>
-        <p:txBody>
-          <a:bodyPr/>
-          <a:p>
-            <a:r>
-              <a:rPr lang="en-US" altLang="zh-CN">
-                <a:sym typeface="+mn-ea"/>
-              </a:rPr>
-              <a:t>2. </a:t>
-            </a:r>
-            <a:r>
-              <a:rPr lang="en-US" altLang="zh-CN" b="1" dirty="0">
-                <a:sym typeface="+mn-ea"/>
-              </a:rPr>
-              <a:t>Debug </a:t>
-            </a:r>
-            <a:r>
-              <a:rPr lang="en-US" altLang="zh-CN" dirty="0">
-                <a:sym typeface="+mn-ea"/>
-              </a:rPr>
-              <a:t>C/C++ by using gdb in VScode</a:t>
-            </a:r>
-            <a:endParaRPr lang="en-US" altLang="zh-CN"/>
-          </a:p>
-        </p:txBody>
-      </p:sp>
-      <p:sp>
-        <p:nvSpPr>
-          <p:cNvPr id="3" name="内容占位符 2"/>
-          <p:cNvSpPr>
-            <a:spLocks noGrp="1"/>
-          </p:cNvSpPr>
-          <p:nvPr>
-            <p:ph idx="1"/>
-          </p:nvPr>
-        </p:nvSpPr>
-        <p:spPr/>
-        <p:txBody>
-          <a:bodyPr/>
-          <a:p>
-            <a:r>
-              <a:rPr lang="en-US"/>
-              <a:t>2.4 set “breakpoint” on source file, lunch gdb to run and debug  </a:t>
-            </a:r>
-            <a:endParaRPr lang="en-US"/>
-          </a:p>
-        </p:txBody>
-      </p:sp>
-      <p:sp>
-        <p:nvSpPr>
-          <p:cNvPr id="4" name="文本框 3"/>
-          <p:cNvSpPr txBox="1"/>
-          <p:nvPr/>
-        </p:nvSpPr>
-        <p:spPr>
-          <a:xfrm>
-            <a:off x="3556000" y="2794000"/>
-            <a:ext cx="5080000" cy="635000"/>
-          </a:xfrm>
-          <a:prstGeom prst="rect">
-            <a:avLst/>
-          </a:prstGeom>
-        </p:spPr>
-        <p:txBody>
-          <a:bodyPr/>
-          <a:p>
-            <a:endParaRPr sz="1600"/>
-          </a:p>
-        </p:txBody>
-      </p:sp>
-      <p:sp>
-        <p:nvSpPr>
-          <p:cNvPr id="5" name="文本框 4"/>
-          <p:cNvSpPr txBox="1"/>
-          <p:nvPr/>
-        </p:nvSpPr>
-        <p:spPr>
-          <a:xfrm>
-            <a:off x="3556000" y="3429000"/>
-            <a:ext cx="5080000" cy="635000"/>
-          </a:xfrm>
-          <a:prstGeom prst="rect">
-            <a:avLst/>
-          </a:prstGeom>
-        </p:spPr>
-        <p:txBody>
-          <a:bodyPr/>
-          <a:p>
-            <a:endParaRPr sz="1600"/>
-          </a:p>
-        </p:txBody>
-      </p:sp>
-      <p:sp>
-        <p:nvSpPr>
-          <p:cNvPr id="6" name="文本框 5"/>
-          <p:cNvSpPr txBox="1"/>
-          <p:nvPr/>
-        </p:nvSpPr>
-        <p:spPr>
-          <a:xfrm>
-            <a:off x="3556000" y="2794000"/>
-            <a:ext cx="5080000" cy="635000"/>
-          </a:xfrm>
-          <a:prstGeom prst="rect">
-            <a:avLst/>
-          </a:prstGeom>
-        </p:spPr>
-        <p:txBody>
-          <a:bodyPr/>
-          <a:p>
-            <a:endParaRPr sz="1600"/>
-          </a:p>
-        </p:txBody>
-      </p:sp>
-      <p:sp>
-        <p:nvSpPr>
-          <p:cNvPr id="7" name="文本框 6"/>
-          <p:cNvSpPr txBox="1"/>
-          <p:nvPr/>
-        </p:nvSpPr>
-        <p:spPr>
-          <a:xfrm>
-            <a:off x="3556000" y="3429000"/>
-            <a:ext cx="5080000" cy="635000"/>
-          </a:xfrm>
-          <a:prstGeom prst="rect">
-            <a:avLst/>
-          </a:prstGeom>
-        </p:spPr>
-        <p:txBody>
-          <a:bodyPr/>
-          <a:p>
-            <a:endParaRPr sz="1600"/>
-          </a:p>
-        </p:txBody>
-      </p:sp>
-      <p:sp>
-        <p:nvSpPr>
-          <p:cNvPr id="8" name="文本框 7"/>
-          <p:cNvSpPr txBox="1"/>
-          <p:nvPr/>
-        </p:nvSpPr>
-        <p:spPr>
-          <a:xfrm>
-            <a:off x="3556000" y="2794000"/>
-            <a:ext cx="5080000" cy="635000"/>
-          </a:xfrm>
-          <a:prstGeom prst="rect">
-            <a:avLst/>
-          </a:prstGeom>
-        </p:spPr>
-        <p:txBody>
-          <a:bodyPr/>
-          <a:p>
-            <a:endParaRPr sz="1600"/>
-          </a:p>
-        </p:txBody>
-      </p:sp>
-      <p:sp>
-        <p:nvSpPr>
-          <p:cNvPr id="9" name="文本框 8"/>
-          <p:cNvSpPr txBox="1"/>
-          <p:nvPr/>
-        </p:nvSpPr>
-        <p:spPr>
-          <a:xfrm>
-            <a:off x="3556000" y="3429000"/>
-            <a:ext cx="5080000" cy="635000"/>
-          </a:xfrm>
-          <a:prstGeom prst="rect">
-            <a:avLst/>
-          </a:prstGeom>
-        </p:spPr>
-        <p:txBody>
-          <a:bodyPr/>
-          <a:p>
-            <a:endParaRPr sz="1600"/>
-          </a:p>
-        </p:txBody>
-      </p:sp>
-      <p:pic>
-        <p:nvPicPr>
-          <p:cNvPr id="14" name="图片 13"/>
-          <p:cNvPicPr>
-            <a:picLocks noChangeAspect="1"/>
-          </p:cNvPicPr>
-          <p:nvPr/>
-        </p:nvPicPr>
-        <p:blipFill>
-          <a:blip r:embed="rId1"/>
-          <a:stretch>
-            <a:fillRect/>
-          </a:stretch>
-        </p:blipFill>
-        <p:spPr>
-          <a:xfrm>
-            <a:off x="66675" y="2072005"/>
-            <a:ext cx="6438900" cy="3400425"/>
-          </a:xfrm>
-          <a:prstGeom prst="rect">
-            <a:avLst/>
-          </a:prstGeom>
-        </p:spPr>
-      </p:pic>
-      <p:sp>
-        <p:nvSpPr>
-          <p:cNvPr id="15" name="文本框 14"/>
-          <p:cNvSpPr txBox="1"/>
-          <p:nvPr/>
-        </p:nvSpPr>
-        <p:spPr>
-          <a:xfrm>
-            <a:off x="5808980" y="199390"/>
-            <a:ext cx="4044950" cy="467360"/>
-          </a:xfrm>
-          <a:prstGeom prst="rect">
-            <a:avLst/>
-          </a:prstGeom>
-        </p:spPr>
-        <p:txBody>
-          <a:bodyPr/>
-          <a:p>
-            <a:endParaRPr sz="1600"/>
-          </a:p>
-        </p:txBody>
-      </p:sp>
-      <p:pic>
-        <p:nvPicPr>
-          <p:cNvPr id="16" name="图片 15"/>
-          <p:cNvPicPr/>
-          <p:nvPr/>
-        </p:nvPicPr>
-        <p:blipFill>
-          <a:blip r:embed="rId2"/>
-          <a:stretch>
-            <a:fillRect/>
-          </a:stretch>
-        </p:blipFill>
-        <p:spPr>
-          <a:xfrm>
-            <a:off x="6605270" y="1948180"/>
-            <a:ext cx="5420995" cy="3689350"/>
-          </a:xfrm>
-          <a:prstGeom prst="rect">
-            <a:avLst/>
-          </a:prstGeom>
-        </p:spPr>
-      </p:pic>
-      <p:sp>
-        <p:nvSpPr>
-          <p:cNvPr id="17" name="文本框 16"/>
-          <p:cNvSpPr txBox="1"/>
-          <p:nvPr/>
-        </p:nvSpPr>
-        <p:spPr>
-          <a:xfrm>
-            <a:off x="5808980" y="6244590"/>
-            <a:ext cx="4044950" cy="467360"/>
-          </a:xfrm>
-          <a:prstGeom prst="rect">
-            <a:avLst/>
-          </a:prstGeom>
-        </p:spPr>
-        <p:txBody>
-          <a:bodyPr/>
-          <a:p>
-            <a:endParaRPr sz="1600"/>
-          </a:p>
-        </p:txBody>
-      </p:sp>
-      <p:sp>
-        <p:nvSpPr>
-          <p:cNvPr id="18" name="文本框 17"/>
-          <p:cNvSpPr txBox="1"/>
-          <p:nvPr/>
-        </p:nvSpPr>
-        <p:spPr>
-          <a:xfrm>
-            <a:off x="2080895" y="6083935"/>
-            <a:ext cx="6096000" cy="368300"/>
-          </a:xfrm>
-          <a:prstGeom prst="rect">
-            <a:avLst/>
-          </a:prstGeom>
-          <a:noFill/>
-        </p:spPr>
-        <p:txBody>
-          <a:bodyPr wrap="square" rtlCol="0" anchor="t">
-            <a:spAutoFit/>
-          </a:bodyPr>
-          <a:p>
-            <a:r>
-              <a:rPr lang="en-US" altLang="zh-CN"/>
-              <a:t>https://code.visualstudio.com/docs/cpp/config-linux</a:t>
-            </a:r>
-            <a:endParaRPr lang="zh-CN" altLang="en-US"/>
-          </a:p>
-        </p:txBody>
-      </p:sp>
-    </p:spTree>
-  </p:cSld>
-  <p:clrMapOvr>
-    <a:masterClrMapping/>
-  </p:clrMapOvr>
-</p:sld>
-</file>
-
-<file path=ppt/slides/slide18.xml><?xml version="1.0" encoding="utf-8"?>
-<p:sld xmlns:a="http://schemas.openxmlformats.org/drawingml/2006/main" xmlns:r="http://schemas.openxmlformats.org/officeDocument/2006/relationships" xmlns:p="http://schemas.openxmlformats.org/presentationml/2006/main">
-  <p:cSld>
-    <p:spTree>
-      <p:nvGrpSpPr>
-        <p:cNvPr id="1" name=""/>
-        <p:cNvGrpSpPr/>
-        <p:nvPr/>
-      </p:nvGrpSpPr>
-      <p:grpSpPr/>
-      <p:sp>
-        <p:nvSpPr>
-          <p:cNvPr id="2" name="标题 1"/>
-          <p:cNvSpPr>
-            <a:spLocks noGrp="1"/>
-          </p:cNvSpPr>
-          <p:nvPr>
-            <p:ph type="title"/>
-          </p:nvPr>
-        </p:nvSpPr>
-        <p:spPr/>
-        <p:txBody>
-          <a:bodyPr/>
-          <a:p>
-            <a:r>
-              <a:rPr lang="en-US" altLang="zh-CN">
-                <a:sym typeface="+mn-ea"/>
-              </a:rPr>
-              <a:t>2. </a:t>
-            </a:r>
-            <a:r>
-              <a:rPr lang="en-US" altLang="zh-CN" b="1" dirty="0">
-                <a:sym typeface="+mn-ea"/>
-              </a:rPr>
-              <a:t>Debug </a:t>
-            </a:r>
-            <a:r>
-              <a:rPr lang="en-US" altLang="zh-CN" dirty="0">
-                <a:sym typeface="+mn-ea"/>
-              </a:rPr>
-              <a:t>C/C++ by using gdb in VScode</a:t>
-            </a:r>
-            <a:endParaRPr lang="en-US" altLang="zh-CN"/>
-          </a:p>
-        </p:txBody>
-      </p:sp>
-      <p:sp>
-        <p:nvSpPr>
-          <p:cNvPr id="3" name="内容占位符 2"/>
-          <p:cNvSpPr>
-            <a:spLocks noGrp="1"/>
-          </p:cNvSpPr>
-          <p:nvPr>
-            <p:ph idx="1"/>
-          </p:nvPr>
-        </p:nvSpPr>
-        <p:spPr>
-          <a:xfrm>
-            <a:off x="838200" y="1187450"/>
-            <a:ext cx="6125845" cy="5325110"/>
-          </a:xfrm>
-        </p:spPr>
-        <p:txBody>
-          <a:bodyPr/>
-          <a:p>
-            <a:r>
-              <a:rPr lang="en-US" altLang="zh-CN"/>
-              <a:t>2.5 View the data stored in a variable by gdb(optional)</a:t>
-            </a:r>
-            <a:endParaRPr lang="en-US" altLang="zh-CN"/>
-          </a:p>
-          <a:p>
-            <a:pPr lvl="1"/>
-            <a:r>
-              <a:rPr lang="en-US" altLang="zh-CN"/>
-              <a:t>During debugging, you can use GDB commands to view the data stored in variable(s).</a:t>
-            </a:r>
-            <a:endParaRPr lang="en-US" altLang="zh-CN"/>
-          </a:p>
-          <a:p>
-            <a:pPr marL="457200" lvl="1" indent="0">
-              <a:buNone/>
-            </a:pPr>
-            <a:r>
-              <a:rPr lang="en-US" altLang="zh-CN"/>
-              <a:t> </a:t>
-            </a:r>
-            <a:endParaRPr lang="en-US" altLang="zh-CN"/>
-          </a:p>
-          <a:p>
-            <a:pPr lvl="2"/>
-            <a:r>
-              <a:rPr lang="en-US" altLang="zh-CN"/>
-              <a:t>step1.  choose “DEBUG CONSOLE” window.</a:t>
-            </a:r>
-            <a:endParaRPr lang="en-US" altLang="zh-CN"/>
-          </a:p>
-          <a:p>
-            <a:pPr lvl="2"/>
-            <a:endParaRPr lang="en-US" altLang="zh-CN"/>
-          </a:p>
-          <a:p>
-            <a:pPr lvl="2"/>
-            <a:r>
-              <a:rPr lang="en-US" altLang="zh-CN"/>
-              <a:t>step2.  run the command in command line in the </a:t>
-            </a:r>
-            <a:r>
-              <a:rPr lang="en-US" altLang="zh-CN">
-                <a:sym typeface="+mn-ea"/>
-              </a:rPr>
-              <a:t> “DEBUG CONSOLE” window.</a:t>
-            </a:r>
-            <a:endParaRPr lang="en-US" altLang="zh-CN">
-              <a:sym typeface="+mn-ea"/>
-            </a:endParaRPr>
-          </a:p>
-          <a:p>
-            <a:pPr lvl="3"/>
-            <a:r>
-              <a:rPr lang="en-US" altLang="zh-CN"/>
-              <a:t>-exec [gdb command] in vscode</a:t>
-            </a:r>
-            <a:endParaRPr lang="en-US" altLang="zh-CN"/>
-          </a:p>
-          <a:p>
-            <a:pPr lvl="2"/>
-            <a:endParaRPr lang="en-US" altLang="zh-CN"/>
-          </a:p>
-          <a:p>
-            <a:pPr lvl="2"/>
-            <a:r>
-              <a:rPr lang="en-US" altLang="zh-CN"/>
-              <a:t>step3.  View the results after executing the command </a:t>
-            </a:r>
-            <a:r>
-              <a:rPr lang="en-US" altLang="zh-CN">
-                <a:sym typeface="+mn-ea"/>
-              </a:rPr>
-              <a:t>in the </a:t>
-            </a:r>
-            <a:r>
-              <a:rPr lang="en-US" altLang="zh-CN">
-                <a:sym typeface="+mn-ea"/>
-              </a:rPr>
-              <a:t> “DEBUG CONSOLE” window</a:t>
-            </a:r>
-            <a:r>
-              <a:rPr lang="en-US" altLang="zh-CN"/>
-              <a:t>.</a:t>
-            </a:r>
-            <a:endParaRPr lang="en-US" altLang="zh-CN"/>
-          </a:p>
-        </p:txBody>
-      </p:sp>
-      <p:sp>
-        <p:nvSpPr>
-          <p:cNvPr id="4" name="文本框 3"/>
-          <p:cNvSpPr txBox="1"/>
-          <p:nvPr/>
-        </p:nvSpPr>
-        <p:spPr>
-          <a:xfrm>
-            <a:off x="3556000" y="2794000"/>
-            <a:ext cx="5080000" cy="635000"/>
-          </a:xfrm>
-          <a:prstGeom prst="rect">
-            <a:avLst/>
-          </a:prstGeom>
-        </p:spPr>
-        <p:txBody>
-          <a:bodyPr/>
-          <a:p>
-            <a:endParaRPr sz="1600"/>
-          </a:p>
-        </p:txBody>
-      </p:sp>
-      <p:sp>
-        <p:nvSpPr>
-          <p:cNvPr id="5" name="文本框 4"/>
-          <p:cNvSpPr txBox="1"/>
-          <p:nvPr/>
-        </p:nvSpPr>
-        <p:spPr>
-          <a:xfrm>
-            <a:off x="3556000" y="3429000"/>
-            <a:ext cx="5080000" cy="635000"/>
-          </a:xfrm>
-          <a:prstGeom prst="rect">
-            <a:avLst/>
-          </a:prstGeom>
-        </p:spPr>
-        <p:txBody>
-          <a:bodyPr/>
-          <a:p>
-            <a:endParaRPr sz="1600"/>
-          </a:p>
-        </p:txBody>
-      </p:sp>
-      <p:sp>
-        <p:nvSpPr>
-          <p:cNvPr id="6" name="文本框 5"/>
-          <p:cNvSpPr txBox="1"/>
-          <p:nvPr/>
-        </p:nvSpPr>
-        <p:spPr>
-          <a:xfrm>
-            <a:off x="5234940" y="-1113155"/>
-            <a:ext cx="3465195" cy="532130"/>
-          </a:xfrm>
-          <a:prstGeom prst="rect">
-            <a:avLst/>
-          </a:prstGeom>
-        </p:spPr>
-        <p:txBody>
-          <a:bodyPr/>
-          <a:p>
-            <a:endParaRPr sz="1600"/>
-          </a:p>
-        </p:txBody>
-      </p:sp>
-      <p:sp>
-        <p:nvSpPr>
-          <p:cNvPr id="8" name="文本框 7"/>
-          <p:cNvSpPr txBox="1"/>
-          <p:nvPr/>
-        </p:nvSpPr>
-        <p:spPr>
-          <a:xfrm>
-            <a:off x="5234940" y="7541895"/>
-            <a:ext cx="3465195" cy="532130"/>
-          </a:xfrm>
-          <a:prstGeom prst="rect">
-            <a:avLst/>
-          </a:prstGeom>
-        </p:spPr>
-        <p:txBody>
-          <a:bodyPr/>
-          <a:p>
-            <a:endParaRPr sz="1600"/>
-          </a:p>
-        </p:txBody>
-      </p:sp>
-      <p:sp>
-        <p:nvSpPr>
-          <p:cNvPr id="9" name="文本框 8"/>
-          <p:cNvSpPr txBox="1"/>
-          <p:nvPr/>
-        </p:nvSpPr>
-        <p:spPr>
-          <a:xfrm>
-            <a:off x="3556000" y="698501"/>
-            <a:ext cx="5080000" cy="635000"/>
-          </a:xfrm>
-          <a:prstGeom prst="rect">
-            <a:avLst/>
-          </a:prstGeom>
-        </p:spPr>
-        <p:txBody>
-          <a:bodyPr/>
-          <a:p>
-            <a:endParaRPr sz="1600"/>
-          </a:p>
-        </p:txBody>
-      </p:sp>
-      <p:sp>
-        <p:nvSpPr>
-          <p:cNvPr id="11" name="文本框 10"/>
-          <p:cNvSpPr txBox="1"/>
-          <p:nvPr/>
-        </p:nvSpPr>
-        <p:spPr>
-          <a:xfrm>
-            <a:off x="3556000" y="5524499"/>
-            <a:ext cx="5080000" cy="635000"/>
-          </a:xfrm>
-          <a:prstGeom prst="rect">
-            <a:avLst/>
-          </a:prstGeom>
-        </p:spPr>
-        <p:txBody>
-          <a:bodyPr/>
-          <a:p>
-            <a:endParaRPr sz="1600"/>
-          </a:p>
-        </p:txBody>
-      </p:sp>
-      <p:sp>
-        <p:nvSpPr>
-          <p:cNvPr id="12" name="文本框 11"/>
-          <p:cNvSpPr txBox="1"/>
-          <p:nvPr/>
-        </p:nvSpPr>
-        <p:spPr>
-          <a:xfrm>
-            <a:off x="3556000" y="693738"/>
-            <a:ext cx="5080000" cy="635000"/>
-          </a:xfrm>
-          <a:prstGeom prst="rect">
-            <a:avLst/>
-          </a:prstGeom>
-        </p:spPr>
-        <p:txBody>
-          <a:bodyPr/>
-          <a:p>
-            <a:endParaRPr sz="1600"/>
-          </a:p>
-        </p:txBody>
-      </p:sp>
-      <p:pic>
-        <p:nvPicPr>
-          <p:cNvPr id="13" name="图片 12"/>
-          <p:cNvPicPr/>
-          <p:nvPr/>
-        </p:nvPicPr>
-        <p:blipFill>
-          <a:blip r:embed="rId1"/>
-          <a:stretch>
-            <a:fillRect/>
-          </a:stretch>
-        </p:blipFill>
-        <p:spPr>
-          <a:xfrm>
-            <a:off x="7359650" y="1323975"/>
-            <a:ext cx="4048760" cy="4764405"/>
-          </a:xfrm>
-          <a:prstGeom prst="rect">
-            <a:avLst/>
-          </a:prstGeom>
-        </p:spPr>
-      </p:pic>
-      <p:sp>
-        <p:nvSpPr>
-          <p:cNvPr id="14" name="文本框 13"/>
-          <p:cNvSpPr txBox="1"/>
-          <p:nvPr/>
-        </p:nvSpPr>
-        <p:spPr>
-          <a:xfrm>
-            <a:off x="3556000" y="5529263"/>
-            <a:ext cx="5080000" cy="635000"/>
-          </a:xfrm>
-          <a:prstGeom prst="rect">
-            <a:avLst/>
-          </a:prstGeom>
-        </p:spPr>
-        <p:txBody>
-          <a:bodyPr/>
-          <a:p>
-            <a:endParaRPr sz="1600"/>
-          </a:p>
-        </p:txBody>
-      </p:sp>
-    </p:spTree>
-  </p:cSld>
-  <p:clrMapOvr>
-    <a:masterClrMapping/>
-  </p:clrMapOvr>
-</p:sld>
-</file>
-
-<file path=ppt/slides/slide19.xml><?xml version="1.0" encoding="utf-8"?>
-<p:sld xmlns:a="http://schemas.openxmlformats.org/drawingml/2006/main" xmlns:r="http://schemas.openxmlformats.org/officeDocument/2006/relationships" xmlns:p="http://schemas.openxmlformats.org/presentationml/2006/main">
-  <p:cSld>
-    <p:spTree>
-      <p:nvGrpSpPr>
-        <p:cNvPr id="1" name=""/>
-        <p:cNvGrpSpPr/>
-        <p:nvPr/>
-      </p:nvGrpSpPr>
-      <p:grpSpPr/>
-      <p:sp>
-        <p:nvSpPr>
-          <p:cNvPr id="2" name="标题 1"/>
-          <p:cNvSpPr>
-            <a:spLocks noGrp="1"/>
-          </p:cNvSpPr>
-          <p:nvPr>
-            <p:ph type="title"/>
-          </p:nvPr>
-        </p:nvSpPr>
-        <p:spPr/>
-        <p:txBody>
-          <a:bodyPr/>
-          <a:p>
-            <a:r>
-              <a:rPr lang="en-US" altLang="zh-CN">
-                <a:sym typeface="+mn-ea"/>
-              </a:rPr>
-              <a:t>2. </a:t>
-            </a:r>
-            <a:r>
-              <a:rPr lang="en-US" altLang="zh-CN" b="1" dirty="0">
-                <a:sym typeface="+mn-ea"/>
-              </a:rPr>
-              <a:t>Debug </a:t>
-            </a:r>
-            <a:r>
-              <a:rPr lang="en-US" altLang="zh-CN" dirty="0">
-                <a:sym typeface="+mn-ea"/>
-              </a:rPr>
-              <a:t>C/C++ by using </a:t>
-            </a:r>
-            <a:r>
-              <a:rPr lang="en-US" altLang="zh-CN" b="1" dirty="0">
-                <a:sym typeface="+mn-ea"/>
-              </a:rPr>
-              <a:t>gdb</a:t>
-            </a:r>
-            <a:r>
-              <a:rPr lang="en-US" altLang="zh-CN" dirty="0">
-                <a:sym typeface="+mn-ea"/>
-              </a:rPr>
-              <a:t> in VScode</a:t>
-            </a:r>
-            <a:endParaRPr lang="en-US" altLang="zh-CN"/>
-          </a:p>
-        </p:txBody>
-      </p:sp>
-      <p:sp>
-        <p:nvSpPr>
-          <p:cNvPr id="3" name="内容占位符 2"/>
-          <p:cNvSpPr>
-            <a:spLocks noGrp="1"/>
-          </p:cNvSpPr>
-          <p:nvPr>
-            <p:ph idx="1"/>
-          </p:nvPr>
-        </p:nvSpPr>
-        <p:spPr>
-          <a:xfrm>
-            <a:off x="308610" y="1117600"/>
-            <a:ext cx="7190740" cy="2252980"/>
-          </a:xfrm>
-        </p:spPr>
-        <p:txBody>
-          <a:bodyPr>
-            <a:normAutofit fontScale="90000"/>
-          </a:bodyPr>
-          <a:p>
-            <a:pPr lvl="1"/>
-            <a:r>
-              <a:rPr lang="en-US" altLang="zh-CN"/>
-              <a:t>Using the command x (for “examine”) to examine memory in any of several formats, independently of your program’s data types.</a:t>
-            </a:r>
-            <a:endParaRPr lang="en-US" altLang="zh-CN"/>
-          </a:p>
-          <a:p>
-            <a:pPr lvl="2"/>
-            <a:r>
-              <a:rPr lang="en-US" altLang="zh-CN"/>
-              <a:t>x /nfu  addr</a:t>
-            </a:r>
-            <a:endParaRPr lang="en-US" altLang="zh-CN"/>
-          </a:p>
-          <a:p>
-            <a:pPr lvl="3"/>
-            <a:r>
-              <a:rPr lang="en-US" altLang="zh-CN"/>
-              <a:t>n, the repeat count</a:t>
-            </a:r>
-            <a:endParaRPr lang="en-US" altLang="zh-CN" sz="1800"/>
-          </a:p>
-          <a:p>
-            <a:pPr lvl="3"/>
-            <a:r>
-              <a:rPr lang="en-US" altLang="zh-CN"/>
-              <a:t>f, the display format</a:t>
-            </a:r>
-            <a:endParaRPr lang="en-US" altLang="zh-CN" sz="1800"/>
-          </a:p>
-          <a:p>
-            <a:pPr lvl="3"/>
-            <a:r>
-              <a:rPr lang="en-US" altLang="zh-CN"/>
-              <a:t>u, the unit size </a:t>
-            </a:r>
-            <a:endParaRPr lang="en-US" altLang="zh-CN"/>
-          </a:p>
-        </p:txBody>
-      </p:sp>
-      <p:sp>
-        <p:nvSpPr>
-          <p:cNvPr id="4" name="文本框 3"/>
-          <p:cNvSpPr txBox="1"/>
-          <p:nvPr/>
-        </p:nvSpPr>
-        <p:spPr>
-          <a:xfrm>
-            <a:off x="3556000" y="2794000"/>
-            <a:ext cx="5080000" cy="635000"/>
-          </a:xfrm>
-          <a:prstGeom prst="rect">
-            <a:avLst/>
-          </a:prstGeom>
-        </p:spPr>
-        <p:txBody>
-          <a:bodyPr/>
-          <a:p>
-            <a:endParaRPr sz="1600"/>
-          </a:p>
-        </p:txBody>
-      </p:sp>
-      <p:sp>
-        <p:nvSpPr>
-          <p:cNvPr id="5" name="文本框 4"/>
-          <p:cNvSpPr txBox="1"/>
-          <p:nvPr/>
-        </p:nvSpPr>
-        <p:spPr>
-          <a:xfrm>
-            <a:off x="3556000" y="3429000"/>
-            <a:ext cx="5080000" cy="635000"/>
-          </a:xfrm>
-          <a:prstGeom prst="rect">
-            <a:avLst/>
-          </a:prstGeom>
-        </p:spPr>
-        <p:txBody>
-          <a:bodyPr/>
-          <a:p>
-            <a:endParaRPr sz="1600"/>
-          </a:p>
-        </p:txBody>
-      </p:sp>
-      <p:sp>
-        <p:nvSpPr>
-          <p:cNvPr id="6" name="文本框 5"/>
-          <p:cNvSpPr txBox="1"/>
-          <p:nvPr/>
-        </p:nvSpPr>
-        <p:spPr>
-          <a:xfrm>
-            <a:off x="5234940" y="-1113155"/>
-            <a:ext cx="3465195" cy="532130"/>
-          </a:xfrm>
-          <a:prstGeom prst="rect">
-            <a:avLst/>
-          </a:prstGeom>
-        </p:spPr>
-        <p:txBody>
-          <a:bodyPr/>
-          <a:p>
-            <a:endParaRPr sz="1600"/>
-          </a:p>
-        </p:txBody>
-      </p:sp>
-      <p:sp>
-        <p:nvSpPr>
-          <p:cNvPr id="8" name="文本框 7"/>
-          <p:cNvSpPr txBox="1"/>
-          <p:nvPr/>
-        </p:nvSpPr>
-        <p:spPr>
-          <a:xfrm>
-            <a:off x="5234940" y="7541895"/>
-            <a:ext cx="3465195" cy="532130"/>
-          </a:xfrm>
-          <a:prstGeom prst="rect">
-            <a:avLst/>
-          </a:prstGeom>
-        </p:spPr>
-        <p:txBody>
-          <a:bodyPr/>
-          <a:p>
-            <a:endParaRPr sz="1600"/>
-          </a:p>
-        </p:txBody>
-      </p:sp>
-      <p:sp>
-        <p:nvSpPr>
-          <p:cNvPr id="9" name="文本框 8"/>
-          <p:cNvSpPr txBox="1"/>
-          <p:nvPr/>
-        </p:nvSpPr>
-        <p:spPr>
-          <a:xfrm>
-            <a:off x="3556000" y="698501"/>
-            <a:ext cx="5080000" cy="635000"/>
-          </a:xfrm>
-          <a:prstGeom prst="rect">
-            <a:avLst/>
-          </a:prstGeom>
-        </p:spPr>
-        <p:txBody>
-          <a:bodyPr/>
-          <a:p>
-            <a:endParaRPr sz="1600"/>
-          </a:p>
-        </p:txBody>
-      </p:sp>
-      <p:sp>
-        <p:nvSpPr>
-          <p:cNvPr id="11" name="文本框 10"/>
-          <p:cNvSpPr txBox="1"/>
-          <p:nvPr/>
-        </p:nvSpPr>
-        <p:spPr>
-          <a:xfrm>
-            <a:off x="3556000" y="5524499"/>
-            <a:ext cx="5080000" cy="635000"/>
-          </a:xfrm>
-          <a:prstGeom prst="rect">
-            <a:avLst/>
-          </a:prstGeom>
-        </p:spPr>
-        <p:txBody>
-          <a:bodyPr/>
-          <a:p>
-            <a:endParaRPr sz="1600"/>
-          </a:p>
-        </p:txBody>
-      </p:sp>
-      <p:sp>
-        <p:nvSpPr>
-          <p:cNvPr id="12" name="文本框 11"/>
-          <p:cNvSpPr txBox="1"/>
-          <p:nvPr/>
-        </p:nvSpPr>
-        <p:spPr>
-          <a:xfrm>
-            <a:off x="3556000" y="989013"/>
-            <a:ext cx="5080000" cy="635000"/>
-          </a:xfrm>
-          <a:prstGeom prst="rect">
-            <a:avLst/>
-          </a:prstGeom>
-        </p:spPr>
-        <p:txBody>
-          <a:bodyPr/>
-          <a:p>
-            <a:endParaRPr sz="1600"/>
-          </a:p>
-        </p:txBody>
-      </p:sp>
-      <p:pic>
-        <p:nvPicPr>
-          <p:cNvPr id="13" name="图片 12"/>
-          <p:cNvPicPr/>
-          <p:nvPr/>
-        </p:nvPicPr>
-        <p:blipFill>
-          <a:blip r:embed="rId1"/>
-          <a:stretch>
-            <a:fillRect/>
-          </a:stretch>
-        </p:blipFill>
-        <p:spPr>
-          <a:xfrm>
-            <a:off x="7726045" y="1118235"/>
-            <a:ext cx="4166235" cy="5568950"/>
-          </a:xfrm>
-          <a:prstGeom prst="rect">
-            <a:avLst/>
-          </a:prstGeom>
-        </p:spPr>
-      </p:pic>
-      <p:sp>
-        <p:nvSpPr>
-          <p:cNvPr id="14" name="文本框 13"/>
-          <p:cNvSpPr txBox="1"/>
-          <p:nvPr/>
-        </p:nvSpPr>
-        <p:spPr>
-          <a:xfrm>
-            <a:off x="3556000" y="5233988"/>
-            <a:ext cx="5080000" cy="635000"/>
-          </a:xfrm>
-          <a:prstGeom prst="rect">
-            <a:avLst/>
-          </a:prstGeom>
-        </p:spPr>
-        <p:txBody>
-          <a:bodyPr/>
-          <a:p>
-            <a:endParaRPr sz="1600"/>
-          </a:p>
-        </p:txBody>
-      </p:sp>
-      <p:pic>
-        <p:nvPicPr>
-          <p:cNvPr id="15" name="图片 14"/>
-          <p:cNvPicPr>
-            <a:picLocks noChangeAspect="1"/>
-          </p:cNvPicPr>
-          <p:nvPr/>
-        </p:nvPicPr>
-        <p:blipFill>
-          <a:blip r:embed="rId2"/>
-          <a:stretch>
-            <a:fillRect/>
-          </a:stretch>
-        </p:blipFill>
-        <p:spPr>
-          <a:xfrm>
-            <a:off x="1376680" y="3805555"/>
-            <a:ext cx="5393690" cy="2799080"/>
-          </a:xfrm>
-          <a:prstGeom prst="rect">
-            <a:avLst/>
-          </a:prstGeom>
-        </p:spPr>
-      </p:pic>
-      <p:sp>
-        <p:nvSpPr>
-          <p:cNvPr id="16" name="文本框 15"/>
-          <p:cNvSpPr txBox="1"/>
-          <p:nvPr/>
-        </p:nvSpPr>
-        <p:spPr>
-          <a:xfrm>
-            <a:off x="589915" y="3267710"/>
-            <a:ext cx="7136130" cy="396875"/>
-          </a:xfrm>
-          <a:prstGeom prst="rect">
-            <a:avLst/>
-          </a:prstGeom>
-          <a:noFill/>
-        </p:spPr>
-        <p:txBody>
-          <a:bodyPr wrap="square" rtlCol="0" anchor="t">
-            <a:noAutofit/>
-          </a:bodyPr>
-          <a:p>
-            <a:r>
-              <a:rPr lang="en-US" altLang="zh-CN" sz="1600"/>
-              <a:t>https://sourceware.org/gdb/current/onlinedocs/gdb.html/Memory.html#Memory</a:t>
-            </a:r>
-            <a:endParaRPr lang="zh-CN" altLang="en-US" sz="1600"/>
-          </a:p>
-        </p:txBody>
-      </p:sp>
-    </p:spTree>
-  </p:cSld>
-  <p:clrMapOvr>
-    <a:masterClrMapping/>
-  </p:clrMapOvr>
-</p:sld>
-</file>
-
-<file path=ppt/slides/slide2.xml><?xml version="1.0" encoding="utf-8"?>
-<p:sld xmlns:a="http://schemas.openxmlformats.org/drawingml/2006/main" xmlns:r="http://schemas.openxmlformats.org/officeDocument/2006/relationships" xmlns:p="http://schemas.openxmlformats.org/presentationml/2006/main">
-  <p:cSld>
-    <p:spTree>
-      <p:nvGrpSpPr>
-        <p:cNvPr id="1" name=""/>
-        <p:cNvGrpSpPr/>
-        <p:nvPr/>
-      </p:nvGrpSpPr>
-      <p:grpSpPr>
-        <a:xfrm>
-          <a:off x="0" y="0"/>
-          <a:ext cx="0" cy="0"/>
-          <a:chOff x="0" y="0"/>
-          <a:chExt cx="0" cy="0"/>
-        </a:xfrm>
-      </p:grpSpPr>
-      <p:sp>
-        <p:nvSpPr>
-          <p:cNvPr id="2" name="标题 1"/>
-          <p:cNvSpPr>
-            <a:spLocks noGrp="1"/>
-          </p:cNvSpPr>
-          <p:nvPr>
-            <p:ph type="title"/>
-          </p:nvPr>
-        </p:nvSpPr>
-        <p:spPr/>
-        <p:txBody>
-          <a:bodyPr>
-            <a:normAutofit/>
-          </a:bodyPr>
-          <a:lstStyle/>
-          <a:p>
-            <a:r>
-              <a:rPr lang="en-US" altLang="zh-CN" dirty="0"/>
-              <a:t>T</a:t>
-            </a:r>
-            <a:r>
-              <a:rPr lang="en-US" altLang="zh-CN" dirty="0"/>
-              <a:t>opics</a:t>
-            </a:r>
-            <a:endParaRPr lang="en-US" altLang="zh-CN" dirty="0"/>
-          </a:p>
-        </p:txBody>
-      </p:sp>
-      <p:sp>
-        <p:nvSpPr>
-          <p:cNvPr id="3" name="内容占位符 2"/>
-          <p:cNvSpPr>
-            <a:spLocks noGrp="1"/>
-          </p:cNvSpPr>
-          <p:nvPr>
-            <p:ph idx="1"/>
-          </p:nvPr>
-        </p:nvSpPr>
-        <p:spPr>
-          <a:xfrm>
-            <a:off x="286871" y="1326995"/>
-            <a:ext cx="11605207" cy="4849968"/>
-          </a:xfrm>
-        </p:spPr>
-        <p:txBody>
-          <a:bodyPr/>
-          <a:lstStyle/>
-          <a:p>
-            <a:pPr marL="285750" indent="-285750">
-              <a:buFont typeface="Arial" panose="020B0604020202020204" pitchFamily="34" charset="0"/>
-              <a:buChar char="•"/>
-            </a:pPr>
-            <a:r>
-              <a:rPr lang="en-US" altLang="zh-CN" b="1" dirty="0">
-                <a:sym typeface="+mn-ea"/>
-              </a:rPr>
-              <a:t>1. </a:t>
-            </a:r>
-            <a:r>
-              <a:rPr lang="en-US" altLang="zh-CN" b="1" dirty="0">
-                <a:sym typeface="+mn-ea"/>
-              </a:rPr>
-              <a:t>Formatting with </a:t>
-            </a:r>
-            <a:r>
-              <a:rPr lang="en-US" altLang="zh-CN" b="1" dirty="0" err="1">
-                <a:sym typeface="+mn-ea"/>
-              </a:rPr>
-              <a:t>cout</a:t>
-            </a:r>
-            <a:endParaRPr lang="en-US" altLang="zh-CN" b="1" dirty="0" err="1">
-              <a:sym typeface="+mn-ea"/>
-            </a:endParaRPr>
-          </a:p>
-          <a:p>
-            <a:pPr marL="742950" lvl="1" indent="-285750">
-              <a:buFont typeface="Arial" panose="020B0604020202020204" pitchFamily="34" charset="0"/>
-              <a:buChar char="•"/>
-            </a:pPr>
-            <a:r>
-              <a:rPr lang="en-US" altLang="zh-CN" sz="2400" dirty="0" err="1">
-                <a:solidFill>
-                  <a:schemeClr val="tx1"/>
-                </a:solidFill>
-                <a:sym typeface="+mn-ea"/>
-              </a:rPr>
-              <a:t>1.1 </a:t>
-            </a:r>
-            <a:r>
-              <a:rPr lang="en-US" altLang="zh-CN" i="1" dirty="0">
-                <a:solidFill>
-                  <a:schemeClr val="tx1"/>
-                </a:solidFill>
-                <a:sym typeface="+mn-ea"/>
-              </a:rPr>
-              <a:t>Using member functions of </a:t>
-            </a:r>
-            <a:r>
-              <a:rPr lang="en-US" altLang="zh-CN" i="1" dirty="0" err="1">
-                <a:solidFill>
-                  <a:schemeClr val="tx1"/>
-                </a:solidFill>
-                <a:sym typeface="+mn-ea"/>
-              </a:rPr>
-              <a:t>ios</a:t>
-            </a:r>
-            <a:r>
-              <a:rPr lang="en-US" altLang="zh-CN" i="1" dirty="0">
-                <a:solidFill>
-                  <a:schemeClr val="tx1"/>
-                </a:solidFill>
-                <a:sym typeface="+mn-ea"/>
-              </a:rPr>
-              <a:t> class</a:t>
-            </a:r>
-            <a:endParaRPr lang="en-US" altLang="zh-CN" sz="2400" dirty="0" err="1">
-              <a:solidFill>
-                <a:schemeClr val="tx1"/>
-              </a:solidFill>
-              <a:sym typeface="+mn-ea"/>
-            </a:endParaRPr>
-          </a:p>
-          <a:p>
-            <a:pPr marL="742950" lvl="1" indent="-285750">
-              <a:buFont typeface="Arial" panose="020B0604020202020204" pitchFamily="34" charset="0"/>
-              <a:buChar char="•"/>
-            </a:pPr>
-            <a:r>
-              <a:rPr lang="en-US" altLang="zh-CN" sz="2400" dirty="0" err="1">
-                <a:solidFill>
-                  <a:schemeClr val="tx1"/>
-                </a:solidFill>
-                <a:sym typeface="+mn-ea"/>
-              </a:rPr>
-              <a:t>1.2 </a:t>
-            </a:r>
-            <a:r>
-              <a:rPr lang="en-US" altLang="zh-CN" i="1" dirty="0">
-                <a:solidFill>
-                  <a:schemeClr val="tx1"/>
-                </a:solidFill>
-                <a:sym typeface="+mn-ea"/>
-              </a:rPr>
-              <a:t>Using </a:t>
-            </a:r>
-            <a:r>
-              <a:rPr lang="en-US" altLang="zh-CN" i="1" dirty="0" err="1">
-                <a:solidFill>
-                  <a:schemeClr val="tx1"/>
-                </a:solidFill>
-                <a:sym typeface="+mn-ea"/>
-              </a:rPr>
-              <a:t>iomanip</a:t>
-            </a:r>
-            <a:r>
-              <a:rPr lang="en-US" altLang="zh-CN" i="1" dirty="0">
-                <a:solidFill>
-                  <a:schemeClr val="tx1"/>
-                </a:solidFill>
-                <a:sym typeface="+mn-ea"/>
-              </a:rPr>
-              <a:t> manipulators</a:t>
-            </a:r>
-            <a:endParaRPr lang="en-US" altLang="zh-CN" dirty="0">
-              <a:solidFill>
-                <a:schemeClr val="tx1"/>
-              </a:solidFill>
-              <a:sym typeface="+mn-ea"/>
-            </a:endParaRPr>
-          </a:p>
-          <a:p>
-            <a:pPr marL="285750" indent="-285750">
-              <a:buFont typeface="Arial" panose="020B0604020202020204" pitchFamily="34" charset="0"/>
-              <a:buChar char="•"/>
-            </a:pPr>
-            <a:r>
-              <a:rPr lang="en-US" altLang="zh-CN" dirty="0">
-                <a:sym typeface="+mn-ea"/>
-              </a:rPr>
-              <a:t>2. </a:t>
-            </a:r>
-            <a:r>
-              <a:rPr lang="en-US" altLang="zh-CN" b="1" dirty="0">
-                <a:sym typeface="+mn-ea"/>
-              </a:rPr>
-              <a:t>Debug </a:t>
-            </a:r>
-            <a:r>
-              <a:rPr lang="en-US" altLang="zh-CN" dirty="0">
-                <a:sym typeface="+mn-ea"/>
-              </a:rPr>
-              <a:t>C/C++ by using gdb in VScode</a:t>
-            </a:r>
-            <a:endParaRPr lang="en-US" altLang="zh-CN" dirty="0">
-              <a:sym typeface="+mn-ea"/>
-            </a:endParaRPr>
-          </a:p>
-          <a:p>
-            <a:pPr marL="285750" indent="-285750">
-              <a:buFont typeface="Arial" panose="020B0604020202020204" pitchFamily="34" charset="0"/>
-              <a:buChar char="•"/>
-            </a:pPr>
-            <a:r>
-              <a:rPr lang="en-US" altLang="zh-CN" dirty="0">
-                <a:sym typeface="+mn-ea"/>
-              </a:rPr>
-              <a:t>3. </a:t>
-            </a:r>
-            <a:r>
-              <a:rPr lang="en-US" altLang="zh-CN" b="1" dirty="0">
-                <a:sym typeface="+mn-ea"/>
-              </a:rPr>
-              <a:t>Data type conversions and calculations</a:t>
-            </a:r>
-            <a:endParaRPr lang="en-US" altLang="zh-CN" b="1" dirty="0">
-              <a:sym typeface="+mn-ea"/>
-            </a:endParaRPr>
-          </a:p>
-          <a:p>
-            <a:pPr marL="742950" lvl="1" indent="-285750">
-              <a:buFont typeface="Arial" panose="020B0604020202020204" pitchFamily="34" charset="0"/>
-              <a:buChar char="•"/>
-            </a:pPr>
-            <a:r>
-              <a:rPr lang="en-US" altLang="zh-CN" dirty="0">
-                <a:sym typeface="+mn-ea"/>
-              </a:rPr>
-              <a:t>data storage, integer vs float</a:t>
-            </a:r>
-            <a:endParaRPr lang="en-US" altLang="zh-CN" dirty="0">
-              <a:sym typeface="+mn-ea"/>
-            </a:endParaRPr>
-          </a:p>
-          <a:p>
-            <a:pPr marL="742950" lvl="1" indent="-285750">
-              <a:buFont typeface="Arial" panose="020B0604020202020204" pitchFamily="34" charset="0"/>
-              <a:buChar char="•"/>
-            </a:pPr>
-            <a:r>
-              <a:rPr lang="en-US" altLang="zh-CN">
-                <a:sym typeface="+mn-ea"/>
-              </a:rPr>
-              <a:t>Integer promotions of </a:t>
-            </a:r>
-            <a:r>
-              <a:rPr lang="en-US" altLang="zh-CN">
-                <a:sym typeface="+mn-ea"/>
-              </a:rPr>
-              <a:t>Implicit conversions</a:t>
-            </a:r>
-            <a:r>
-              <a:rPr lang="en-US" altLang="zh-CN" dirty="0">
-                <a:sym typeface="+mn-ea"/>
-              </a:rPr>
-              <a:t> </a:t>
-            </a:r>
-            <a:endParaRPr lang="en-US" altLang="zh-CN" dirty="0">
-              <a:sym typeface="+mn-ea"/>
-            </a:endParaRPr>
-          </a:p>
-          <a:p>
-            <a:pPr marL="285750" indent="-285750">
-              <a:buFont typeface="Arial" panose="020B0604020202020204" pitchFamily="34" charset="0"/>
-              <a:buChar char="•"/>
-            </a:pPr>
-            <a:r>
-              <a:rPr lang="en-US" altLang="zh-CN" dirty="0">
-                <a:sym typeface="+mn-ea"/>
-              </a:rPr>
-              <a:t>4. </a:t>
-            </a:r>
-            <a:r>
-              <a:rPr lang="en-US" altLang="zh-CN" b="1" dirty="0">
-                <a:sym typeface="+mn-ea"/>
-              </a:rPr>
-              <a:t>Practices</a:t>
-            </a:r>
-            <a:endParaRPr lang="en-US" altLang="zh-CN" dirty="0">
-              <a:sym typeface="+mn-ea"/>
-            </a:endParaRPr>
-          </a:p>
-          <a:p>
-            <a:pPr marL="742950" lvl="1" indent="-285750">
-              <a:buFont typeface="Arial" panose="020B0604020202020204" pitchFamily="34" charset="0"/>
-              <a:buChar char="•"/>
-            </a:pPr>
-            <a:r>
-              <a:rPr lang="en-US" altLang="zh-CN" dirty="0">
-                <a:sym typeface="+mn-ea"/>
-              </a:rPr>
-              <a:t>data types and arithmetic operators</a:t>
-            </a:r>
-            <a:endParaRPr lang="en-US" altLang="zh-CN" dirty="0"/>
-          </a:p>
-        </p:txBody>
-      </p:sp>
-    </p:spTree>
-  </p:cSld>
-  <p:clrMapOvr>
-    <a:masterClrMapping/>
-  </p:clrMapOvr>
-</p:sld>
-</file>
-
-<file path=ppt/slides/slide20.xml><?xml version="1.0" encoding="utf-8"?>
-<p:sld xmlns:a="http://schemas.openxmlformats.org/drawingml/2006/main" xmlns:r="http://schemas.openxmlformats.org/officeDocument/2006/relationships" xmlns:p="http://schemas.openxmlformats.org/presentationml/2006/main">
-  <p:cSld>
-    <p:spTree>
-      <p:nvGrpSpPr>
-        <p:cNvPr id="1" name=""/>
-        <p:cNvGrpSpPr/>
-        <p:nvPr/>
-      </p:nvGrpSpPr>
-      <p:grpSpPr/>
-      <p:sp>
-        <p:nvSpPr>
-          <p:cNvPr id="2" name="标题 1"/>
-          <p:cNvSpPr>
-            <a:spLocks noGrp="1"/>
-          </p:cNvSpPr>
-          <p:nvPr>
-            <p:ph type="title"/>
-          </p:nvPr>
-        </p:nvSpPr>
-        <p:spPr/>
-        <p:txBody>
-          <a:bodyPr/>
-          <a:p>
-            <a:r>
-              <a:rPr lang="en-US" altLang="zh-CN"/>
-              <a:t>3. </a:t>
-            </a:r>
-            <a:r>
-              <a:rPr lang="en-US" altLang="zh-CN" dirty="0">
-                <a:sym typeface="+mn-ea"/>
-              </a:rPr>
-              <a:t>Data type conversions and calculations</a:t>
-            </a:r>
-            <a:endParaRPr lang="en-US" altLang="zh-CN"/>
-          </a:p>
-        </p:txBody>
-      </p:sp>
-      <p:sp>
-        <p:nvSpPr>
-          <p:cNvPr id="3" name="内容占位符 2"/>
-          <p:cNvSpPr>
-            <a:spLocks noGrp="1"/>
-          </p:cNvSpPr>
-          <p:nvPr>
-            <p:ph idx="1"/>
-          </p:nvPr>
-        </p:nvSpPr>
-        <p:spPr>
-          <a:xfrm>
-            <a:off x="838200" y="1097280"/>
-            <a:ext cx="11054080" cy="5080000"/>
-          </a:xfrm>
-        </p:spPr>
-        <p:txBody>
-          <a:bodyPr/>
-          <a:p>
-            <a:pPr marL="285750" indent="-285750">
-              <a:buFont typeface="Arial" panose="020B0604020202020204" pitchFamily="34" charset="0"/>
-              <a:buChar char="•"/>
-            </a:pPr>
-            <a:r>
-              <a:rPr lang="en-US" altLang="zh-CN" sz="2800" dirty="0">
-                <a:sym typeface="+mn-ea"/>
-              </a:rPr>
-              <a:t>3.1 data storage: integer vs float</a:t>
-            </a:r>
-            <a:endParaRPr lang="zh-CN" altLang="en-US"/>
-          </a:p>
-        </p:txBody>
-      </p:sp>
-      <p:pic>
-        <p:nvPicPr>
-          <p:cNvPr id="4" name="图片 3"/>
-          <p:cNvPicPr>
-            <a:picLocks noChangeAspect="1"/>
-          </p:cNvPicPr>
-          <p:nvPr/>
-        </p:nvPicPr>
-        <p:blipFill>
-          <a:blip r:embed="rId1"/>
-          <a:stretch>
-            <a:fillRect/>
-          </a:stretch>
-        </p:blipFill>
-        <p:spPr>
-          <a:xfrm>
-            <a:off x="125730" y="1590675"/>
-            <a:ext cx="6434455" cy="3677285"/>
-          </a:xfrm>
-          <a:prstGeom prst="rect">
-            <a:avLst/>
-          </a:prstGeom>
-        </p:spPr>
-      </p:pic>
-      <p:pic>
-        <p:nvPicPr>
-          <p:cNvPr id="5" name="图片 4"/>
-          <p:cNvPicPr>
-            <a:picLocks noChangeAspect="1"/>
-          </p:cNvPicPr>
-          <p:nvPr/>
-        </p:nvPicPr>
-        <p:blipFill>
-          <a:blip r:embed="rId2"/>
-          <a:stretch>
-            <a:fillRect/>
-          </a:stretch>
-        </p:blipFill>
-        <p:spPr>
-          <a:xfrm>
-            <a:off x="1558290" y="5450205"/>
-            <a:ext cx="3962400" cy="962025"/>
-          </a:xfrm>
-          <a:prstGeom prst="rect">
-            <a:avLst/>
-          </a:prstGeom>
-        </p:spPr>
-      </p:pic>
-      <p:sp>
-        <p:nvSpPr>
-          <p:cNvPr id="6" name="文本框 5"/>
-          <p:cNvSpPr txBox="1"/>
-          <p:nvPr/>
-        </p:nvSpPr>
-        <p:spPr>
-          <a:xfrm>
-            <a:off x="6633210" y="665163"/>
-            <a:ext cx="5080000" cy="635000"/>
-          </a:xfrm>
-          <a:prstGeom prst="rect">
-            <a:avLst/>
-          </a:prstGeom>
-        </p:spPr>
-        <p:txBody>
-          <a:bodyPr/>
-          <a:p>
-            <a:endParaRPr sz="1600"/>
-          </a:p>
-        </p:txBody>
-      </p:sp>
-      <p:pic>
-        <p:nvPicPr>
-          <p:cNvPr id="7" name="图片 6"/>
-          <p:cNvPicPr/>
-          <p:nvPr/>
-        </p:nvPicPr>
-        <p:blipFill>
-          <a:blip r:embed="rId3"/>
-          <a:stretch>
-            <a:fillRect/>
-          </a:stretch>
-        </p:blipFill>
-        <p:spPr>
-          <a:xfrm>
-            <a:off x="6633210" y="1300163"/>
-            <a:ext cx="5372100" cy="5362575"/>
-          </a:xfrm>
-          <a:prstGeom prst="rect">
-            <a:avLst/>
-          </a:prstGeom>
-        </p:spPr>
-      </p:pic>
-      <p:sp>
-        <p:nvSpPr>
-          <p:cNvPr id="8" name="文本框 7"/>
-          <p:cNvSpPr txBox="1"/>
-          <p:nvPr/>
-        </p:nvSpPr>
-        <p:spPr>
-          <a:xfrm>
-            <a:off x="6633210" y="6662738"/>
-            <a:ext cx="5080000" cy="635000"/>
-          </a:xfrm>
-          <a:prstGeom prst="rect">
-            <a:avLst/>
-          </a:prstGeom>
-        </p:spPr>
-        <p:txBody>
-          <a:bodyPr/>
-          <a:p>
-            <a:endParaRPr sz="1600"/>
-          </a:p>
-        </p:txBody>
-      </p:sp>
-    </p:spTree>
-  </p:cSld>
-  <p:clrMapOvr>
-    <a:masterClrMapping/>
-  </p:clrMapOvr>
-</p:sld>
-</file>
-
-<file path=ppt/slides/slide21.xml><?xml version="1.0" encoding="utf-8"?>
-<p:sld xmlns:a="http://schemas.openxmlformats.org/drawingml/2006/main" xmlns:r="http://schemas.openxmlformats.org/officeDocument/2006/relationships" xmlns:p="http://schemas.openxmlformats.org/presentationml/2006/main">
-  <p:cSld>
-    <p:spTree>
-      <p:nvGrpSpPr>
-        <p:cNvPr id="1" name=""/>
-        <p:cNvGrpSpPr/>
-        <p:nvPr/>
-      </p:nvGrpSpPr>
-      <p:grpSpPr/>
-      <p:sp>
-        <p:nvSpPr>
-          <p:cNvPr id="2" name="标题 1"/>
-          <p:cNvSpPr>
-            <a:spLocks noGrp="1"/>
-          </p:cNvSpPr>
-          <p:nvPr>
-            <p:ph type="title"/>
-          </p:nvPr>
-        </p:nvSpPr>
-        <p:spPr/>
-        <p:txBody>
-          <a:bodyPr/>
-          <a:p>
-            <a:r>
-              <a:rPr lang="en-US" altLang="zh-CN"/>
-              <a:t>3. </a:t>
-            </a:r>
-            <a:r>
-              <a:rPr lang="en-US" altLang="zh-CN" dirty="0">
-                <a:sym typeface="+mn-ea"/>
-              </a:rPr>
-              <a:t>Data type conversions and calculations</a:t>
-            </a:r>
-            <a:endParaRPr lang="en-US" altLang="zh-CN"/>
-          </a:p>
-        </p:txBody>
-      </p:sp>
-      <p:sp>
-        <p:nvSpPr>
-          <p:cNvPr id="3" name="内容占位符 2"/>
-          <p:cNvSpPr>
-            <a:spLocks noGrp="1"/>
-          </p:cNvSpPr>
-          <p:nvPr>
-            <p:ph idx="1"/>
-          </p:nvPr>
-        </p:nvSpPr>
-        <p:spPr>
-          <a:xfrm>
-            <a:off x="838200" y="1097280"/>
-            <a:ext cx="11054080" cy="5080000"/>
-          </a:xfrm>
-        </p:spPr>
-        <p:txBody>
-          <a:bodyPr/>
-          <a:p>
-            <a:pPr marL="285750" indent="-285750">
-              <a:buFont typeface="Arial" panose="020B0604020202020204" pitchFamily="34" charset="0"/>
-              <a:buChar char="•"/>
-            </a:pPr>
-            <a:r>
-              <a:rPr lang="en-US" altLang="zh-CN"/>
-              <a:t>3.2 Signed vs Unsigned</a:t>
-            </a:r>
-            <a:endParaRPr lang="en-US" altLang="zh-CN"/>
-          </a:p>
-          <a:p>
-            <a:pPr marL="285750" indent="-285750">
-              <a:buFont typeface="Arial" panose="020B0604020202020204" pitchFamily="34" charset="0"/>
-              <a:buChar char="•"/>
-            </a:pPr>
-            <a:r>
-              <a:rPr lang="en-US" altLang="zh-CN">
-                <a:sym typeface="+mn-ea"/>
-              </a:rPr>
-              <a:t>Integer promotions of </a:t>
-            </a:r>
-            <a:r>
-              <a:rPr lang="en-US" altLang="zh-CN"/>
-              <a:t>Implicit conversions  </a:t>
-            </a:r>
-            <a:endParaRPr lang="en-US" altLang="zh-CN"/>
-          </a:p>
-        </p:txBody>
-      </p:sp>
-      <p:sp>
-        <p:nvSpPr>
-          <p:cNvPr id="5" name="文本框 4"/>
-          <p:cNvSpPr txBox="1"/>
-          <p:nvPr/>
-        </p:nvSpPr>
-        <p:spPr>
-          <a:xfrm>
-            <a:off x="1000125" y="2183130"/>
-            <a:ext cx="5440680" cy="3415030"/>
-          </a:xfrm>
-          <a:prstGeom prst="rect">
-            <a:avLst/>
-          </a:prstGeom>
-          <a:solidFill>
-            <a:schemeClr val="accent2">
-              <a:lumMod val="20000"/>
-              <a:lumOff val="80000"/>
-            </a:schemeClr>
-          </a:solidFill>
-        </p:spPr>
-        <p:txBody>
-          <a:bodyPr wrap="square" rtlCol="0">
-            <a:spAutoFit/>
-          </a:bodyPr>
-          <a:p>
-            <a:r>
-              <a:rPr lang="en-US" altLang="zh-CN"/>
-              <a:t>#include &lt;stdio.h&gt;</a:t>
-            </a:r>
-            <a:endParaRPr lang="en-US" altLang="zh-CN"/>
-          </a:p>
-          <a:p>
-            <a:endParaRPr lang="en-US" altLang="zh-CN"/>
-          </a:p>
-          <a:p>
-            <a:r>
-              <a:rPr lang="en-US" altLang="zh-CN"/>
-              <a:t>int main(){</a:t>
-            </a:r>
-            <a:endParaRPr lang="en-US" altLang="zh-CN"/>
-          </a:p>
-          <a:p>
-            <a:r>
-              <a:rPr lang="en-US" altLang="zh-CN"/>
-              <a:t>    </a:t>
-            </a:r>
-            <a:r>
-              <a:rPr lang="en-US" altLang="zh-CN" b="1"/>
-              <a:t>char </a:t>
-            </a:r>
-            <a:r>
-              <a:rPr lang="en-US" altLang="zh-CN"/>
-              <a:t>x=0xff;</a:t>
-            </a:r>
-            <a:endParaRPr lang="en-US" altLang="zh-CN"/>
-          </a:p>
-          <a:p>
-            <a:r>
-              <a:rPr lang="en-US" altLang="zh-CN"/>
-              <a:t>    </a:t>
-            </a:r>
-            <a:r>
-              <a:rPr lang="en-US" altLang="zh-CN" b="1"/>
-              <a:t>unsigned char </a:t>
-            </a:r>
-            <a:r>
-              <a:rPr lang="en-US" altLang="zh-CN"/>
-              <a:t>y=0xff;</a:t>
-            </a:r>
-            <a:endParaRPr lang="en-US" altLang="zh-CN"/>
-          </a:p>
-          <a:p>
-            <a:r>
-              <a:rPr lang="en-US" altLang="zh-CN"/>
-              <a:t>    printf("x: 0x</a:t>
-            </a:r>
-            <a:r>
-              <a:rPr lang="en-US" altLang="zh-CN" b="1"/>
-              <a:t>%x</a:t>
-            </a:r>
-            <a:r>
-              <a:rPr lang="en-US" altLang="zh-CN"/>
-              <a:t>, %d , </a:t>
-            </a:r>
-            <a:r>
-              <a:rPr lang="en-US" altLang="zh-CN" b="1"/>
-              <a:t>%u</a:t>
-            </a:r>
-            <a:r>
-              <a:rPr lang="en-US" altLang="zh-CN"/>
-              <a:t>\n",x,x,x);</a:t>
-            </a:r>
-            <a:endParaRPr lang="en-US" altLang="zh-CN"/>
-          </a:p>
-          <a:p>
-            <a:r>
-              <a:rPr lang="en-US" altLang="zh-CN"/>
-              <a:t>    printf("y: 0x</a:t>
-            </a:r>
-            <a:r>
-              <a:rPr lang="en-US" altLang="zh-CN" b="1"/>
-              <a:t>%x</a:t>
-            </a:r>
-            <a:r>
-              <a:rPr lang="en-US" altLang="zh-CN"/>
-              <a:t>, %d , </a:t>
-            </a:r>
-            <a:r>
-              <a:rPr lang="en-US" altLang="zh-CN" b="1"/>
-              <a:t>%u</a:t>
-            </a:r>
-            <a:r>
-              <a:rPr lang="en-US" altLang="zh-CN"/>
-              <a:t>\n",y,y,y);</a:t>
-            </a:r>
-            <a:endParaRPr lang="en-US" altLang="zh-CN"/>
-          </a:p>
-          <a:p>
-            <a:endParaRPr lang="en-US" altLang="zh-CN"/>
-          </a:p>
-          <a:p>
-            <a:r>
-              <a:rPr lang="en-US" altLang="zh-CN"/>
-              <a:t>    printf("x&gt;&gt;2: 0x</a:t>
-            </a:r>
-            <a:r>
-              <a:rPr lang="en-US" altLang="zh-CN" b="1"/>
-              <a:t>%x</a:t>
-            </a:r>
-            <a:r>
-              <a:rPr lang="en-US" altLang="zh-CN"/>
-              <a:t>, %d , </a:t>
-            </a:r>
-            <a:r>
-              <a:rPr lang="en-US" altLang="zh-CN" b="1"/>
-              <a:t>%u</a:t>
-            </a:r>
-            <a:r>
-              <a:rPr lang="en-US" altLang="zh-CN"/>
-              <a:t>\n",x&gt;&gt;2,x&gt;&gt;2,x&gt;&gt;2);</a:t>
-            </a:r>
-            <a:endParaRPr lang="en-US" altLang="zh-CN"/>
-          </a:p>
-          <a:p>
-            <a:r>
-              <a:rPr lang="en-US" altLang="zh-CN"/>
-              <a:t>    printf("y&gt;&gt;2: 0x</a:t>
-            </a:r>
-            <a:r>
-              <a:rPr lang="en-US" altLang="zh-CN" b="1"/>
-              <a:t>%x</a:t>
-            </a:r>
-            <a:r>
-              <a:rPr lang="en-US" altLang="zh-CN"/>
-              <a:t>, %d , %u\n",y&gt;&gt;2,y&gt;&gt;2,y&gt;&gt;2);</a:t>
-            </a:r>
-            <a:endParaRPr lang="en-US" altLang="zh-CN"/>
-          </a:p>
-          <a:p>
-            <a:r>
-              <a:rPr lang="en-US" altLang="zh-CN"/>
-              <a:t>    return 0;</a:t>
-            </a:r>
-            <a:endParaRPr lang="en-US" altLang="zh-CN"/>
-          </a:p>
-          <a:p>
-            <a:r>
-              <a:rPr lang="en-US" altLang="zh-CN"/>
-              <a:t>}</a:t>
-            </a:r>
-            <a:endParaRPr lang="en-US" altLang="zh-CN"/>
-          </a:p>
-        </p:txBody>
-      </p:sp>
-      <p:sp>
-        <p:nvSpPr>
-          <p:cNvPr id="6" name="文本框 5"/>
-          <p:cNvSpPr txBox="1"/>
-          <p:nvPr/>
-        </p:nvSpPr>
-        <p:spPr>
-          <a:xfrm>
-            <a:off x="3556000" y="2379663"/>
-            <a:ext cx="5080000" cy="635000"/>
-          </a:xfrm>
-          <a:prstGeom prst="rect">
-            <a:avLst/>
-          </a:prstGeom>
-        </p:spPr>
-        <p:txBody>
-          <a:bodyPr/>
-          <a:p>
-            <a:endParaRPr sz="1600"/>
-          </a:p>
-        </p:txBody>
-      </p:sp>
-      <p:pic>
-        <p:nvPicPr>
-          <p:cNvPr id="7" name="图片 6"/>
-          <p:cNvPicPr/>
-          <p:nvPr/>
-        </p:nvPicPr>
-        <p:blipFill>
-          <a:blip r:embed="rId1"/>
-          <a:stretch>
-            <a:fillRect/>
-          </a:stretch>
-        </p:blipFill>
-        <p:spPr>
-          <a:xfrm>
-            <a:off x="6988175" y="3014980"/>
-            <a:ext cx="4357370" cy="1691640"/>
-          </a:xfrm>
-          <a:prstGeom prst="rect">
-            <a:avLst/>
-          </a:prstGeom>
-        </p:spPr>
-      </p:pic>
-      <p:sp>
-        <p:nvSpPr>
-          <p:cNvPr id="8" name="文本框 7"/>
-          <p:cNvSpPr txBox="1"/>
-          <p:nvPr/>
-        </p:nvSpPr>
-        <p:spPr>
-          <a:xfrm>
-            <a:off x="3556000" y="3843338"/>
-            <a:ext cx="5080000" cy="635000"/>
-          </a:xfrm>
-          <a:prstGeom prst="rect">
-            <a:avLst/>
-          </a:prstGeom>
-        </p:spPr>
-        <p:txBody>
-          <a:bodyPr/>
-          <a:p>
-            <a:endParaRPr sz="1600"/>
-          </a:p>
-        </p:txBody>
-      </p:sp>
-      <p:sp>
-        <p:nvSpPr>
-          <p:cNvPr id="9" name="文本框 8"/>
-          <p:cNvSpPr txBox="1"/>
-          <p:nvPr/>
-        </p:nvSpPr>
-        <p:spPr>
-          <a:xfrm>
-            <a:off x="5887085" y="6074410"/>
-            <a:ext cx="6096000" cy="645160"/>
-          </a:xfrm>
-          <a:prstGeom prst="rect">
-            <a:avLst/>
-          </a:prstGeom>
-          <a:noFill/>
-        </p:spPr>
-        <p:txBody>
-          <a:bodyPr wrap="square" rtlCol="0" anchor="t">
-            <a:spAutoFit/>
-          </a:bodyPr>
-          <a:p>
-            <a:r>
-              <a:rPr lang="en-US" altLang="zh-CN"/>
-              <a:t>https://en.cppreference.com/w/c/language/conversion</a:t>
-            </a:r>
-            <a:endParaRPr lang="en-US" altLang="zh-CN"/>
-          </a:p>
-          <a:p>
-            <a:endParaRPr lang="zh-CN" altLang="en-US"/>
-          </a:p>
-        </p:txBody>
-      </p:sp>
-      <p:sp>
-        <p:nvSpPr>
-          <p:cNvPr id="11" name="矩形 10"/>
-          <p:cNvSpPr/>
-          <p:nvPr/>
-        </p:nvSpPr>
-        <p:spPr>
-          <a:xfrm>
-            <a:off x="1197610" y="3606800"/>
-            <a:ext cx="3575685" cy="693420"/>
-          </a:xfrm>
-          <a:prstGeom prst="rect">
-            <a:avLst/>
-          </a:prstGeom>
-          <a:noFill/>
-          <a:ln w="28575" cmpd="sng">
-            <a:solidFill>
-              <a:srgbClr val="C00000"/>
-            </a:solidFill>
-            <a:prstDash val="solid"/>
-          </a:ln>
-        </p:spPr>
-        <p:style>
-          <a:lnRef idx="2">
-            <a:schemeClr val="accent1">
-              <a:lumMod val="75000"/>
-            </a:schemeClr>
-          </a:lnRef>
-          <a:fillRef idx="1">
-            <a:schemeClr val="accent1"/>
-          </a:fillRef>
-          <a:effectRef idx="0">
-            <a:srgbClr val="FFFFFF"/>
-          </a:effectRef>
-          <a:fontRef idx="minor">
-            <a:schemeClr val="lt1"/>
-          </a:fontRef>
-        </p:style>
-        <p:txBody>
-          <a:bodyPr rtlCol="0" anchor="ctr"/>
-          <a:p>
-            <a:pPr algn="ctr"/>
-            <a:endParaRPr lang="zh-CN" altLang="en-US"/>
-          </a:p>
-        </p:txBody>
-      </p:sp>
-      <p:sp>
-        <p:nvSpPr>
-          <p:cNvPr id="12" name="矩形 11"/>
-          <p:cNvSpPr/>
-          <p:nvPr/>
-        </p:nvSpPr>
-        <p:spPr>
-          <a:xfrm>
-            <a:off x="6988175" y="3044190"/>
-            <a:ext cx="4051935" cy="753745"/>
-          </a:xfrm>
-          <a:prstGeom prst="rect">
-            <a:avLst/>
-          </a:prstGeom>
-          <a:noFill/>
-          <a:ln w="28575" cmpd="sng">
-            <a:solidFill>
-              <a:srgbClr val="C00000"/>
-            </a:solidFill>
-            <a:prstDash val="solid"/>
-          </a:ln>
-        </p:spPr>
-        <p:style>
-          <a:lnRef idx="2">
-            <a:schemeClr val="accent1">
-              <a:lumMod val="75000"/>
-            </a:schemeClr>
-          </a:lnRef>
-          <a:fillRef idx="1">
-            <a:schemeClr val="accent1"/>
-          </a:fillRef>
-          <a:effectRef idx="0">
-            <a:srgbClr val="FFFFFF"/>
-          </a:effectRef>
-          <a:fontRef idx="minor">
-            <a:schemeClr val="lt1"/>
-          </a:fontRef>
-        </p:style>
-        <p:txBody>
-          <a:bodyPr rtlCol="0" anchor="ctr"/>
-          <a:p>
-            <a:pPr algn="ctr"/>
-            <a:endParaRPr lang="zh-CN" altLang="en-US"/>
-          </a:p>
-        </p:txBody>
-      </p:sp>
-    </p:spTree>
-  </p:cSld>
-  <p:clrMapOvr>
-    <a:masterClrMapping/>
-  </p:clrMapOvr>
-</p:sld>
-</file>
-
-<file path=ppt/slides/slide22.xml><?xml version="1.0" encoding="utf-8"?>
-<p:sld xmlns:a="http://schemas.openxmlformats.org/drawingml/2006/main" xmlns:r="http://schemas.openxmlformats.org/officeDocument/2006/relationships" xmlns:p="http://schemas.openxmlformats.org/presentationml/2006/main">
-  <p:cSld>
-    <p:spTree>
-      <p:nvGrpSpPr>
-        <p:cNvPr id="1" name=""/>
-        <p:cNvGrpSpPr/>
-        <p:nvPr/>
-      </p:nvGrpSpPr>
       <p:grpSpPr>
         <a:xfrm>
           <a:off x="0" y="0"/>
@@ -11037,25 +7526,8 @@
               <a:rPr lang="en-US" altLang="zh-CN" dirty="0">
                 <a:sym typeface="+mn-ea"/>
               </a:rPr>
-              <a:t>4.1.Compile and run the following program, what is the result? </a:t>
-            </a:r>
-            <a:endParaRPr lang="en-US" altLang="zh-CN" dirty="0">
-              <a:sym typeface="+mn-ea"/>
-            </a:endParaRPr>
-          </a:p>
-          <a:p>
-            <a:pPr marL="0" indent="0">
-              <a:buNone/>
-            </a:pPr>
-            <a:r>
-              <a:rPr lang="en-US" altLang="zh-CN" sz="2800" dirty="0">
-                <a:sym typeface="+mn-ea"/>
-              </a:rPr>
-              <a:t>You need to explain the reason to a SA to pass the test.</a:t>
-            </a:r>
-            <a:endParaRPr lang="en-US" altLang="zh-CN" dirty="0">
-              <a:sym typeface="+mn-ea"/>
-            </a:endParaRPr>
+              <a:t>1.Compile and run the following source code, what is the output? </a:t>
+            </a:r>
           </a:p>
         </p:txBody>
       </p:sp>
@@ -11129,22 +7601,8 @@
                 <a:ea typeface="宋体" panose="02010600030101010101" pitchFamily="2" charset="-122"/>
                 <a:cs typeface="+mj-cs"/>
               </a:rPr>
-              <a:t> 4. Exercises</a:t>
-            </a:r>
-            <a:endParaRPr kumimoji="0" lang="en-US" altLang="zh-CN" sz="3600" b="1" i="0" u="none" strike="noStrike" kern="1200" cap="none" spc="0" normalizeH="0" baseline="0" noProof="0" dirty="0">
-              <a:ln>
-                <a:noFill/>
-              </a:ln>
-              <a:solidFill>
-                <a:prstClr val="black"/>
-              </a:solidFill>
-              <a:effectLst/>
-              <a:uLnTx/>
-              <a:uFillTx/>
-              <a:latin typeface="Calibri" panose="020F0502020204030204"/>
-              <a:ea typeface="宋体" panose="02010600030101010101" pitchFamily="2" charset="-122"/>
-              <a:cs typeface="+mj-cs"/>
-            </a:endParaRPr>
+              <a:t> 2. Exercises</a:t>
+            </a:r>
           </a:p>
         </p:txBody>
       </p:sp>
@@ -11157,7 +7615,7 @@
         <p:spPr>
           <a:xfrm>
             <a:off x="3199130" y="1844675"/>
-            <a:ext cx="4420235" cy="4399915"/>
+            <a:ext cx="6836410" cy="4401205"/>
           </a:xfrm>
           <a:prstGeom prst="rect">
             <a:avLst/>
@@ -11178,6 +7636,7 @@
           <a:bodyPr wrap="square">
             <a:spAutoFit/>
           </a:bodyPr>
+          <a:lstStyle/>
           <a:p>
             <a:r>
               <a:rPr lang="en-US" altLang="zh-CN" sz="1400" b="0" dirty="0">
@@ -11199,6 +7658,67 @@
                 <a:latin typeface="Consolas" panose="020B0609020204030204" pitchFamily="49" charset="0"/>
               </a:rPr>
               <a:t>&gt; </a:t>
+            </a:r>
+          </a:p>
+          <a:p>
+            <a:r>
+              <a:rPr lang="en-US" altLang="zh-CN" sz="1400" b="0" dirty="0">
+                <a:effectLst/>
+                <a:latin typeface="Consolas" panose="020B0609020204030204" pitchFamily="49" charset="0"/>
+              </a:rPr>
+              <a:t>int main()</a:t>
+            </a:r>
+          </a:p>
+          <a:p>
+            <a:r>
+              <a:rPr lang="en-US" altLang="zh-CN" sz="1400" b="0" dirty="0">
+                <a:effectLst/>
+                <a:latin typeface="Consolas" panose="020B0609020204030204" pitchFamily="49" charset="0"/>
+              </a:rPr>
+              <a:t>{</a:t>
+            </a:r>
+          </a:p>
+          <a:p>
+            <a:r>
+              <a:rPr lang="en-US" altLang="zh-CN" sz="1400" b="0" dirty="0">
+                <a:effectLst/>
+                <a:latin typeface="Consolas" panose="020B0609020204030204" pitchFamily="49" charset="0"/>
+              </a:rPr>
+              <a:t>    signed char a = 127</a:t>
+            </a:r>
+            <a:r>
+              <a:rPr lang="en-US" altLang="zh-CN" sz="1400" dirty="0">
+                <a:effectLst/>
+                <a:latin typeface="Consolas" panose="020B0609020204030204" pitchFamily="49" charset="0"/>
+                <a:sym typeface="+mn-ea"/>
+              </a:rPr>
+              <a:t>;</a:t>
+            </a:r>
+          </a:p>
+          <a:p>
+            <a:r>
+              <a:rPr lang="en-US" altLang="zh-CN" sz="1400" b="0" dirty="0">
+                <a:effectLst/>
+                <a:latin typeface="Consolas" panose="020B0609020204030204" pitchFamily="49" charset="0"/>
+              </a:rPr>
+              <a:t>    unsigned char b = 0x7f; </a:t>
+            </a:r>
+          </a:p>
+          <a:p>
+            <a:r>
+              <a:rPr lang="en-US" altLang="zh-CN" sz="1400" b="0" dirty="0">
+                <a:effectLst/>
+                <a:latin typeface="Consolas" panose="020B0609020204030204" pitchFamily="49" charset="0"/>
+              </a:rPr>
+              <a:t>    </a:t>
+            </a:r>
+            <a:r>
+              <a:rPr lang="en-US" altLang="zh-CN" sz="1400" dirty="0">
+                <a:effectLst/>
+                <a:latin typeface="Consolas" panose="020B0609020204030204" pitchFamily="49" charset="0"/>
+                <a:sym typeface="+mn-ea"/>
+              </a:rPr>
+              <a:t>char c = 0x7f;</a:t>
             </a:r>
             <a:endParaRPr lang="en-US" altLang="zh-CN" sz="1400" b="0" dirty="0">
               <a:effectLst/>
@@ -11206,13 +7726,6 @@
             </a:endParaRPr>
           </a:p>
           <a:p>
-            <a:r>
-              <a:rPr lang="en-US" altLang="zh-CN" sz="1400" b="0" dirty="0">
-                <a:effectLst/>
-                <a:latin typeface="Consolas" panose="020B0609020204030204" pitchFamily="49" charset="0"/>
-              </a:rPr>
-              <a:t>int main()</a:t>
-            </a:r>
             <a:endParaRPr lang="en-US" altLang="zh-CN" sz="1400" b="0" dirty="0">
               <a:effectLst/>
               <a:latin typeface="Consolas" panose="020B0609020204030204" pitchFamily="49" charset="0"/>
@@ -11224,7 +7737,98 @@
                 <a:effectLst/>
                 <a:latin typeface="Consolas" panose="020B0609020204030204" pitchFamily="49" charset="0"/>
               </a:rPr>
-              <a:t>{</a:t>
+              <a:t>    a=a&lt;&lt;1;</a:t>
+            </a:r>
+          </a:p>
+          <a:p>
+            <a:r>
+              <a:rPr lang="en-US" altLang="zh-CN" sz="1400" b="0" dirty="0">
+                <a:effectLst/>
+                <a:latin typeface="Consolas" panose="020B0609020204030204" pitchFamily="49" charset="0"/>
+              </a:rPr>
+              <a:t>    b=b&lt;&lt;1;</a:t>
+            </a:r>
+          </a:p>
+          <a:p>
+            <a:r>
+              <a:rPr lang="en-US" altLang="zh-CN" sz="1400" b="0" dirty="0">
+                <a:effectLst/>
+                <a:latin typeface="Consolas" panose="020B0609020204030204" pitchFamily="49" charset="0"/>
+              </a:rPr>
+              <a:t>    c=c&lt;&lt;1;        </a:t>
+            </a:r>
+          </a:p>
+          <a:p>
+            <a:r>
+              <a:rPr lang="en-US" altLang="zh-CN" sz="1400" b="0" dirty="0">
+                <a:effectLst/>
+                <a:latin typeface="Consolas" panose="020B0609020204030204" pitchFamily="49" charset="0"/>
+              </a:rPr>
+              <a:t>    </a:t>
+            </a:r>
+            <a:r>
+              <a:rPr lang="en-US" altLang="zh-CN" sz="1400" dirty="0" err="1">
+                <a:effectLst/>
+                <a:latin typeface="Consolas" panose="020B0609020204030204" pitchFamily="49" charset="0"/>
+                <a:sym typeface="+mn-ea"/>
+              </a:rPr>
+              <a:t>printf</a:t>
+            </a:r>
+            <a:r>
+              <a:rPr lang="en-US" altLang="zh-CN" sz="1400" dirty="0">
+                <a:effectLst/>
+                <a:latin typeface="Consolas" panose="020B0609020204030204" pitchFamily="49" charset="0"/>
+                <a:sym typeface="+mn-ea"/>
+              </a:rPr>
+              <a:t>("a=%x\</a:t>
+            </a:r>
+            <a:r>
+              <a:rPr lang="en-US" altLang="zh-CN" sz="1400" dirty="0" err="1">
+                <a:effectLst/>
+                <a:latin typeface="Consolas" panose="020B0609020204030204" pitchFamily="49" charset="0"/>
+                <a:sym typeface="+mn-ea"/>
+              </a:rPr>
+              <a:t>nb</a:t>
+            </a:r>
+            <a:r>
+              <a:rPr lang="en-US" altLang="zh-CN" sz="1400" dirty="0">
+                <a:effectLst/>
+                <a:latin typeface="Consolas" panose="020B0609020204030204" pitchFamily="49" charset="0"/>
+                <a:sym typeface="+mn-ea"/>
+              </a:rPr>
+              <a:t>=%x\</a:t>
+            </a:r>
+            <a:r>
+              <a:rPr lang="en-US" altLang="zh-CN" sz="1400" dirty="0" err="1">
+                <a:effectLst/>
+                <a:latin typeface="Consolas" panose="020B0609020204030204" pitchFamily="49" charset="0"/>
+                <a:sym typeface="+mn-ea"/>
+              </a:rPr>
+              <a:t>nc</a:t>
+            </a:r>
+            <a:r>
+              <a:rPr lang="en-US" altLang="zh-CN" sz="1400" dirty="0">
+                <a:effectLst/>
+                <a:latin typeface="Consolas" panose="020B0609020204030204" pitchFamily="49" charset="0"/>
+                <a:sym typeface="+mn-ea"/>
+              </a:rPr>
+              <a:t>=%x\n",</a:t>
+            </a:r>
+            <a:r>
+              <a:rPr lang="en-US" altLang="zh-CN" sz="1400" dirty="0" err="1">
+                <a:effectLst/>
+                <a:latin typeface="Consolas" panose="020B0609020204030204" pitchFamily="49" charset="0"/>
+                <a:sym typeface="+mn-ea"/>
+              </a:rPr>
+              <a:t>a,b,c</a:t>
+            </a:r>
+            <a:r>
+              <a:rPr lang="en-US" altLang="zh-CN" sz="1400" dirty="0">
+                <a:effectLst/>
+                <a:latin typeface="Consolas" panose="020B0609020204030204" pitchFamily="49" charset="0"/>
+                <a:sym typeface="+mn-ea"/>
+              </a:rPr>
+              <a:t>);</a:t>
             </a:r>
             <a:endParaRPr lang="en-US" altLang="zh-CN" sz="1400" b="0" dirty="0">
               <a:effectLst/>
@@ -11233,40 +7837,77 @@
           </a:p>
           <a:p>
             <a:r>
-              <a:rPr lang="en-US" altLang="zh-CN" sz="1400" b="0">
-                <a:effectLst/>
-                <a:latin typeface="Consolas" panose="020B0609020204030204" pitchFamily="49" charset="0"/>
-              </a:rPr>
-              <a:t>    signed char </a:t>
-            </a:r>
-            <a:r>
               <a:rPr lang="en-US" altLang="zh-CN" sz="1400" b="0" dirty="0">
                 <a:effectLst/>
                 <a:latin typeface="Consolas" panose="020B0609020204030204" pitchFamily="49" charset="0"/>
               </a:rPr>
-              <a:t>a = 127</a:t>
-            </a:r>
+              <a:t>    </a:t>
+            </a:r>
+            <a:r>
+              <a:rPr lang="en-US" altLang="zh-CN" sz="1400" b="0" dirty="0" err="1">
+                <a:effectLst/>
+                <a:latin typeface="Consolas" panose="020B0609020204030204" pitchFamily="49" charset="0"/>
+              </a:rPr>
+              <a:t>printf</a:t>
+            </a:r>
+            <a:r>
+              <a:rPr lang="en-US" altLang="zh-CN" sz="1400" b="0" dirty="0">
+                <a:effectLst/>
+                <a:latin typeface="Consolas" panose="020B0609020204030204" pitchFamily="49" charset="0"/>
+              </a:rPr>
+              <a:t>("a=%d\</a:t>
+            </a:r>
+            <a:r>
+              <a:rPr lang="en-US" altLang="zh-CN" sz="1400" b="0" dirty="0" err="1">
+                <a:effectLst/>
+                <a:latin typeface="Consolas" panose="020B0609020204030204" pitchFamily="49" charset="0"/>
+              </a:rPr>
+              <a:t>nb</a:t>
+            </a:r>
+            <a:r>
+              <a:rPr lang="en-US" altLang="zh-CN" sz="1400" b="0" dirty="0">
+                <a:effectLst/>
+                <a:latin typeface="Consolas" panose="020B0609020204030204" pitchFamily="49" charset="0"/>
+              </a:rPr>
+              <a:t>=%d\</a:t>
+            </a:r>
+            <a:r>
+              <a:rPr lang="en-US" altLang="zh-CN" sz="1400" b="0" dirty="0" err="1">
+                <a:effectLst/>
+                <a:latin typeface="Consolas" panose="020B0609020204030204" pitchFamily="49" charset="0"/>
+              </a:rPr>
+              <a:t>nc</a:t>
+            </a:r>
+            <a:r>
+              <a:rPr lang="en-US" altLang="zh-CN" sz="1400" b="0" dirty="0">
+                <a:effectLst/>
+                <a:latin typeface="Consolas" panose="020B0609020204030204" pitchFamily="49" charset="0"/>
+              </a:rPr>
+              <a:t>=%d\n",</a:t>
+            </a:r>
+            <a:r>
+              <a:rPr lang="en-US" altLang="zh-CN" sz="1400" b="0" dirty="0" err="1">
+                <a:effectLst/>
+                <a:latin typeface="Consolas" panose="020B0609020204030204" pitchFamily="49" charset="0"/>
+              </a:rPr>
+              <a:t>a,b,c</a:t>
+            </a:r>
+            <a:r>
+              <a:rPr lang="en-US" altLang="zh-CN" sz="1400" b="0" dirty="0">
+                <a:effectLst/>
+                <a:latin typeface="Consolas" panose="020B0609020204030204" pitchFamily="49" charset="0"/>
+              </a:rPr>
+              <a:t>);</a:t>
+            </a:r>
+          </a:p>
+          <a:p>
             <a:r>
               <a:rPr lang="en-US" altLang="zh-CN" sz="1400" dirty="0">
                 <a:effectLst/>
                 <a:latin typeface="Consolas" panose="020B0609020204030204" pitchFamily="49" charset="0"/>
                 <a:sym typeface="+mn-ea"/>
               </a:rPr>
-              <a:t>;</a:t>
-            </a:r>
-            <a:endParaRPr lang="en-US" altLang="zh-CN" sz="1400" dirty="0">
-              <a:effectLst/>
-              <a:latin typeface="Consolas" panose="020B0609020204030204" pitchFamily="49" charset="0"/>
-              <a:sym typeface="+mn-ea"/>
-            </a:endParaRPr>
-          </a:p>
-          <a:p>
-            <a:r>
-              <a:rPr lang="en-US" altLang="zh-CN" sz="1400" b="0" dirty="0">
-                <a:effectLst/>
-                <a:latin typeface="Consolas" panose="020B0609020204030204" pitchFamily="49" charset="0"/>
-              </a:rPr>
-              <a:t>    unsigned char b = 0x7f; </a:t>
+              <a:t>    a=a&gt;&gt;1;</a:t>
             </a:r>
             <a:endParaRPr lang="en-US" altLang="zh-CN" sz="1400" b="0" dirty="0">
               <a:effectLst/>
@@ -11275,19 +7916,12 @@
           </a:p>
           <a:p>
             <a:r>
-              <a:rPr lang="en-US" altLang="zh-CN" sz="1400" b="0" dirty="0">
-                <a:effectLst/>
-                <a:latin typeface="Consolas" panose="020B0609020204030204" pitchFamily="49" charset="0"/>
-              </a:rPr>
-              <a:t>    </a:t>
-            </a:r>
-            <a:r>
               <a:rPr lang="en-US" altLang="zh-CN" sz="1400" dirty="0">
                 <a:effectLst/>
                 <a:latin typeface="Consolas" panose="020B0609020204030204" pitchFamily="49" charset="0"/>
                 <a:sym typeface="+mn-ea"/>
               </a:rPr>
-              <a:t>char c = 0x7f;</a:t>
+              <a:t>    b=b&gt;&gt;1;</a:t>
             </a:r>
             <a:endParaRPr lang="en-US" altLang="zh-CN" sz="1400" b="0" dirty="0">
               <a:effectLst/>
@@ -11295,6 +7929,14 @@
             </a:endParaRPr>
           </a:p>
           <a:p>
+            <a:r>
+              <a:rPr lang="en-US" altLang="zh-CN" sz="1400" dirty="0">
+                <a:effectLst/>
+                <a:latin typeface="Consolas" panose="020B0609020204030204" pitchFamily="49" charset="0"/>
+                <a:sym typeface="+mn-ea"/>
+              </a:rPr>
+              <a:t>    c=c&gt;&gt;1;</a:t>
+            </a:r>
             <a:endParaRPr lang="en-US" altLang="zh-CN" sz="1400" b="0" dirty="0">
               <a:effectLst/>
               <a:latin typeface="Consolas" panose="020B0609020204030204" pitchFamily="49" charset="0"/>
@@ -11302,11 +7944,76 @@
           </a:p>
           <a:p>
             <a:r>
-              <a:rPr lang="en-US" altLang="zh-CN" sz="1400" b="0" dirty="0">
+              <a:rPr lang="en-US" altLang="zh-CN" sz="1400" dirty="0">
                 <a:effectLst/>
                 <a:latin typeface="Consolas" panose="020B0609020204030204" pitchFamily="49" charset="0"/>
-              </a:rPr>
-              <a:t>    a=a&lt;&lt;1;</a:t>
+                <a:sym typeface="+mn-ea"/>
+              </a:rPr>
+              <a:t>    </a:t>
+            </a:r>
+            <a:r>
+              <a:rPr lang="en-US" altLang="zh-CN" sz="1400" dirty="0" err="1">
+                <a:effectLst/>
+                <a:latin typeface="Consolas" panose="020B0609020204030204" pitchFamily="49" charset="0"/>
+                <a:sym typeface="+mn-ea"/>
+              </a:rPr>
+              <a:t>printf</a:t>
+            </a:r>
+            <a:r>
+              <a:rPr lang="en-US" altLang="zh-CN" sz="1400" dirty="0">
+                <a:effectLst/>
+                <a:latin typeface="Consolas" panose="020B0609020204030204" pitchFamily="49" charset="0"/>
+                <a:sym typeface="+mn-ea"/>
+              </a:rPr>
+              <a:t>("a=%x\</a:t>
+            </a:r>
+            <a:r>
+              <a:rPr lang="en-US" altLang="zh-CN" sz="1400" dirty="0" err="1">
+                <a:effectLst/>
+                <a:latin typeface="Consolas" panose="020B0609020204030204" pitchFamily="49" charset="0"/>
+                <a:sym typeface="+mn-ea"/>
+              </a:rPr>
+              <a:t>nb</a:t>
+            </a:r>
+            <a:r>
+              <a:rPr lang="en-US" altLang="zh-CN" sz="1400" dirty="0">
+                <a:effectLst/>
+                <a:latin typeface="Consolas" panose="020B0609020204030204" pitchFamily="49" charset="0"/>
+                <a:sym typeface="+mn-ea"/>
+              </a:rPr>
+              <a:t>=%x\</a:t>
+            </a:r>
+            <a:r>
+              <a:rPr lang="en-US" altLang="zh-CN" sz="1400" dirty="0" err="1">
+                <a:effectLst/>
+                <a:latin typeface="Consolas" panose="020B0609020204030204" pitchFamily="49" charset="0"/>
+                <a:sym typeface="+mn-ea"/>
+              </a:rPr>
+              <a:t>nc</a:t>
+            </a:r>
+            <a:r>
+              <a:rPr lang="en-US" altLang="zh-CN" sz="1400" dirty="0">
+                <a:effectLst/>
+                <a:latin typeface="Consolas" panose="020B0609020204030204" pitchFamily="49" charset="0"/>
+                <a:sym typeface="+mn-ea"/>
+              </a:rPr>
+              <a:t>=%x\n",</a:t>
+            </a:r>
+            <a:r>
+              <a:rPr lang="en-US" altLang="zh-CN" sz="1400" dirty="0" err="1">
+                <a:effectLst/>
+                <a:latin typeface="Consolas" panose="020B0609020204030204" pitchFamily="49" charset="0"/>
+                <a:sym typeface="+mn-ea"/>
+              </a:rPr>
+              <a:t>a,b,c</a:t>
+            </a:r>
+            <a:r>
+              <a:rPr lang="en-US" altLang="zh-CN" sz="1400" dirty="0">
+                <a:effectLst/>
+                <a:latin typeface="Consolas" panose="020B0609020204030204" pitchFamily="49" charset="0"/>
+                <a:sym typeface="+mn-ea"/>
+              </a:rPr>
+              <a:t>);</a:t>
             </a:r>
             <a:endParaRPr lang="en-US" altLang="zh-CN" sz="1400" b="0" dirty="0">
               <a:effectLst/>
@@ -11315,11 +8022,76 @@
           </a:p>
           <a:p>
             <a:r>
-              <a:rPr lang="en-US" altLang="zh-CN" sz="1400" b="0" dirty="0">
+              <a:rPr lang="en-US" altLang="zh-CN" sz="1400" dirty="0">
                 <a:effectLst/>
                 <a:latin typeface="Consolas" panose="020B0609020204030204" pitchFamily="49" charset="0"/>
-              </a:rPr>
-              <a:t>    b=b&lt;&lt;1;</a:t>
+                <a:sym typeface="+mn-ea"/>
+              </a:rPr>
+              <a:t>    </a:t>
+            </a:r>
+            <a:r>
+              <a:rPr lang="en-US" altLang="zh-CN" sz="1400" dirty="0" err="1">
+                <a:effectLst/>
+                <a:latin typeface="Consolas" panose="020B0609020204030204" pitchFamily="49" charset="0"/>
+                <a:sym typeface="+mn-ea"/>
+              </a:rPr>
+              <a:t>printf</a:t>
+            </a:r>
+            <a:r>
+              <a:rPr lang="en-US" altLang="zh-CN" sz="1400" dirty="0">
+                <a:effectLst/>
+                <a:latin typeface="Consolas" panose="020B0609020204030204" pitchFamily="49" charset="0"/>
+                <a:sym typeface="+mn-ea"/>
+              </a:rPr>
+              <a:t>("a=%d\</a:t>
+            </a:r>
+            <a:r>
+              <a:rPr lang="en-US" altLang="zh-CN" sz="1400" dirty="0" err="1">
+                <a:effectLst/>
+                <a:latin typeface="Consolas" panose="020B0609020204030204" pitchFamily="49" charset="0"/>
+                <a:sym typeface="+mn-ea"/>
+              </a:rPr>
+              <a:t>nb</a:t>
+            </a:r>
+            <a:r>
+              <a:rPr lang="en-US" altLang="zh-CN" sz="1400" dirty="0">
+                <a:effectLst/>
+                <a:latin typeface="Consolas" panose="020B0609020204030204" pitchFamily="49" charset="0"/>
+                <a:sym typeface="+mn-ea"/>
+              </a:rPr>
+              <a:t>=%d\</a:t>
+            </a:r>
+            <a:r>
+              <a:rPr lang="en-US" altLang="zh-CN" sz="1400" dirty="0" err="1">
+                <a:effectLst/>
+                <a:latin typeface="Consolas" panose="020B0609020204030204" pitchFamily="49" charset="0"/>
+                <a:sym typeface="+mn-ea"/>
+              </a:rPr>
+              <a:t>nc</a:t>
+            </a:r>
+            <a:r>
+              <a:rPr lang="en-US" altLang="zh-CN" sz="1400" dirty="0">
+                <a:effectLst/>
+                <a:latin typeface="Consolas" panose="020B0609020204030204" pitchFamily="49" charset="0"/>
+                <a:sym typeface="+mn-ea"/>
+              </a:rPr>
+              <a:t>=%d\n",</a:t>
+            </a:r>
+            <a:r>
+              <a:rPr lang="en-US" altLang="zh-CN" sz="1400" dirty="0" err="1">
+                <a:effectLst/>
+                <a:latin typeface="Consolas" panose="020B0609020204030204" pitchFamily="49" charset="0"/>
+                <a:sym typeface="+mn-ea"/>
+              </a:rPr>
+              <a:t>a,b,c</a:t>
+            </a:r>
+            <a:r>
+              <a:rPr lang="en-US" altLang="zh-CN" sz="1400" dirty="0">
+                <a:effectLst/>
+                <a:latin typeface="Consolas" panose="020B0609020204030204" pitchFamily="49" charset="0"/>
+                <a:sym typeface="+mn-ea"/>
+              </a:rPr>
+              <a:t>);</a:t>
             </a:r>
             <a:endParaRPr lang="en-US" altLang="zh-CN" sz="1400" b="0" dirty="0">
               <a:effectLst/>
@@ -11327,77 +8099,6 @@
             </a:endParaRPr>
           </a:p>
           <a:p>
-            <a:r>
-              <a:rPr lang="en-US" altLang="zh-CN" sz="1400" b="0" dirty="0">
-                <a:effectLst/>
-                <a:latin typeface="Consolas" panose="020B0609020204030204" pitchFamily="49" charset="0"/>
-              </a:rPr>
-              <a:t>    c=c&lt;&lt;1;            </a:t>
-            </a:r>
-            <a:r>
-              <a:rPr lang="en-US" altLang="zh-CN" sz="1400" dirty="0" err="1">
-                <a:effectLst/>
-                <a:latin typeface="Consolas" panose="020B0609020204030204" pitchFamily="49" charset="0"/>
-                <a:sym typeface="+mn-ea"/>
-              </a:rPr>
-              <a:t>printf</a:t>
-            </a:r>
-            <a:r>
-              <a:rPr lang="en-US" altLang="zh-CN" sz="1400" dirty="0">
-                <a:effectLst/>
-                <a:latin typeface="Consolas" panose="020B0609020204030204" pitchFamily="49" charset="0"/>
-                <a:sym typeface="+mn-ea"/>
-              </a:rPr>
-              <a:t>("a=%x\</a:t>
-            </a:r>
-            <a:r>
-              <a:rPr lang="en-US" altLang="zh-CN" sz="1400" dirty="0" err="1">
-                <a:effectLst/>
-                <a:latin typeface="Consolas" panose="020B0609020204030204" pitchFamily="49" charset="0"/>
-                <a:sym typeface="+mn-ea"/>
-              </a:rPr>
-              <a:t>nb</a:t>
-            </a:r>
-            <a:r>
-              <a:rPr lang="en-US" altLang="zh-CN" sz="1400" dirty="0">
-                <a:effectLst/>
-                <a:latin typeface="Consolas" panose="020B0609020204030204" pitchFamily="49" charset="0"/>
-                <a:sym typeface="+mn-ea"/>
-              </a:rPr>
-              <a:t>=%x\</a:t>
-            </a:r>
-            <a:r>
-              <a:rPr lang="en-US" altLang="zh-CN" sz="1400" dirty="0" err="1">
-                <a:effectLst/>
-                <a:latin typeface="Consolas" panose="020B0609020204030204" pitchFamily="49" charset="0"/>
-                <a:sym typeface="+mn-ea"/>
-              </a:rPr>
-              <a:t>nc</a:t>
-            </a:r>
-            <a:r>
-              <a:rPr lang="en-US" altLang="zh-CN" sz="1400" dirty="0">
-                <a:effectLst/>
-                <a:latin typeface="Consolas" panose="020B0609020204030204" pitchFamily="49" charset="0"/>
-                <a:sym typeface="+mn-ea"/>
-              </a:rPr>
-              <a:t>=%x\n",</a:t>
-            </a:r>
-            <a:r>
-              <a:rPr lang="en-US" altLang="zh-CN" sz="1400" dirty="0" err="1">
-                <a:effectLst/>
-                <a:latin typeface="Consolas" panose="020B0609020204030204" pitchFamily="49" charset="0"/>
-                <a:sym typeface="+mn-ea"/>
-              </a:rPr>
-              <a:t>a,b,c</a:t>
-            </a:r>
-            <a:r>
-              <a:rPr lang="en-US" altLang="zh-CN" sz="1400" dirty="0">
-                <a:effectLst/>
-                <a:latin typeface="Consolas" panose="020B0609020204030204" pitchFamily="49" charset="0"/>
-                <a:sym typeface="+mn-ea"/>
-              </a:rPr>
-              <a:t>);</a:t>
-            </a:r>
             <a:endParaRPr lang="en-US" altLang="zh-CN" sz="1400" b="0" dirty="0">
               <a:effectLst/>
               <a:latin typeface="Consolas" panose="020B0609020204030204" pitchFamily="49" charset="0"/>
@@ -11409,277 +8110,8 @@
                 <a:effectLst/>
                 <a:latin typeface="Consolas" panose="020B0609020204030204" pitchFamily="49" charset="0"/>
               </a:rPr>
-              <a:t>    </a:t>
-            </a:r>
-            <a:r>
-              <a:rPr lang="en-US" altLang="zh-CN" sz="1400" b="0" dirty="0" err="1">
-                <a:effectLst/>
-                <a:latin typeface="Consolas" panose="020B0609020204030204" pitchFamily="49" charset="0"/>
-              </a:rPr>
-              <a:t>printf</a:t>
-            </a:r>
-            <a:r>
-              <a:rPr lang="en-US" altLang="zh-CN" sz="1400" b="0" dirty="0">
-                <a:effectLst/>
-                <a:latin typeface="Consolas" panose="020B0609020204030204" pitchFamily="49" charset="0"/>
-              </a:rPr>
-              <a:t>("a=%d\</a:t>
-            </a:r>
-            <a:r>
-              <a:rPr lang="en-US" altLang="zh-CN" sz="1400" b="0" dirty="0" err="1">
-                <a:effectLst/>
-                <a:latin typeface="Consolas" panose="020B0609020204030204" pitchFamily="49" charset="0"/>
-              </a:rPr>
-              <a:t>nb</a:t>
-            </a:r>
-            <a:r>
-              <a:rPr lang="en-US" altLang="zh-CN" sz="1400" b="0" dirty="0">
-                <a:effectLst/>
-                <a:latin typeface="Consolas" panose="020B0609020204030204" pitchFamily="49" charset="0"/>
-              </a:rPr>
-              <a:t>=%d\</a:t>
-            </a:r>
-            <a:r>
-              <a:rPr lang="en-US" altLang="zh-CN" sz="1400" b="0" dirty="0" err="1">
-                <a:effectLst/>
-                <a:latin typeface="Consolas" panose="020B0609020204030204" pitchFamily="49" charset="0"/>
-              </a:rPr>
-              <a:t>nc</a:t>
-            </a:r>
-            <a:r>
-              <a:rPr lang="en-US" altLang="zh-CN" sz="1400" b="0" dirty="0">
-                <a:effectLst/>
-                <a:latin typeface="Consolas" panose="020B0609020204030204" pitchFamily="49" charset="0"/>
-              </a:rPr>
-              <a:t>=%d\n",</a:t>
-            </a:r>
-            <a:r>
-              <a:rPr lang="en-US" altLang="zh-CN" sz="1400" b="0" dirty="0" err="1">
-                <a:effectLst/>
-                <a:latin typeface="Consolas" panose="020B0609020204030204" pitchFamily="49" charset="0"/>
-              </a:rPr>
-              <a:t>a,b,c</a:t>
-            </a:r>
-            <a:r>
-              <a:rPr lang="en-US" altLang="zh-CN" sz="1400" b="0" dirty="0">
-                <a:effectLst/>
-                <a:latin typeface="Consolas" panose="020B0609020204030204" pitchFamily="49" charset="0"/>
-              </a:rPr>
-              <a:t>);</a:t>
-            </a:r>
-            <a:endParaRPr lang="en-US" altLang="zh-CN" sz="1400" b="0" dirty="0">
-              <a:effectLst/>
-              <a:latin typeface="Consolas" panose="020B0609020204030204" pitchFamily="49" charset="0"/>
-            </a:endParaRPr>
-          </a:p>
-          <a:p>
-            <a:r>
-              <a:rPr lang="en-US" altLang="zh-CN" sz="1400" dirty="0">
-                <a:effectLst/>
-                <a:latin typeface="Consolas" panose="020B0609020204030204" pitchFamily="49" charset="0"/>
-                <a:sym typeface="+mn-ea"/>
-              </a:rPr>
-              <a:t>    a=a&gt;&gt;1;</a:t>
-            </a:r>
-            <a:endParaRPr lang="en-US" altLang="zh-CN" sz="1400" b="0" dirty="0">
-              <a:effectLst/>
-              <a:latin typeface="Consolas" panose="020B0609020204030204" pitchFamily="49" charset="0"/>
-            </a:endParaRPr>
-          </a:p>
-          <a:p>
-            <a:r>
-              <a:rPr lang="en-US" altLang="zh-CN" sz="1400" dirty="0">
-                <a:effectLst/>
-                <a:latin typeface="Consolas" panose="020B0609020204030204" pitchFamily="49" charset="0"/>
-                <a:sym typeface="+mn-ea"/>
-              </a:rPr>
-              <a:t>    b=b&gt;&gt;1;</a:t>
-            </a:r>
-            <a:endParaRPr lang="en-US" altLang="zh-CN" sz="1400" b="0" dirty="0">
-              <a:effectLst/>
-              <a:latin typeface="Consolas" panose="020B0609020204030204" pitchFamily="49" charset="0"/>
-            </a:endParaRPr>
-          </a:p>
-          <a:p>
-            <a:r>
-              <a:rPr lang="en-US" altLang="zh-CN" sz="1400" dirty="0">
-                <a:effectLst/>
-                <a:latin typeface="Consolas" panose="020B0609020204030204" pitchFamily="49" charset="0"/>
-                <a:sym typeface="+mn-ea"/>
-              </a:rPr>
-              <a:t>    c=c&gt;&gt;1;</a:t>
-            </a:r>
-            <a:endParaRPr lang="en-US" altLang="zh-CN" sz="1400" b="0" dirty="0">
-              <a:effectLst/>
-              <a:latin typeface="Consolas" panose="020B0609020204030204" pitchFamily="49" charset="0"/>
-            </a:endParaRPr>
-          </a:p>
-          <a:p>
-            <a:r>
-              <a:rPr lang="en-US" altLang="zh-CN" sz="1400" dirty="0" err="1">
-                <a:effectLst/>
-                <a:latin typeface="Consolas" panose="020B0609020204030204" pitchFamily="49" charset="0"/>
-                <a:sym typeface="+mn-ea"/>
-              </a:rPr>
-              <a:t>printf</a:t>
-            </a:r>
-            <a:r>
-              <a:rPr lang="en-US" altLang="zh-CN" sz="1400" dirty="0">
-                <a:effectLst/>
-                <a:latin typeface="Consolas" panose="020B0609020204030204" pitchFamily="49" charset="0"/>
-                <a:sym typeface="+mn-ea"/>
-              </a:rPr>
-              <a:t>("a=%x\</a:t>
-            </a:r>
-            <a:r>
-              <a:rPr lang="en-US" altLang="zh-CN" sz="1400" dirty="0" err="1">
-                <a:effectLst/>
-                <a:latin typeface="Consolas" panose="020B0609020204030204" pitchFamily="49" charset="0"/>
-                <a:sym typeface="+mn-ea"/>
-              </a:rPr>
-              <a:t>nb</a:t>
-            </a:r>
-            <a:r>
-              <a:rPr lang="en-US" altLang="zh-CN" sz="1400" dirty="0">
-                <a:effectLst/>
-                <a:latin typeface="Consolas" panose="020B0609020204030204" pitchFamily="49" charset="0"/>
-                <a:sym typeface="+mn-ea"/>
-              </a:rPr>
-              <a:t>=%x\</a:t>
-            </a:r>
-            <a:r>
-              <a:rPr lang="en-US" altLang="zh-CN" sz="1400" dirty="0" err="1">
-                <a:effectLst/>
-                <a:latin typeface="Consolas" panose="020B0609020204030204" pitchFamily="49" charset="0"/>
-                <a:sym typeface="+mn-ea"/>
-              </a:rPr>
-              <a:t>nc</a:t>
-            </a:r>
-            <a:r>
-              <a:rPr lang="en-US" altLang="zh-CN" sz="1400" dirty="0">
-                <a:effectLst/>
-                <a:latin typeface="Consolas" panose="020B0609020204030204" pitchFamily="49" charset="0"/>
-                <a:sym typeface="+mn-ea"/>
-              </a:rPr>
-              <a:t>=%x\n",</a:t>
-            </a:r>
-            <a:r>
-              <a:rPr lang="en-US" altLang="zh-CN" sz="1400" dirty="0" err="1">
-                <a:effectLst/>
-                <a:latin typeface="Consolas" panose="020B0609020204030204" pitchFamily="49" charset="0"/>
-                <a:sym typeface="+mn-ea"/>
-              </a:rPr>
-              <a:t>a,b,c</a:t>
-            </a:r>
-            <a:r>
-              <a:rPr lang="en-US" altLang="zh-CN" sz="1400" dirty="0">
-                <a:effectLst/>
-                <a:latin typeface="Consolas" panose="020B0609020204030204" pitchFamily="49" charset="0"/>
-                <a:sym typeface="+mn-ea"/>
-              </a:rPr>
-              <a:t>);</a:t>
-            </a:r>
-            <a:endParaRPr lang="en-US" altLang="zh-CN" sz="1400" b="0" dirty="0">
-              <a:effectLst/>
-              <a:latin typeface="Consolas" panose="020B0609020204030204" pitchFamily="49" charset="0"/>
-            </a:endParaRPr>
-          </a:p>
-          <a:p>
-            <a:r>
-              <a:rPr lang="en-US" altLang="zh-CN" sz="1400" dirty="0">
-                <a:effectLst/>
-                <a:latin typeface="Consolas" panose="020B0609020204030204" pitchFamily="49" charset="0"/>
-                <a:sym typeface="+mn-ea"/>
-              </a:rPr>
-              <a:t>    </a:t>
-            </a:r>
-            <a:r>
-              <a:rPr lang="en-US" altLang="zh-CN" sz="1400" dirty="0" err="1">
-                <a:effectLst/>
-                <a:latin typeface="Consolas" panose="020B0609020204030204" pitchFamily="49" charset="0"/>
-                <a:sym typeface="+mn-ea"/>
-              </a:rPr>
-              <a:t>printf</a:t>
-            </a:r>
-            <a:r>
-              <a:rPr lang="en-US" altLang="zh-CN" sz="1400" dirty="0">
-                <a:effectLst/>
-                <a:latin typeface="Consolas" panose="020B0609020204030204" pitchFamily="49" charset="0"/>
-                <a:sym typeface="+mn-ea"/>
-              </a:rPr>
-              <a:t>("a=%d\</a:t>
-            </a:r>
-            <a:r>
-              <a:rPr lang="en-US" altLang="zh-CN" sz="1400" dirty="0" err="1">
-                <a:effectLst/>
-                <a:latin typeface="Consolas" panose="020B0609020204030204" pitchFamily="49" charset="0"/>
-                <a:sym typeface="+mn-ea"/>
-              </a:rPr>
-              <a:t>nb</a:t>
-            </a:r>
-            <a:r>
-              <a:rPr lang="en-US" altLang="zh-CN" sz="1400" dirty="0">
-                <a:effectLst/>
-                <a:latin typeface="Consolas" panose="020B0609020204030204" pitchFamily="49" charset="0"/>
-                <a:sym typeface="+mn-ea"/>
-              </a:rPr>
-              <a:t>=%d\</a:t>
-            </a:r>
-            <a:r>
-              <a:rPr lang="en-US" altLang="zh-CN" sz="1400" dirty="0" err="1">
-                <a:effectLst/>
-                <a:latin typeface="Consolas" panose="020B0609020204030204" pitchFamily="49" charset="0"/>
-                <a:sym typeface="+mn-ea"/>
-              </a:rPr>
-              <a:t>nc</a:t>
-            </a:r>
-            <a:r>
-              <a:rPr lang="en-US" altLang="zh-CN" sz="1400" dirty="0">
-                <a:effectLst/>
-                <a:latin typeface="Consolas" panose="020B0609020204030204" pitchFamily="49" charset="0"/>
-                <a:sym typeface="+mn-ea"/>
-              </a:rPr>
-              <a:t>=%d\n",</a:t>
-            </a:r>
-            <a:r>
-              <a:rPr lang="en-US" altLang="zh-CN" sz="1400" dirty="0" err="1">
-                <a:effectLst/>
-                <a:latin typeface="Consolas" panose="020B0609020204030204" pitchFamily="49" charset="0"/>
-                <a:sym typeface="+mn-ea"/>
-              </a:rPr>
-              <a:t>a,b,c</a:t>
-            </a:r>
-            <a:r>
-              <a:rPr lang="en-US" altLang="zh-CN" sz="1400" dirty="0">
-                <a:effectLst/>
-                <a:latin typeface="Consolas" panose="020B0609020204030204" pitchFamily="49" charset="0"/>
-                <a:sym typeface="+mn-ea"/>
-              </a:rPr>
-              <a:t>);</a:t>
-            </a:r>
-            <a:endParaRPr lang="en-US" altLang="zh-CN" sz="1400" b="0" dirty="0">
-              <a:effectLst/>
-              <a:latin typeface="Consolas" panose="020B0609020204030204" pitchFamily="49" charset="0"/>
-            </a:endParaRPr>
-          </a:p>
-          <a:p>
-            <a:endParaRPr lang="en-US" altLang="zh-CN" sz="1400" b="0" dirty="0">
-              <a:effectLst/>
-              <a:latin typeface="Consolas" panose="020B0609020204030204" pitchFamily="49" charset="0"/>
-            </a:endParaRPr>
-          </a:p>
-          <a:p>
-            <a:r>
-              <a:rPr lang="en-US" altLang="zh-CN" sz="1400" b="0" dirty="0">
-                <a:effectLst/>
-                <a:latin typeface="Consolas" panose="020B0609020204030204" pitchFamily="49" charset="0"/>
-              </a:rPr>
               <a:t>    return 0;</a:t>
             </a:r>
-            <a:endParaRPr lang="en-US" altLang="zh-CN" sz="1400" b="0" dirty="0">
-              <a:effectLst/>
-              <a:latin typeface="Consolas" panose="020B0609020204030204" pitchFamily="49" charset="0"/>
-            </a:endParaRPr>
           </a:p>
           <a:p>
             <a:r>
@@ -11703,7 +8135,7 @@
 </p:sld>
 </file>
 
-<file path=ppt/slides/slide23.xml><?xml version="1.0" encoding="utf-8"?>
+<file path=ppt/slides/slide13.xml><?xml version="1.0" encoding="utf-8"?>
 <p:sld xmlns:a="http://schemas.openxmlformats.org/drawingml/2006/main" xmlns:r="http://schemas.openxmlformats.org/officeDocument/2006/relationships" xmlns:p="http://schemas.openxmlformats.org/presentationml/2006/main">
   <p:cSld>
     <p:spTree>
@@ -11746,7 +8178,7 @@
               <a:rPr lang="en-US" altLang="zh-CN" sz="2800" dirty="0">
                 <a:sym typeface="+mn-ea"/>
               </a:rPr>
-              <a:t>4.2. Write a program to calculate integer multiplication: 56789 * 23456789, and then print the result. Verify the result using a calculator.</a:t>
+              <a:t>2. Write a program to calculate integer multiplication: 56789 * 23456789, and then print the result. Verify the result using a calculator.</a:t>
             </a:r>
             <a:br>
               <a:rPr lang="en-US" altLang="zh-CN" sz="2800" dirty="0">
@@ -11757,24 +8189,13 @@
               <a:rPr lang="en-US" altLang="zh-CN" sz="2800" dirty="0">
                 <a:sym typeface="+mn-ea"/>
               </a:rPr>
-              <a:t>If the result is wrong, what could be the reason? How to get the correct result for this exercise?</a:t>
+              <a:t>If the result is wrong, what is the reason? How to get the correct result?</a:t>
             </a:r>
             <a:br>
               <a:rPr lang="en-US" altLang="zh-CN" sz="2800" dirty="0">
                 <a:sym typeface="+mn-ea"/>
               </a:rPr>
             </a:br>
-            <a:br>
-              <a:rPr lang="en-US" altLang="zh-CN" sz="2800" dirty="0">
-                <a:sym typeface="+mn-ea"/>
-              </a:rPr>
-            </a:br>
-            <a:r>
-              <a:rPr lang="en-US" altLang="zh-CN" sz="2800" dirty="0">
-                <a:sym typeface="+mn-ea"/>
-              </a:rPr>
-              <a:t>You need to explain the reason to a SA to pass the test.</a:t>
-            </a:r>
             <a:endParaRPr lang="zh-CN" altLang="en-US" sz="2800" dirty="0"/>
           </a:p>
         </p:txBody>
@@ -11788,7 +8209,7 @@
           <p:nvPr/>
         </p:nvPicPr>
         <p:blipFill>
-          <a:blip r:embed="rId1"/>
+          <a:blip r:embed="rId3"/>
           <a:stretch>
             <a:fillRect/>
           </a:stretch>
@@ -11873,22 +8294,8 @@
                 <a:ea typeface="宋体" panose="02010600030101010101" pitchFamily="2" charset="-122"/>
                 <a:cs typeface="+mj-cs"/>
               </a:rPr>
-              <a:t> 4. Exercises</a:t>
-            </a:r>
-            <a:endParaRPr kumimoji="0" lang="en-US" altLang="zh-CN" sz="3600" b="1" i="0" u="none" strike="noStrike" kern="1200" cap="none" spc="0" normalizeH="0" baseline="0" noProof="0" dirty="0">
-              <a:ln>
-                <a:noFill/>
-              </a:ln>
-              <a:solidFill>
-                <a:prstClr val="black"/>
-              </a:solidFill>
-              <a:effectLst/>
-              <a:uLnTx/>
-              <a:uFillTx/>
-              <a:latin typeface="Calibri" panose="020F0502020204030204"/>
-              <a:ea typeface="宋体" panose="02010600030101010101" pitchFamily="2" charset="-122"/>
-              <a:cs typeface="+mj-cs"/>
-            </a:endParaRPr>
+              <a:t> 2. Exercises</a:t>
+            </a:r>
           </a:p>
         </p:txBody>
       </p:sp>
@@ -11901,7 +8308,7 @@
           <p:nvPr/>
         </p:nvPicPr>
         <p:blipFill>
-          <a:blip r:embed="rId2"/>
+          <a:blip r:embed="rId4"/>
           <a:stretch>
             <a:fillRect/>
           </a:stretch>
@@ -11924,7 +8331,7 @@
 </p:sld>
 </file>
 
-<file path=ppt/slides/slide24.xml><?xml version="1.0" encoding="utf-8"?>
+<file path=ppt/slides/slide14.xml><?xml version="1.0" encoding="utf-8"?>
 <p:sld xmlns:a="http://schemas.openxmlformats.org/drawingml/2006/main" xmlns:r="http://schemas.openxmlformats.org/officeDocument/2006/relationships" xmlns:p="http://schemas.openxmlformats.org/presentationml/2006/main">
   <p:cSld>
     <p:spTree>
@@ -12011,22 +8418,8 @@
                 <a:ea typeface="宋体" panose="02010600030101010101" pitchFamily="2" charset="-122"/>
                 <a:cs typeface="+mj-cs"/>
               </a:rPr>
-              <a:t> 4. Exercises</a:t>
-            </a:r>
-            <a:endParaRPr kumimoji="0" lang="en-US" altLang="zh-CN" sz="3600" b="1" i="0" u="none" strike="noStrike" kern="1200" cap="none" spc="0" normalizeH="0" baseline="0" noProof="0" dirty="0">
-              <a:ln>
-                <a:noFill/>
-              </a:ln>
-              <a:solidFill>
-                <a:prstClr val="black"/>
-              </a:solidFill>
-              <a:effectLst/>
-              <a:uLnTx/>
-              <a:uFillTx/>
-              <a:latin typeface="Calibri" panose="020F0502020204030204"/>
-              <a:ea typeface="宋体" panose="02010600030101010101" pitchFamily="2" charset="-122"/>
-              <a:cs typeface="+mj-cs"/>
-            </a:endParaRPr>
+              <a:t> 2. Exercises</a:t>
+            </a:r>
           </a:p>
         </p:txBody>
       </p:sp>
@@ -12057,9 +8450,8 @@
             </a:pPr>
             <a:r>
               <a:rPr lang="en-US" altLang="zh-CN" dirty="0"/>
-              <a:t>4.3. Run the following source code and explain the result.</a:t>
-            </a:r>
-            <a:endParaRPr lang="en-US" altLang="zh-CN" dirty="0"/>
+              <a:t>3. Run the following source code and explain the result.</a:t>
+            </a:r>
           </a:p>
         </p:txBody>
       </p:sp>
@@ -12101,6 +8493,16 @@
               </a:rPr>
               <a:t>#include &lt;iostream&gt;  //file name: lab3_p4_3.cpp</a:t>
             </a:r>
+          </a:p>
+          <a:p>
+            <a:r>
+              <a:rPr lang="en-US" altLang="zh-CN" sz="1400" dirty="0">
+                <a:latin typeface="Courier" pitchFamily="2" charset="0"/>
+              </a:rPr>
+              <a:t>using namespace std;</a:t>
+            </a:r>
+          </a:p>
+          <a:p>
             <a:endParaRPr lang="en-US" altLang="zh-CN" sz="1400" dirty="0">
               <a:latin typeface="Courier" pitchFamily="2" charset="0"/>
             </a:endParaRPr>
@@ -12110,44 +8512,115 @@
               <a:rPr lang="en-US" altLang="zh-CN" sz="1400" dirty="0">
                 <a:latin typeface="Courier" pitchFamily="2" charset="0"/>
               </a:rPr>
-              <a:t>using namespace std;</a:t>
-            </a:r>
+              <a:t>int main() </a:t>
+            </a:r>
+          </a:p>
+          <a:p>
+            <a:r>
+              <a:rPr lang="en-US" altLang="zh-CN" sz="1400" dirty="0">
+                <a:latin typeface="Courier" pitchFamily="2" charset="0"/>
+              </a:rPr>
+              <a:t>{</a:t>
+            </a:r>
+          </a:p>
+          <a:p>
+            <a:r>
+              <a:rPr lang="en-US" altLang="zh-CN" sz="1400" dirty="0">
+                <a:latin typeface="Courier" pitchFamily="2" charset="0"/>
+              </a:rPr>
+              <a:t>    </a:t>
+            </a:r>
+            <a:r>
+              <a:rPr lang="en-US" altLang="zh-CN" sz="1400" dirty="0" err="1">
+                <a:latin typeface="Courier" pitchFamily="2" charset="0"/>
+              </a:rPr>
+              <a:t>cout</a:t>
+            </a:r>
+            <a:r>
+              <a:rPr lang="en-US" altLang="zh-CN" sz="1400" dirty="0">
+                <a:latin typeface="Courier" pitchFamily="2" charset="0"/>
+              </a:rPr>
+              <a:t> &lt;&lt; fixed;</a:t>
+            </a:r>
+          </a:p>
+          <a:p>
+            <a:r>
+              <a:rPr lang="en-US" altLang="zh-CN" sz="1400" dirty="0">
+                <a:latin typeface="Courier" pitchFamily="2" charset="0"/>
+              </a:rPr>
+              <a:t>    float f1 = 1.0f;</a:t>
+            </a:r>
+          </a:p>
+          <a:p>
+            <a:r>
+              <a:rPr lang="en-US" altLang="zh-CN" sz="1400" dirty="0">
+                <a:latin typeface="Courier" pitchFamily="2" charset="0"/>
+              </a:rPr>
+              <a:t>    </a:t>
+            </a:r>
+            <a:r>
+              <a:rPr lang="en-US" altLang="zh-CN" sz="1400" dirty="0" err="1">
+                <a:latin typeface="Courier" pitchFamily="2" charset="0"/>
+              </a:rPr>
+              <a:t>cout</a:t>
+            </a:r>
+            <a:r>
+              <a:rPr lang="en-US" altLang="zh-CN" sz="1400" dirty="0">
+                <a:latin typeface="Courier" pitchFamily="2" charset="0"/>
+              </a:rPr>
+              <a:t>&lt;&lt;"f1 = "&lt;&lt;f1&lt;&lt;</a:t>
+            </a:r>
+            <a:r>
+              <a:rPr lang="en-US" altLang="zh-CN" sz="1400" dirty="0" err="1">
+                <a:latin typeface="Courier" pitchFamily="2" charset="0"/>
+              </a:rPr>
+              <a:t>endl</a:t>
+            </a:r>
+            <a:r>
+              <a:rPr lang="en-US" altLang="zh-CN" sz="1400" dirty="0">
+                <a:latin typeface="Courier" pitchFamily="2" charset="0"/>
+              </a:rPr>
+              <a:t>;</a:t>
+            </a:r>
+          </a:p>
+          <a:p>
             <a:endParaRPr lang="en-US" altLang="zh-CN" sz="1400" dirty="0">
               <a:latin typeface="Courier" pitchFamily="2" charset="0"/>
             </a:endParaRPr>
           </a:p>
           <a:p>
-            <a:endParaRPr lang="en-US" altLang="zh-CN" sz="1400" dirty="0">
-              <a:latin typeface="Courier" pitchFamily="2" charset="0"/>
-            </a:endParaRPr>
-          </a:p>
-          <a:p>
             <a:r>
               <a:rPr lang="en-US" altLang="zh-CN" sz="1400" dirty="0">
                 <a:latin typeface="Courier" pitchFamily="2" charset="0"/>
               </a:rPr>
-              <a:t>int main() </a:t>
-            </a:r>
-            <a:endParaRPr lang="en-US" altLang="zh-CN" sz="1400" dirty="0">
-              <a:latin typeface="Courier" pitchFamily="2" charset="0"/>
-            </a:endParaRPr>
+              <a:t>    float a = 0.1f;</a:t>
+            </a:r>
           </a:p>
           <a:p>
             <a:r>
               <a:rPr lang="en-US" altLang="zh-CN" sz="1400" dirty="0">
                 <a:latin typeface="Courier" pitchFamily="2" charset="0"/>
               </a:rPr>
-              <a:t>{</a:t>
-            </a:r>
-            <a:endParaRPr lang="en-US" altLang="zh-CN" sz="1400" dirty="0">
-              <a:latin typeface="Courier" pitchFamily="2" charset="0"/>
-            </a:endParaRPr>
-          </a:p>
-          <a:p>
+              <a:t>    float f2 = </a:t>
+            </a:r>
+            <a:r>
+              <a:rPr lang="en-US" altLang="zh-CN" sz="1400" dirty="0" err="1">
+                <a:latin typeface="Courier" pitchFamily="2" charset="0"/>
+              </a:rPr>
+              <a:t>a+a+a+a+a+a+a+a+a+a</a:t>
+            </a:r>
             <a:r>
               <a:rPr lang="en-US" altLang="zh-CN" sz="1400" dirty="0">
                 <a:latin typeface="Courier" pitchFamily="2" charset="0"/>
               </a:rPr>
+              <a:t>;</a:t>
+            </a:r>
+          </a:p>
+          <a:p>
+            <a:r>
+              <a:rPr lang="en-US" altLang="zh-CN" sz="1400" dirty="0">
+                <a:latin typeface="Courier" pitchFamily="2" charset="0"/>
+              </a:rPr>
               <a:t>    </a:t>
             </a:r>
             <a:r>
@@ -12160,22 +8633,20 @@
               <a:rPr lang="en-US" altLang="zh-CN" sz="1400" dirty="0">
                 <a:latin typeface="Courier" pitchFamily="2" charset="0"/>
               </a:rPr>
-              <a:t> &lt;&lt; fixed;</a:t>
-            </a:r>
-            <a:endParaRPr lang="en-US" altLang="zh-CN" sz="1400" dirty="0">
-              <a:latin typeface="Courier" pitchFamily="2" charset="0"/>
-            </a:endParaRPr>
-          </a:p>
-          <a:p>
+              <a:t>&lt;&lt;"f2 = "&lt;&lt;f2&lt;&lt;</a:t>
+            </a:r>
+            <a:r>
+              <a:rPr lang="en-US" altLang="zh-CN" sz="1400" dirty="0" err="1">
+                <a:latin typeface="Courier" pitchFamily="2" charset="0"/>
+              </a:rPr>
+              <a:t>endl</a:t>
+            </a:r>
             <a:r>
               <a:rPr lang="en-US" altLang="zh-CN" sz="1400" dirty="0">
                 <a:latin typeface="Courier" pitchFamily="2" charset="0"/>
               </a:rPr>
-              <a:t>    float f1 = 1.0f;</a:t>
-            </a:r>
-            <a:endParaRPr lang="en-US" altLang="zh-CN" sz="1400" dirty="0">
-              <a:latin typeface="Courier" pitchFamily="2" charset="0"/>
-            </a:endParaRPr>
+              <a:t>;</a:t>
+            </a:r>
           </a:p>
           <a:p>
             <a:r>
@@ -12184,118 +8655,6 @@
               </a:rPr>
               <a:t>    </a:t>
             </a:r>
-            <a:r>
-              <a:rPr lang="en-US" altLang="zh-CN" sz="1400" dirty="0" err="1">
-                <a:latin typeface="Courier" pitchFamily="2" charset="0"/>
-              </a:rPr>
-              <a:t>cout</a:t>
-            </a:r>
-            <a:r>
-              <a:rPr lang="en-US" altLang="zh-CN" sz="1400" dirty="0">
-                <a:latin typeface="Courier" pitchFamily="2" charset="0"/>
-              </a:rPr>
-              <a:t>&lt;&lt;"f1 = "&lt;&lt;f1&lt;&lt;</a:t>
-            </a:r>
-            <a:r>
-              <a:rPr lang="en-US" altLang="zh-CN" sz="1400" dirty="0" err="1">
-                <a:latin typeface="Courier" pitchFamily="2" charset="0"/>
-              </a:rPr>
-              <a:t>endl</a:t>
-            </a:r>
-            <a:r>
-              <a:rPr lang="en-US" altLang="zh-CN" sz="1400" dirty="0">
-                <a:latin typeface="Courier" pitchFamily="2" charset="0"/>
-              </a:rPr>
-              <a:t>;</a:t>
-            </a:r>
-            <a:endParaRPr lang="en-US" altLang="zh-CN" sz="1400" dirty="0">
-              <a:latin typeface="Courier" pitchFamily="2" charset="0"/>
-            </a:endParaRPr>
-          </a:p>
-          <a:p>
-            <a:endParaRPr lang="en-US" altLang="zh-CN" sz="1400" dirty="0">
-              <a:latin typeface="Courier" pitchFamily="2" charset="0"/>
-            </a:endParaRPr>
-          </a:p>
-          <a:p>
-            <a:r>
-              <a:rPr lang="en-US" altLang="zh-CN" sz="1400" dirty="0">
-                <a:latin typeface="Courier" pitchFamily="2" charset="0"/>
-              </a:rPr>
-              <a:t>    float a = 0.1f;</a:t>
-            </a:r>
-            <a:endParaRPr lang="en-US" altLang="zh-CN" sz="1400" dirty="0">
-              <a:latin typeface="Courier" pitchFamily="2" charset="0"/>
-            </a:endParaRPr>
-          </a:p>
-          <a:p>
-            <a:r>
-              <a:rPr lang="en-US" altLang="zh-CN" sz="1400" dirty="0">
-                <a:latin typeface="Courier" pitchFamily="2" charset="0"/>
-              </a:rPr>
-              <a:t>    float f2 = </a:t>
-            </a:r>
-            <a:r>
-              <a:rPr lang="en-US" altLang="zh-CN" sz="1400" dirty="0" err="1">
-                <a:latin typeface="Courier" pitchFamily="2" charset="0"/>
-              </a:rPr>
-              <a:t>a+a+a+a+a+a+a+a+a+a</a:t>
-            </a:r>
-            <a:r>
-              <a:rPr lang="en-US" altLang="zh-CN" sz="1400" dirty="0">
-                <a:latin typeface="Courier" pitchFamily="2" charset="0"/>
-              </a:rPr>
-              <a:t>;</a:t>
-            </a:r>
-            <a:endParaRPr lang="en-US" altLang="zh-CN" sz="1400" dirty="0">
-              <a:latin typeface="Courier" pitchFamily="2" charset="0"/>
-            </a:endParaRPr>
-          </a:p>
-          <a:p>
-            <a:r>
-              <a:rPr lang="en-US" altLang="zh-CN" sz="1400" dirty="0">
-                <a:latin typeface="Courier" pitchFamily="2" charset="0"/>
-              </a:rPr>
-              <a:t>    </a:t>
-            </a:r>
-            <a:r>
-              <a:rPr lang="en-US" altLang="zh-CN" sz="1400" dirty="0" err="1">
-                <a:latin typeface="Courier" pitchFamily="2" charset="0"/>
-              </a:rPr>
-              <a:t>cout</a:t>
-            </a:r>
-            <a:r>
-              <a:rPr lang="en-US" altLang="zh-CN" sz="1400" dirty="0">
-                <a:latin typeface="Courier" pitchFamily="2" charset="0"/>
-              </a:rPr>
-              <a:t>&lt;&lt;"f2 = "&lt;&lt;f2&lt;&lt;</a:t>
-            </a:r>
-            <a:r>
-              <a:rPr lang="en-US" altLang="zh-CN" sz="1400" dirty="0" err="1">
-                <a:latin typeface="Courier" pitchFamily="2" charset="0"/>
-              </a:rPr>
-              <a:t>endl</a:t>
-            </a:r>
-            <a:r>
-              <a:rPr lang="en-US" altLang="zh-CN" sz="1400" dirty="0">
-                <a:latin typeface="Courier" pitchFamily="2" charset="0"/>
-              </a:rPr>
-              <a:t>;</a:t>
-            </a:r>
-            <a:endParaRPr lang="en-US" altLang="zh-CN" sz="1400" dirty="0">
-              <a:latin typeface="Courier" pitchFamily="2" charset="0"/>
-            </a:endParaRPr>
-          </a:p>
-          <a:p>
-            <a:r>
-              <a:rPr lang="en-US" altLang="zh-CN" sz="1400" dirty="0">
-                <a:latin typeface="Courier" pitchFamily="2" charset="0"/>
-              </a:rPr>
-              <a:t>    </a:t>
-            </a:r>
-            <a:endParaRPr lang="en-US" altLang="zh-CN" sz="1400" dirty="0">
-              <a:latin typeface="Courier" pitchFamily="2" charset="0"/>
-            </a:endParaRPr>
           </a:p>
           <a:p>
             <a:r>
@@ -12313,12 +8672,6 @@
               </a:rPr>
               <a:t>if(f1 == f2)  //TIPS: Modify the code here</a:t>
             </a:r>
-            <a:endParaRPr lang="en-US" altLang="zh-CN" sz="1400" dirty="0">
-              <a:highlight>
-                <a:srgbClr val="FFFF00"/>
-              </a:highlight>
-              <a:latin typeface="Courier" pitchFamily="2" charset="0"/>
-            </a:endParaRPr>
           </a:p>
           <a:p>
             <a:r>
@@ -12351,6 +8704,48 @@
               </a:rPr>
               <a:t>;</a:t>
             </a:r>
+          </a:p>
+          <a:p>
+            <a:r>
+              <a:rPr lang="en-US" altLang="zh-CN" sz="1400" dirty="0">
+                <a:latin typeface="Courier" pitchFamily="2" charset="0"/>
+              </a:rPr>
+              <a:t>    else</a:t>
+            </a:r>
+          </a:p>
+          <a:p>
+            <a:r>
+              <a:rPr lang="en-US" altLang="zh-CN" sz="1400" dirty="0">
+                <a:latin typeface="Courier" pitchFamily="2" charset="0"/>
+              </a:rPr>
+              <a:t>        </a:t>
+            </a:r>
+            <a:r>
+              <a:rPr lang="en-US" altLang="zh-CN" sz="1400" dirty="0" err="1">
+                <a:latin typeface="Courier" pitchFamily="2" charset="0"/>
+              </a:rPr>
+              <a:t>cout</a:t>
+            </a:r>
+            <a:r>
+              <a:rPr lang="en-US" altLang="zh-CN" sz="1400" dirty="0">
+                <a:latin typeface="Courier" pitchFamily="2" charset="0"/>
+              </a:rPr>
+              <a:t> &lt;&lt; "f1 != f2" &lt;&lt; </a:t>
+            </a:r>
+            <a:r>
+              <a:rPr lang="en-US" altLang="zh-CN" sz="1400" dirty="0" err="1">
+                <a:latin typeface="Courier" pitchFamily="2" charset="0"/>
+              </a:rPr>
+              <a:t>endl</a:t>
+            </a:r>
+            <a:r>
+              <a:rPr lang="en-US" altLang="zh-CN" sz="1400" dirty="0">
+                <a:latin typeface="Courier" pitchFamily="2" charset="0"/>
+              </a:rPr>
+              <a:t>;</a:t>
+            </a:r>
+          </a:p>
+          <a:p>
             <a:endParaRPr lang="en-US" altLang="zh-CN" sz="1400" dirty="0">
               <a:latin typeface="Courier" pitchFamily="2" charset="0"/>
             </a:endParaRPr>
@@ -12360,62 +8755,8 @@
               <a:rPr lang="en-US" altLang="zh-CN" sz="1400" dirty="0">
                 <a:latin typeface="Courier" pitchFamily="2" charset="0"/>
               </a:rPr>
-              <a:t>    else</a:t>
-            </a:r>
-            <a:endParaRPr lang="en-US" altLang="zh-CN" sz="1400" dirty="0">
-              <a:latin typeface="Courier" pitchFamily="2" charset="0"/>
-            </a:endParaRPr>
-          </a:p>
-          <a:p>
-            <a:r>
-              <a:rPr lang="en-US" altLang="zh-CN" sz="1400" dirty="0">
-                <a:latin typeface="Courier" pitchFamily="2" charset="0"/>
-              </a:rPr>
-              <a:t>        </a:t>
-            </a:r>
-            <a:r>
-              <a:rPr lang="en-US" altLang="zh-CN" sz="1400" dirty="0" err="1">
-                <a:latin typeface="Courier" pitchFamily="2" charset="0"/>
-              </a:rPr>
-              <a:t>cout</a:t>
-            </a:r>
-            <a:r>
-              <a:rPr lang="en-US" altLang="zh-CN" sz="1400" dirty="0">
-                <a:latin typeface="Courier" pitchFamily="2" charset="0"/>
-              </a:rPr>
-              <a:t> &lt;&lt; "f1 != f2" &lt;&lt; </a:t>
-            </a:r>
-            <a:r>
-              <a:rPr lang="en-US" altLang="zh-CN" sz="1400" dirty="0" err="1">
-                <a:latin typeface="Courier" pitchFamily="2" charset="0"/>
-              </a:rPr>
-              <a:t>endl</a:t>
-            </a:r>
-            <a:r>
-              <a:rPr lang="en-US" altLang="zh-CN" sz="1400" dirty="0">
-                <a:latin typeface="Courier" pitchFamily="2" charset="0"/>
-              </a:rPr>
-              <a:t>;</a:t>
-            </a:r>
-            <a:endParaRPr lang="en-US" altLang="zh-CN" sz="1400" dirty="0">
-              <a:latin typeface="Courier" pitchFamily="2" charset="0"/>
-            </a:endParaRPr>
-          </a:p>
-          <a:p>
-            <a:endParaRPr lang="en-US" altLang="zh-CN" sz="1400" dirty="0">
-              <a:latin typeface="Courier" pitchFamily="2" charset="0"/>
-            </a:endParaRPr>
-          </a:p>
-          <a:p>
-            <a:r>
-              <a:rPr lang="en-US" altLang="zh-CN" sz="1400" dirty="0">
-                <a:latin typeface="Courier" pitchFamily="2" charset="0"/>
-              </a:rPr>
               <a:t>    return 0;</a:t>
             </a:r>
-            <a:endParaRPr lang="en-US" altLang="zh-CN" sz="1400" dirty="0">
-              <a:latin typeface="Courier" pitchFamily="2" charset="0"/>
-            </a:endParaRPr>
           </a:p>
           <a:p>
             <a:r>
@@ -12450,6 +8791,7 @@
           <a:bodyPr wrap="square" rtlCol="0">
             <a:noAutofit/>
           </a:bodyPr>
+          <a:lstStyle/>
           <a:p>
             <a:r>
               <a:rPr lang="en-US" altLang="zh-CN" sz="2800" dirty="0"/>
@@ -12461,16 +8803,13 @@
               </a:rPr>
               <a:t>en using the method learnt in lecture2 to make the output of the code same as following picture .</a:t>
             </a:r>
+          </a:p>
+          <a:p>
             <a:endParaRPr lang="en-US" altLang="zh-CN" sz="2800" dirty="0">
               <a:sym typeface="+mn-ea"/>
             </a:endParaRPr>
           </a:p>
           <a:p>
-            <a:endParaRPr lang="en-US" altLang="zh-CN" sz="2800" dirty="0">
-              <a:sym typeface="+mn-ea"/>
-            </a:endParaRPr>
-          </a:p>
-          <a:p>
             <a:endParaRPr lang="en-US" altLang="zh-CN" sz="2800" dirty="0"/>
           </a:p>
           <a:p>
@@ -12481,7 +8820,6 @@
               <a:rPr lang="en-US" altLang="zh-CN" sz="2800" dirty="0"/>
               <a:t>NOTE: DO NOT use if (f1=f2) instead of if(f1==f2).</a:t>
             </a:r>
-            <a:endParaRPr lang="en-US" altLang="zh-CN" sz="2800" dirty="0"/>
           </a:p>
         </p:txBody>
       </p:sp>
@@ -12494,7 +8832,7 @@
           <p:nvPr/>
         </p:nvPicPr>
         <p:blipFill>
-          <a:blip r:embed="rId1"/>
+          <a:blip r:embed="rId3"/>
           <a:stretch>
             <a:fillRect/>
           </a:stretch>
@@ -12518,7 +8856,7 @@
           <p:nvPr/>
         </p:nvPicPr>
         <p:blipFill>
-          <a:blip r:embed="rId2"/>
+          <a:blip r:embed="rId4"/>
           <a:stretch>
             <a:fillRect/>
           </a:stretch>
@@ -12541,7 +8879,7 @@
 </p:sld>
 </file>
 
-<file path=ppt/slides/slide25.xml><?xml version="1.0" encoding="utf-8"?>
+<file path=ppt/slides/slide15.xml><?xml version="1.0" encoding="utf-8"?>
 <p:sld xmlns:a="http://schemas.openxmlformats.org/drawingml/2006/main" xmlns:r="http://schemas.openxmlformats.org/officeDocument/2006/relationships" xmlns:p="http://schemas.openxmlformats.org/presentationml/2006/main">
   <p:cSld>
     <p:spTree>
@@ -12585,9 +8923,8 @@
             </a:pPr>
             <a:r>
               <a:rPr lang="en-US" altLang="zh-CN" dirty="0"/>
-              <a:t>4.4. Complete the following source code to print the variables as the following picture and explain the result. </a:t>
-            </a:r>
-            <a:endParaRPr lang="en-US" altLang="zh-CN" dirty="0"/>
+              <a:t>4. Complete the following source code to print the variables as the following picture and explain the result. </a:t>
+            </a:r>
           </a:p>
           <a:p>
             <a:pPr marL="0" indent="0">
@@ -12597,17 +8934,6 @@
               <a:rPr lang="en-US" altLang="zh-CN" dirty="0"/>
               <a:t>Why the value of a and b are not equal? Explain the division operation with different types.</a:t>
             </a:r>
-            <a:endParaRPr lang="en-US" altLang="zh-CN" dirty="0"/>
-          </a:p>
-          <a:p>
-            <a:pPr marL="0" indent="0">
-              <a:buNone/>
-            </a:pPr>
-            <a:r>
-              <a:rPr lang="en-US" altLang="zh-CN" dirty="0"/>
-              <a:t>You need to explain the reason to a SA to pass the test.</a:t>
-            </a:r>
-            <a:endParaRPr lang="en-US" altLang="zh-CN" dirty="0"/>
           </a:p>
           <a:p>
             <a:pPr marL="0" indent="0">
@@ -12687,22 +9013,8 @@
                 <a:ea typeface="宋体" panose="02010600030101010101" pitchFamily="2" charset="-122"/>
                 <a:cs typeface="+mj-cs"/>
               </a:rPr>
-              <a:t> 4.Exercises</a:t>
-            </a:r>
-            <a:endParaRPr kumimoji="0" lang="en-US" altLang="zh-CN" sz="3600" b="1" i="0" u="none" strike="noStrike" kern="1200" cap="none" spc="0" normalizeH="0" baseline="0" noProof="0" dirty="0">
-              <a:ln>
-                <a:noFill/>
-              </a:ln>
-              <a:solidFill>
-                <a:prstClr val="black"/>
-              </a:solidFill>
-              <a:effectLst/>
-              <a:uLnTx/>
-              <a:uFillTx/>
-              <a:latin typeface="Calibri" panose="020F0502020204030204"/>
-              <a:ea typeface="宋体" panose="02010600030101010101" pitchFamily="2" charset="-122"/>
-              <a:cs typeface="+mj-cs"/>
-            </a:endParaRPr>
+              <a:t> 2.Exercises</a:t>
+            </a:r>
           </a:p>
         </p:txBody>
       </p:sp>
@@ -12744,6 +9056,16 @@
               </a:rPr>
               <a:t>#include &lt;iostream&gt;</a:t>
             </a:r>
+          </a:p>
+          <a:p>
+            <a:r>
+              <a:rPr lang="en-US" altLang="zh-CN" sz="1400" dirty="0">
+                <a:latin typeface="Courier" pitchFamily="2" charset="0"/>
+              </a:rPr>
+              <a:t>using namespace std;</a:t>
+            </a:r>
+          </a:p>
+          <a:p>
             <a:endParaRPr lang="en-US" altLang="zh-CN" sz="1400" dirty="0">
               <a:latin typeface="Courier" pitchFamily="2" charset="0"/>
             </a:endParaRPr>
@@ -12753,153 +9075,101 @@
               <a:rPr lang="en-US" altLang="zh-CN" sz="1400" dirty="0">
                 <a:latin typeface="Courier" pitchFamily="2" charset="0"/>
               </a:rPr>
-              <a:t>using namespace std;</a:t>
-            </a:r>
+              <a:t>int main()</a:t>
+            </a:r>
+          </a:p>
+          <a:p>
+            <a:r>
+              <a:rPr lang="en-US" altLang="zh-CN" sz="1400" dirty="0">
+                <a:latin typeface="Courier" pitchFamily="2" charset="0"/>
+              </a:rPr>
+              <a:t>{</a:t>
+            </a:r>
+          </a:p>
+          <a:p>
+            <a:r>
+              <a:rPr lang="en-US" altLang="zh-CN" sz="1400" dirty="0">
+                <a:latin typeface="Courier" pitchFamily="2" charset="0"/>
+              </a:rPr>
+              <a:t>    int a, b;</a:t>
+            </a:r>
+          </a:p>
+          <a:p>
+            <a:r>
+              <a:rPr lang="en-US" altLang="zh-CN" sz="1400" dirty="0">
+                <a:latin typeface="Courier" pitchFamily="2" charset="0"/>
+              </a:rPr>
+              <a:t>    double c, d,f,g;</a:t>
+            </a:r>
+          </a:p>
+          <a:p>
+            <a:r>
+              <a:rPr lang="en-US" altLang="zh-CN" sz="1400" dirty="0">
+                <a:latin typeface="Courier" pitchFamily="2" charset="0"/>
+              </a:rPr>
+              <a:t>    char h;</a:t>
+            </a:r>
+          </a:p>
+          <a:p>
             <a:endParaRPr lang="en-US" altLang="zh-CN" sz="1400" dirty="0">
               <a:latin typeface="Courier" pitchFamily="2" charset="0"/>
             </a:endParaRPr>
           </a:p>
           <a:p>
-            <a:endParaRPr lang="en-US" altLang="zh-CN" sz="1400" dirty="0">
-              <a:latin typeface="Courier" pitchFamily="2" charset="0"/>
-            </a:endParaRPr>
-          </a:p>
-          <a:p>
             <a:r>
               <a:rPr lang="en-US" altLang="zh-CN" sz="1400" dirty="0">
                 <a:latin typeface="Courier" pitchFamily="2" charset="0"/>
               </a:rPr>
-              <a:t>int main()</a:t>
-            </a:r>
-            <a:endParaRPr lang="en-US" altLang="zh-CN" sz="1400" dirty="0">
-              <a:latin typeface="Courier" pitchFamily="2" charset="0"/>
-            </a:endParaRPr>
+              <a:t>    a = 19.99 + 21.99;</a:t>
+            </a:r>
           </a:p>
           <a:p>
             <a:r>
               <a:rPr lang="en-US" altLang="zh-CN" sz="1400" dirty="0">
                 <a:latin typeface="Courier" pitchFamily="2" charset="0"/>
               </a:rPr>
-              <a:t>{</a:t>
-            </a:r>
-            <a:endParaRPr lang="en-US" altLang="zh-CN" sz="1400" dirty="0">
-              <a:latin typeface="Courier" pitchFamily="2" charset="0"/>
-            </a:endParaRPr>
+              <a:t>    b = (int)19.99 + 21.99;</a:t>
+            </a:r>
           </a:p>
           <a:p>
             <a:r>
               <a:rPr lang="en-US" altLang="zh-CN" sz="1400" dirty="0">
                 <a:latin typeface="Courier" pitchFamily="2" charset="0"/>
               </a:rPr>
-              <a:t>    int a, b;</a:t>
-            </a:r>
-            <a:endParaRPr lang="en-US" altLang="zh-CN" sz="1400" dirty="0">
-              <a:latin typeface="Courier" pitchFamily="2" charset="0"/>
-            </a:endParaRPr>
+              <a:t>    c = 23 / 3;</a:t>
+            </a:r>
           </a:p>
           <a:p>
             <a:r>
               <a:rPr lang="en-US" altLang="zh-CN" sz="1400" dirty="0">
                 <a:latin typeface="Courier" pitchFamily="2" charset="0"/>
               </a:rPr>
-              <a:t>    double c, d,f,g;</a:t>
-            </a:r>
-            <a:endParaRPr lang="en-US" altLang="zh-CN" sz="1400" dirty="0">
-              <a:latin typeface="Courier" pitchFamily="2" charset="0"/>
-            </a:endParaRPr>
+              <a:t>    d = 23 / 3.0;</a:t>
+            </a:r>
           </a:p>
           <a:p>
             <a:r>
               <a:rPr lang="en-US" altLang="zh-CN" sz="1400" dirty="0">
                 <a:latin typeface="Courier" pitchFamily="2" charset="0"/>
               </a:rPr>
-              <a:t>    char h;</a:t>
-            </a:r>
-            <a:endParaRPr lang="en-US" altLang="zh-CN" sz="1400" dirty="0">
-              <a:latin typeface="Courier" pitchFamily="2" charset="0"/>
-            </a:endParaRPr>
-          </a:p>
-          <a:p>
-            <a:endParaRPr lang="en-US" altLang="zh-CN" sz="1400" dirty="0">
-              <a:latin typeface="Courier" pitchFamily="2" charset="0"/>
-            </a:endParaRPr>
+              <a:t>    f = 23 / 3.0e4;</a:t>
+            </a:r>
           </a:p>
           <a:p>
             <a:r>
               <a:rPr lang="en-US" altLang="zh-CN" sz="1400" dirty="0">
                 <a:latin typeface="Courier" pitchFamily="2" charset="0"/>
               </a:rPr>
-              <a:t>    a = 19.99 + 21.99;</a:t>
-            </a:r>
-            <a:endParaRPr lang="en-US" altLang="zh-CN" sz="1400" dirty="0">
-              <a:latin typeface="Courier" pitchFamily="2" charset="0"/>
-            </a:endParaRPr>
+              <a:t>    g = 23 / 3.0e5;</a:t>
+            </a:r>
           </a:p>
           <a:p>
             <a:r>
               <a:rPr lang="en-US" altLang="zh-CN" sz="1400" dirty="0">
                 <a:latin typeface="Courier" pitchFamily="2" charset="0"/>
               </a:rPr>
-              <a:t>    b = (int)19.99 + 21.99;</a:t>
-            </a:r>
-            <a:endParaRPr lang="en-US" altLang="zh-CN" sz="1400" dirty="0">
-              <a:latin typeface="Courier" pitchFamily="2" charset="0"/>
-            </a:endParaRPr>
-          </a:p>
-          <a:p>
-            <a:r>
-              <a:rPr lang="en-US" altLang="zh-CN" sz="1400" dirty="0">
-                <a:latin typeface="Courier" pitchFamily="2" charset="0"/>
-              </a:rPr>
-              <a:t>    c = 23 / 3;</a:t>
-            </a:r>
-            <a:endParaRPr lang="en-US" altLang="zh-CN" sz="1400" dirty="0">
-              <a:latin typeface="Courier" pitchFamily="2" charset="0"/>
-            </a:endParaRPr>
-          </a:p>
-          <a:p>
-            <a:r>
-              <a:rPr lang="en-US" altLang="zh-CN" sz="1400" dirty="0">
-                <a:latin typeface="Courier" pitchFamily="2" charset="0"/>
-              </a:rPr>
-              <a:t>    d = 23 / 3.0;</a:t>
-            </a:r>
-            <a:endParaRPr lang="en-US" altLang="zh-CN" sz="1400" dirty="0">
-              <a:latin typeface="Courier" pitchFamily="2" charset="0"/>
-            </a:endParaRPr>
-          </a:p>
-          <a:p>
-            <a:r>
-              <a:rPr lang="en-US" altLang="zh-CN" sz="1400" dirty="0">
-                <a:latin typeface="Courier" pitchFamily="2" charset="0"/>
-              </a:rPr>
-              <a:t>    f = 23 / 3.0e4;</a:t>
-            </a:r>
-            <a:endParaRPr lang="en-US" altLang="zh-CN" sz="1400" dirty="0">
-              <a:latin typeface="Courier" pitchFamily="2" charset="0"/>
-            </a:endParaRPr>
-          </a:p>
-          <a:p>
-            <a:r>
-              <a:rPr lang="en-US" altLang="zh-CN" sz="1400" dirty="0">
-                <a:latin typeface="Courier" pitchFamily="2" charset="0"/>
-              </a:rPr>
-              <a:t>    g = 23 / 3.0e5;</a:t>
-            </a:r>
-            <a:endParaRPr lang="en-US" altLang="zh-CN" sz="1400" dirty="0">
-              <a:latin typeface="Courier" pitchFamily="2" charset="0"/>
-            </a:endParaRPr>
-          </a:p>
-          <a:p>
-            <a:r>
-              <a:rPr lang="en-US" altLang="zh-CN" sz="1400" dirty="0">
-                <a:latin typeface="Courier" pitchFamily="2" charset="0"/>
-              </a:rPr>
               <a:t>    h = 'b' - 32;</a:t>
             </a:r>
-            <a:endParaRPr lang="en-US" altLang="zh-CN" sz="1400" dirty="0">
-              <a:latin typeface="Courier" pitchFamily="2" charset="0"/>
-            </a:endParaRPr>
           </a:p>
           <a:p>
             <a:endParaRPr lang="en-US" altLang="zh-CN" sz="1400" dirty="0">
@@ -12922,12 +9192,6 @@
               </a:rPr>
               <a:t> //complete code here</a:t>
             </a:r>
-            <a:endParaRPr lang="en-US" altLang="zh-CN" sz="1400" dirty="0">
-              <a:highlight>
-                <a:srgbClr val="FFFF00"/>
-              </a:highlight>
-              <a:latin typeface="Courier" pitchFamily="2" charset="0"/>
-            </a:endParaRPr>
           </a:p>
           <a:p>
             <a:r>
@@ -12936,9 +9200,6 @@
               </a:rPr>
               <a:t>    return 0;   </a:t>
             </a:r>
-            <a:endParaRPr lang="en-US" altLang="zh-CN" sz="1400" dirty="0">
-              <a:latin typeface="Courier" pitchFamily="2" charset="0"/>
-            </a:endParaRPr>
           </a:p>
           <a:p>
             <a:r>
@@ -12947,9 +9208,6 @@
               </a:rPr>
               <a:t>}</a:t>
             </a:r>
-            <a:endParaRPr lang="en-US" altLang="zh-CN" sz="1400" dirty="0">
-              <a:latin typeface="Courier" pitchFamily="2" charset="0"/>
-            </a:endParaRPr>
           </a:p>
         </p:txBody>
       </p:sp>
@@ -12962,7 +9220,7 @@
           <p:nvPr/>
         </p:nvPicPr>
         <p:blipFill>
-          <a:blip r:embed="rId1"/>
+          <a:blip r:embed="rId3"/>
           <a:stretch>
             <a:fillRect/>
           </a:stretch>
@@ -12985,7 +9243,7 @@
 </p:sld>
 </file>
 
-<file path=ppt/slides/slide26.xml><?xml version="1.0" encoding="utf-8"?>
+<file path=ppt/slides/slide16.xml><?xml version="1.0" encoding="utf-8"?>
 <p:sld xmlns:a="http://schemas.openxmlformats.org/drawingml/2006/main" xmlns:r="http://schemas.openxmlformats.org/officeDocument/2006/relationships" xmlns:p="http://schemas.openxmlformats.org/presentationml/2006/main">
   <p:cSld>
     <p:spTree>
@@ -13039,7 +9297,6 @@
               <a:rPr lang="en-US" altLang="zh-CN" dirty="0"/>
               <a:t>when defines a variable in C++?</a:t>
             </a:r>
-            <a:endParaRPr lang="en-US" altLang="zh-CN" dirty="0"/>
           </a:p>
           <a:p>
             <a:pPr marL="0" indent="0">
@@ -13049,7 +9306,6 @@
               <a:rPr lang="en-US" altLang="zh-CN" dirty="0"/>
               <a:t>You need to explain the reason to a SA to pass the test.</a:t>
             </a:r>
-            <a:endParaRPr lang="en-US" altLang="zh-CN" dirty="0"/>
           </a:p>
           <a:p>
             <a:pPr marL="0" indent="0">
@@ -13131,20 +9387,6 @@
               </a:rPr>
               <a:t> 4.Exercises</a:t>
             </a:r>
-            <a:endParaRPr kumimoji="0" lang="en-US" altLang="zh-CN" sz="3600" b="1" i="0" u="none" strike="noStrike" kern="1200" cap="none" spc="0" normalizeH="0" baseline="0" noProof="0" dirty="0">
-              <a:ln>
-                <a:noFill/>
-              </a:ln>
-              <a:solidFill>
-                <a:prstClr val="black"/>
-              </a:solidFill>
-              <a:effectLst/>
-              <a:uLnTx/>
-              <a:uFillTx/>
-              <a:latin typeface="Calibri" panose="020F0502020204030204"/>
-              <a:ea typeface="宋体" panose="02010600030101010101" pitchFamily="2" charset="-122"/>
-              <a:cs typeface="+mj-cs"/>
-            </a:endParaRPr>
           </a:p>
         </p:txBody>
       </p:sp>
@@ -13178,6 +9420,7 @@
           <a:bodyPr wrap="square" rtlCol="0">
             <a:spAutoFit/>
           </a:bodyPr>
+          <a:lstStyle/>
           <a:p>
             <a:r>
               <a:rPr lang="en-US" altLang="zh-CN" sz="1400" dirty="0">
@@ -13185,33 +9428,158 @@
               </a:rPr>
               <a:t>#include &lt;iostream&gt; </a:t>
             </a:r>
+          </a:p>
+          <a:p>
             <a:endParaRPr lang="en-US" altLang="zh-CN" sz="1400" dirty="0">
               <a:latin typeface="Courier" pitchFamily="2" charset="0"/>
             </a:endParaRPr>
           </a:p>
           <a:p>
+            <a:r>
+              <a:rPr lang="en-US" altLang="zh-CN" sz="1400" dirty="0">
+                <a:latin typeface="Courier" pitchFamily="2" charset="0"/>
+              </a:rPr>
+              <a:t>int main()</a:t>
+            </a:r>
+          </a:p>
+          <a:p>
+            <a:r>
+              <a:rPr lang="en-US" altLang="zh-CN" sz="1400" dirty="0">
+                <a:latin typeface="Courier" pitchFamily="2" charset="0"/>
+              </a:rPr>
+              <a:t>{</a:t>
+            </a:r>
+          </a:p>
+          <a:p>
+            <a:r>
+              <a:rPr lang="en-US" altLang="zh-CN" sz="1400" dirty="0">
+                <a:latin typeface="Courier" pitchFamily="2" charset="0"/>
+              </a:rPr>
+              <a:t>    auto a = 10;</a:t>
+            </a:r>
+          </a:p>
+          <a:p>
+            <a:r>
+              <a:rPr lang="en-US" altLang="zh-CN" sz="1400" dirty="0">
+                <a:latin typeface="Courier" pitchFamily="2" charset="0"/>
+              </a:rPr>
+              <a:t>    a = 20.5;</a:t>
+            </a:r>
+          </a:p>
+          <a:p>
+            <a:r>
+              <a:rPr lang="en-US" altLang="zh-CN" sz="1400" dirty="0">
+                <a:latin typeface="Courier" pitchFamily="2" charset="0"/>
+              </a:rPr>
+              <a:t>    a += 10.5;</a:t>
+            </a:r>
+          </a:p>
+          <a:p>
+            <a:r>
+              <a:rPr lang="en-US" altLang="zh-CN" sz="1400" dirty="0">
+                <a:latin typeface="Courier" pitchFamily="2" charset="0"/>
+              </a:rPr>
+              <a:t>    std::</a:t>
+            </a:r>
+            <a:r>
+              <a:rPr lang="en-US" altLang="zh-CN" sz="1400" dirty="0" err="1">
+                <a:latin typeface="Courier" pitchFamily="2" charset="0"/>
+              </a:rPr>
+              <a:t>cout</a:t>
+            </a:r>
+            <a:r>
+              <a:rPr lang="en-US" altLang="zh-CN" sz="1400" dirty="0">
+                <a:latin typeface="Courier" pitchFamily="2" charset="0"/>
+              </a:rPr>
+              <a:t> &lt;&lt; a &lt;&lt; std::</a:t>
+            </a:r>
+            <a:r>
+              <a:rPr lang="en-US" altLang="zh-CN" sz="1400" dirty="0" err="1">
+                <a:latin typeface="Courier" pitchFamily="2" charset="0"/>
+              </a:rPr>
+              <a:t>endl</a:t>
+            </a:r>
+            <a:r>
+              <a:rPr lang="en-US" altLang="zh-CN" sz="1400" dirty="0">
+                <a:latin typeface="Courier" pitchFamily="2" charset="0"/>
+              </a:rPr>
+              <a:t>;</a:t>
+            </a:r>
+          </a:p>
+          <a:p>
             <a:endParaRPr lang="en-US" altLang="zh-CN" sz="1400" dirty="0">
               <a:latin typeface="Courier" pitchFamily="2" charset="0"/>
             </a:endParaRPr>
           </a:p>
           <a:p>
+            <a:pPr indent="457200"/>
             <a:r>
               <a:rPr lang="en-US" altLang="zh-CN" sz="1400" dirty="0">
                 <a:latin typeface="Courier" pitchFamily="2" charset="0"/>
               </a:rPr>
-              <a:t>int main()</a:t>
+              <a:t>auto b=10.0;</a:t>
+            </a:r>
+          </a:p>
+          <a:p>
+            <a:pPr indent="457200"/>
+            <a:r>
+              <a:rPr lang="en-US" altLang="zh-CN" sz="1400" dirty="0">
+                <a:latin typeface="Courier" pitchFamily="2" charset="0"/>
+              </a:rPr>
+              <a:t>b = 20.5;</a:t>
+            </a:r>
+          </a:p>
+          <a:p>
+            <a:pPr indent="457200"/>
+            <a:r>
+              <a:rPr lang="en-US" altLang="zh-CN" sz="1400" dirty="0">
+                <a:latin typeface="Courier" pitchFamily="2" charset="0"/>
+              </a:rPr>
+              <a:t>b +=a;</a:t>
+            </a:r>
+          </a:p>
+          <a:p>
+            <a:pPr indent="457200"/>
+            <a:r>
+              <a:rPr lang="en-US" altLang="zh-CN" sz="1400" dirty="0">
+                <a:latin typeface="Courier" pitchFamily="2" charset="0"/>
+                <a:sym typeface="+mn-ea"/>
+              </a:rPr>
+              <a:t>std::</a:t>
+            </a:r>
+            <a:r>
+              <a:rPr lang="en-US" altLang="zh-CN" sz="1400" dirty="0" err="1">
+                <a:latin typeface="Courier" pitchFamily="2" charset="0"/>
+                <a:sym typeface="+mn-ea"/>
+              </a:rPr>
+              <a:t>cout</a:t>
+            </a:r>
+            <a:r>
+              <a:rPr lang="en-US" altLang="zh-CN" sz="1400" dirty="0">
+                <a:latin typeface="Courier" pitchFamily="2" charset="0"/>
+                <a:sym typeface="+mn-ea"/>
+              </a:rPr>
+              <a:t> &lt;&lt; b &lt;&lt; std::</a:t>
+            </a:r>
+            <a:r>
+              <a:rPr lang="en-US" altLang="zh-CN" sz="1400" dirty="0" err="1">
+                <a:latin typeface="Courier" pitchFamily="2" charset="0"/>
+                <a:sym typeface="+mn-ea"/>
+              </a:rPr>
+              <a:t>endl</a:t>
+            </a:r>
+            <a:r>
+              <a:rPr lang="en-US" altLang="zh-CN" sz="1400" dirty="0">
+                <a:latin typeface="Courier" pitchFamily="2" charset="0"/>
+                <a:sym typeface="+mn-ea"/>
+              </a:rPr>
+              <a:t>;</a:t>
             </a:r>
             <a:endParaRPr lang="en-US" altLang="zh-CN" sz="1400" dirty="0">
               <a:latin typeface="Courier" pitchFamily="2" charset="0"/>
             </a:endParaRPr>
           </a:p>
           <a:p>
-            <a:r>
-              <a:rPr lang="en-US" altLang="zh-CN" sz="1400" dirty="0">
-                <a:latin typeface="Courier" pitchFamily="2" charset="0"/>
-              </a:rPr>
-              <a:t>{</a:t>
-            </a:r>
             <a:endParaRPr lang="en-US" altLang="zh-CN" sz="1400" dirty="0">
               <a:latin typeface="Courier" pitchFamily="2" charset="0"/>
             </a:endParaRPr>
@@ -13221,177 +9589,16 @@
               <a:rPr lang="en-US" altLang="zh-CN" sz="1400" dirty="0">
                 <a:latin typeface="Courier" pitchFamily="2" charset="0"/>
               </a:rPr>
-              <a:t>    auto a = 10;</a:t>
-            </a:r>
-            <a:endParaRPr lang="en-US" altLang="zh-CN" sz="1400" dirty="0">
-              <a:latin typeface="Courier" pitchFamily="2" charset="0"/>
-            </a:endParaRPr>
+              <a:t>    return 0;</a:t>
+            </a:r>
           </a:p>
           <a:p>
             <a:r>
               <a:rPr lang="en-US" altLang="zh-CN" sz="1400" dirty="0">
                 <a:latin typeface="Courier" pitchFamily="2" charset="0"/>
               </a:rPr>
-              <a:t>    a = 20.5;</a:t>
-            </a:r>
-            <a:endParaRPr lang="en-US" altLang="zh-CN" sz="1400" dirty="0">
-              <a:latin typeface="Courier" pitchFamily="2" charset="0"/>
-            </a:endParaRPr>
-          </a:p>
-          <a:p>
-            <a:r>
-              <a:rPr lang="en-US" altLang="zh-CN" sz="1400" dirty="0">
-                <a:latin typeface="Courier" pitchFamily="2" charset="0"/>
-              </a:rPr>
-              <a:t>    a += 10.5;</a:t>
-            </a:r>
-            <a:endParaRPr lang="en-US" altLang="zh-CN" sz="1400" dirty="0">
-              <a:latin typeface="Courier" pitchFamily="2" charset="0"/>
-            </a:endParaRPr>
-          </a:p>
-          <a:p>
-            <a:r>
-              <a:rPr lang="en-US" altLang="zh-CN" sz="1400" dirty="0">
-                <a:latin typeface="Courier" pitchFamily="2" charset="0"/>
-              </a:rPr>
-              <a:t>    std::</a:t>
-            </a:r>
-            <a:r>
-              <a:rPr lang="en-US" altLang="zh-CN" sz="1400" dirty="0" err="1">
-                <a:latin typeface="Courier" pitchFamily="2" charset="0"/>
-              </a:rPr>
-              <a:t>cout</a:t>
-            </a:r>
-            <a:r>
-              <a:rPr lang="en-US" altLang="zh-CN" sz="1400" dirty="0">
-                <a:latin typeface="Courier" pitchFamily="2" charset="0"/>
-              </a:rPr>
-              <a:t> &lt;&lt; a &lt;&lt; std::</a:t>
-            </a:r>
-            <a:r>
-              <a:rPr lang="en-US" altLang="zh-CN" sz="1400" dirty="0" err="1">
-                <a:latin typeface="Courier" pitchFamily="2" charset="0"/>
-              </a:rPr>
-              <a:t>endl</a:t>
-            </a:r>
-            <a:r>
-              <a:rPr lang="en-US" altLang="zh-CN" sz="1400" dirty="0">
-                <a:latin typeface="Courier" pitchFamily="2" charset="0"/>
-              </a:rPr>
-              <a:t>;</a:t>
-            </a:r>
-            <a:endParaRPr lang="en-US" altLang="zh-CN" sz="1400" dirty="0">
-              <a:latin typeface="Courier" pitchFamily="2" charset="0"/>
-            </a:endParaRPr>
-          </a:p>
-          <a:p>
-            <a:endParaRPr lang="en-US" altLang="zh-CN" sz="1400" dirty="0">
-              <a:latin typeface="Courier" pitchFamily="2" charset="0"/>
-            </a:endParaRPr>
-          </a:p>
-          <a:p>
-            <a:pPr indent="457200"/>
-            <a:r>
-              <a:rPr lang="en-US" altLang="zh-CN" sz="1400" dirty="0">
-                <a:latin typeface="Courier" pitchFamily="2" charset="0"/>
-              </a:rPr>
-              <a:t>auto b=10.0;</a:t>
-            </a:r>
-            <a:endParaRPr lang="en-US" altLang="zh-CN" sz="1400" dirty="0">
-              <a:latin typeface="Courier" pitchFamily="2" charset="0"/>
-            </a:endParaRPr>
-          </a:p>
-          <a:p>
-            <a:pPr indent="457200"/>
-            <a:r>
-              <a:rPr lang="en-US" altLang="zh-CN" sz="1400" dirty="0">
-                <a:latin typeface="Courier" pitchFamily="2" charset="0"/>
-              </a:rPr>
-              <a:t>b = 20.5;</a:t>
-            </a:r>
-            <a:endParaRPr lang="en-US" altLang="zh-CN" sz="1400" dirty="0">
-              <a:latin typeface="Courier" pitchFamily="2" charset="0"/>
-            </a:endParaRPr>
-          </a:p>
-          <a:p>
-            <a:pPr indent="457200"/>
-            <a:r>
-              <a:rPr lang="en-US" altLang="zh-CN" sz="1400" dirty="0">
-                <a:latin typeface="Courier" pitchFamily="2" charset="0"/>
-              </a:rPr>
-              <a:t>b +=a;</a:t>
-            </a:r>
-            <a:endParaRPr lang="en-US" altLang="zh-CN" sz="1400" dirty="0">
-              <a:latin typeface="Courier" pitchFamily="2" charset="0"/>
-            </a:endParaRPr>
-          </a:p>
-          <a:p>
-            <a:pPr indent="457200"/>
-            <a:r>
-              <a:rPr lang="en-US" altLang="zh-CN" sz="1400" dirty="0">
-                <a:latin typeface="Courier" pitchFamily="2" charset="0"/>
-                <a:sym typeface="+mn-ea"/>
-              </a:rPr>
-              <a:t>std::</a:t>
-            </a:r>
-            <a:r>
-              <a:rPr lang="en-US" altLang="zh-CN" sz="1400" dirty="0" err="1">
-                <a:latin typeface="Courier" pitchFamily="2" charset="0"/>
-                <a:sym typeface="+mn-ea"/>
-              </a:rPr>
-              <a:t>cout</a:t>
-            </a:r>
-            <a:r>
-              <a:rPr lang="en-US" altLang="zh-CN" sz="1400" dirty="0">
-                <a:latin typeface="Courier" pitchFamily="2" charset="0"/>
-                <a:sym typeface="+mn-ea"/>
-              </a:rPr>
-              <a:t> &lt;&lt; b &lt;&lt; std::</a:t>
-            </a:r>
-            <a:r>
-              <a:rPr lang="en-US" altLang="zh-CN" sz="1400" dirty="0" err="1">
-                <a:latin typeface="Courier" pitchFamily="2" charset="0"/>
-                <a:sym typeface="+mn-ea"/>
-              </a:rPr>
-              <a:t>endl</a:t>
-            </a:r>
-            <a:r>
-              <a:rPr lang="en-US" altLang="zh-CN" sz="1400" dirty="0">
-                <a:latin typeface="Courier" pitchFamily="2" charset="0"/>
-                <a:sym typeface="+mn-ea"/>
-              </a:rPr>
-              <a:t>;</a:t>
-            </a:r>
-            <a:endParaRPr lang="en-US" altLang="zh-CN" sz="1400" dirty="0">
-              <a:latin typeface="Courier" pitchFamily="2" charset="0"/>
-            </a:endParaRPr>
-          </a:p>
-          <a:p>
-            <a:endParaRPr lang="en-US" altLang="zh-CN" sz="1400" dirty="0">
-              <a:latin typeface="Courier" pitchFamily="2" charset="0"/>
-            </a:endParaRPr>
-          </a:p>
-          <a:p>
-            <a:r>
-              <a:rPr lang="en-US" altLang="zh-CN" sz="1400" dirty="0">
-                <a:latin typeface="Courier" pitchFamily="2" charset="0"/>
-              </a:rPr>
-              <a:t>    return 0;</a:t>
-            </a:r>
-            <a:endParaRPr lang="en-US" altLang="zh-CN" sz="1400" dirty="0">
-              <a:latin typeface="Courier" pitchFamily="2" charset="0"/>
-            </a:endParaRPr>
-          </a:p>
-          <a:p>
-            <a:r>
-              <a:rPr lang="en-US" altLang="zh-CN" sz="1400" dirty="0">
-                <a:latin typeface="Courier" pitchFamily="2" charset="0"/>
-              </a:rPr>
               <a:t>    </a:t>
             </a:r>
-            <a:endParaRPr lang="en-US" altLang="zh-CN" sz="1400" dirty="0">
-              <a:latin typeface="Courier" pitchFamily="2" charset="0"/>
-            </a:endParaRPr>
           </a:p>
           <a:p>
             <a:r>
@@ -13403,6 +9610,233 @@
             <a:endParaRPr lang="zh-CN" altLang="en-US" sz="1400" dirty="0">
               <a:latin typeface="Courier" pitchFamily="2" charset="0"/>
             </a:endParaRPr>
+          </a:p>
+        </p:txBody>
+      </p:sp>
+    </p:spTree>
+  </p:cSld>
+  <p:clrMapOvr>
+    <a:masterClrMapping/>
+  </p:clrMapOvr>
+</p:sld>
+</file>
+
+<file path=ppt/slides/slide2.xml><?xml version="1.0" encoding="utf-8"?>
+<p:sld xmlns:a="http://schemas.openxmlformats.org/drawingml/2006/main" xmlns:r="http://schemas.openxmlformats.org/officeDocument/2006/relationships" xmlns:p="http://schemas.openxmlformats.org/presentationml/2006/main">
+  <p:cSld>
+    <p:spTree>
+      <p:nvGrpSpPr>
+        <p:cNvPr id="1" name=""/>
+        <p:cNvGrpSpPr/>
+        <p:nvPr/>
+      </p:nvGrpSpPr>
+      <p:grpSpPr>
+        <a:xfrm>
+          <a:off x="0" y="0"/>
+          <a:ext cx="0" cy="0"/>
+          <a:chOff x="0" y="0"/>
+          <a:chExt cx="0" cy="0"/>
+        </a:xfrm>
+      </p:grpSpPr>
+      <p:sp>
+        <p:nvSpPr>
+          <p:cNvPr id="2" name="标题 1"/>
+          <p:cNvSpPr>
+            <a:spLocks noGrp="1"/>
+          </p:cNvSpPr>
+          <p:nvPr>
+            <p:ph type="title"/>
+          </p:nvPr>
+        </p:nvSpPr>
+        <p:spPr/>
+        <p:txBody>
+          <a:bodyPr>
+            <a:normAutofit/>
+          </a:bodyPr>
+          <a:lstStyle/>
+          <a:p>
+            <a:r>
+              <a:rPr lang="en-US" altLang="zh-CN" dirty="0"/>
+              <a:t>Topics</a:t>
+            </a:r>
+          </a:p>
+        </p:txBody>
+      </p:sp>
+      <p:sp>
+        <p:nvSpPr>
+          <p:cNvPr id="3" name="内容占位符 2"/>
+          <p:cNvSpPr>
+            <a:spLocks noGrp="1"/>
+          </p:cNvSpPr>
+          <p:nvPr>
+            <p:ph idx="1"/>
+          </p:nvPr>
+        </p:nvSpPr>
+        <p:spPr>
+          <a:xfrm>
+            <a:off x="286871" y="1326995"/>
+            <a:ext cx="11605207" cy="4849968"/>
+          </a:xfrm>
+        </p:spPr>
+        <p:txBody>
+          <a:bodyPr/>
+          <a:lstStyle/>
+          <a:p>
+            <a:pPr marL="285750" indent="-285750">
+              <a:buFont typeface="Arial" panose="020B0604020202020204" pitchFamily="34" charset="0"/>
+              <a:buChar char="•"/>
+            </a:pPr>
+            <a:r>
+              <a:rPr lang="en-US" altLang="zh-CN" b="1" dirty="0">
+                <a:sym typeface="+mn-ea"/>
+              </a:rPr>
+              <a:t>1. Formatting with </a:t>
+            </a:r>
+            <a:r>
+              <a:rPr lang="en-US" altLang="zh-CN" b="1" dirty="0" err="1">
+                <a:sym typeface="+mn-ea"/>
+              </a:rPr>
+              <a:t>cout</a:t>
+            </a:r>
+            <a:r>
+              <a:rPr lang="en-US" altLang="zh-CN" b="1" dirty="0">
+                <a:sym typeface="+mn-ea"/>
+              </a:rPr>
+              <a:t> and </a:t>
+            </a:r>
+            <a:r>
+              <a:rPr lang="en-US" altLang="zh-CN" b="1" dirty="0" err="1">
+                <a:sym typeface="+mn-ea"/>
+              </a:rPr>
+              <a:t>fprintf</a:t>
+            </a:r>
+            <a:r>
+              <a:rPr lang="en-US" altLang="zh-CN" b="1" dirty="0">
+                <a:sym typeface="+mn-ea"/>
+              </a:rPr>
+              <a:t>()</a:t>
+            </a:r>
+          </a:p>
+          <a:p>
+            <a:pPr marL="742950" lvl="1" indent="-285750">
+              <a:buFont typeface="Arial" panose="020B0604020202020204" pitchFamily="34" charset="0"/>
+              <a:buChar char="•"/>
+            </a:pPr>
+            <a:r>
+              <a:rPr lang="en-US" altLang="zh-CN" sz="2400" dirty="0" err="1">
+                <a:solidFill>
+                  <a:schemeClr val="tx1"/>
+                </a:solidFill>
+                <a:sym typeface="+mn-ea"/>
+              </a:rPr>
+              <a:t>1.1 </a:t>
+            </a:r>
+            <a:r>
+              <a:rPr lang="en-US" altLang="zh-CN" i="1" dirty="0">
+                <a:solidFill>
+                  <a:schemeClr val="tx1"/>
+                </a:solidFill>
+                <a:sym typeface="+mn-ea"/>
+              </a:rPr>
+              <a:t>Using member functions of </a:t>
+            </a:r>
+            <a:r>
+              <a:rPr lang="en-US" altLang="zh-CN" i="1" dirty="0" err="1">
+                <a:solidFill>
+                  <a:schemeClr val="tx1"/>
+                </a:solidFill>
+                <a:sym typeface="+mn-ea"/>
+              </a:rPr>
+              <a:t>ios</a:t>
+            </a:r>
+            <a:r>
+              <a:rPr lang="en-US" altLang="zh-CN" i="1" dirty="0">
+                <a:solidFill>
+                  <a:schemeClr val="tx1"/>
+                </a:solidFill>
+                <a:sym typeface="+mn-ea"/>
+              </a:rPr>
+              <a:t> class</a:t>
+            </a:r>
+            <a:endParaRPr lang="en-US" altLang="zh-CN" sz="2400" dirty="0" err="1">
+              <a:solidFill>
+                <a:schemeClr val="tx1"/>
+              </a:solidFill>
+              <a:sym typeface="+mn-ea"/>
+            </a:endParaRPr>
+          </a:p>
+          <a:p>
+            <a:pPr marL="742950" lvl="1" indent="-285750">
+              <a:buFont typeface="Arial" panose="020B0604020202020204" pitchFamily="34" charset="0"/>
+              <a:buChar char="•"/>
+            </a:pPr>
+            <a:r>
+              <a:rPr lang="en-US" altLang="zh-CN" sz="2400" dirty="0" err="1">
+                <a:solidFill>
+                  <a:schemeClr val="tx1"/>
+                </a:solidFill>
+                <a:sym typeface="+mn-ea"/>
+              </a:rPr>
+              <a:t>1.2 </a:t>
+            </a:r>
+            <a:r>
+              <a:rPr lang="en-US" altLang="zh-CN" i="1" dirty="0">
+                <a:solidFill>
+                  <a:schemeClr val="tx1"/>
+                </a:solidFill>
+                <a:sym typeface="+mn-ea"/>
+              </a:rPr>
+              <a:t>Using </a:t>
+            </a:r>
+            <a:r>
+              <a:rPr lang="en-US" altLang="zh-CN" i="1" dirty="0" err="1">
+                <a:solidFill>
+                  <a:schemeClr val="tx1"/>
+                </a:solidFill>
+                <a:sym typeface="+mn-ea"/>
+              </a:rPr>
+              <a:t>iomanip</a:t>
+            </a:r>
+            <a:r>
+              <a:rPr lang="en-US" altLang="zh-CN" i="1" dirty="0">
+                <a:solidFill>
+                  <a:schemeClr val="tx1"/>
+                </a:solidFill>
+                <a:sym typeface="+mn-ea"/>
+              </a:rPr>
+              <a:t> manipulators</a:t>
+            </a:r>
+            <a:endParaRPr lang="en-US" altLang="zh-CN" dirty="0">
+              <a:solidFill>
+                <a:schemeClr val="tx1"/>
+              </a:solidFill>
+              <a:sym typeface="+mn-ea"/>
+            </a:endParaRPr>
+          </a:p>
+          <a:p>
+            <a:pPr marL="285750" indent="-285750">
+              <a:buFont typeface="Arial" panose="020B0604020202020204" pitchFamily="34" charset="0"/>
+              <a:buChar char="•"/>
+            </a:pPr>
+            <a:r>
+              <a:rPr lang="en-US" altLang="zh-CN" b="1" dirty="0">
+                <a:sym typeface="+mn-ea"/>
+              </a:rPr>
+              <a:t>2. Exercises</a:t>
+            </a:r>
+          </a:p>
+          <a:p>
+            <a:pPr marL="742950" lvl="1" indent="-285750">
+              <a:buFont typeface="Arial" panose="020B0604020202020204" pitchFamily="34" charset="0"/>
+              <a:buChar char="•"/>
+            </a:pPr>
+            <a:r>
+              <a:rPr lang="en-US" altLang="zh-CN" dirty="0">
+                <a:sym typeface="+mn-ea"/>
+              </a:rPr>
+              <a:t>Data types and arithmetic operators</a:t>
+            </a:r>
+            <a:endParaRPr lang="en-US" altLang="zh-CN" dirty="0"/>
           </a:p>
         </p:txBody>
       </p:sp>
@@ -13565,21 +9999,18 @@
               <a:rPr lang="en-US" altLang="zh-CN" sz="1600" dirty="0"/>
               <a:t>int main()</a:t>
             </a:r>
-            <a:endParaRPr lang="en-US" altLang="zh-CN" sz="1600" dirty="0"/>
           </a:p>
           <a:p>
             <a:r>
               <a:rPr lang="en-US" altLang="zh-CN" sz="1600" dirty="0"/>
               <a:t>{</a:t>
             </a:r>
-            <a:endParaRPr lang="en-US" altLang="zh-CN" sz="1600" dirty="0"/>
           </a:p>
           <a:p>
             <a:r>
               <a:rPr lang="en-US" altLang="zh-CN" sz="1600" dirty="0"/>
               <a:t>    double f1 = 1.200;</a:t>
             </a:r>
-            <a:endParaRPr lang="en-US" altLang="zh-CN" sz="1600" dirty="0"/>
           </a:p>
           <a:p>
             <a:r>
@@ -13602,7 +10033,6 @@
               <a:rPr lang="en-US" altLang="zh-CN" sz="1600" dirty="0"/>
               <a:t>;</a:t>
             </a:r>
-            <a:endParaRPr lang="en-US" altLang="zh-CN" sz="1600" dirty="0"/>
           </a:p>
           <a:p>
             <a:r>
@@ -13625,7 +10055,6 @@
               <a:rPr lang="en-US" altLang="zh-CN" sz="1600" dirty="0"/>
               <a:t>;</a:t>
             </a:r>
-            <a:endParaRPr lang="en-US" altLang="zh-CN" sz="1600" dirty="0"/>
           </a:p>
           <a:p>
             <a:endParaRPr lang="en-US" altLang="zh-CN" sz="1600" dirty="0"/>
@@ -13635,7 +10064,6 @@
               <a:rPr lang="en-US" altLang="zh-CN" sz="1600" dirty="0"/>
               <a:t>    double f2 = 1.67E2;</a:t>
             </a:r>
-            <a:endParaRPr lang="en-US" altLang="zh-CN" sz="1600" dirty="0"/>
           </a:p>
           <a:p>
             <a:r>
@@ -13658,7 +10086,6 @@
               <a:rPr lang="en-US" altLang="zh-CN" sz="1600" dirty="0"/>
               <a:t>;</a:t>
             </a:r>
-            <a:endParaRPr lang="en-US" altLang="zh-CN" sz="1600" dirty="0"/>
           </a:p>
           <a:p>
             <a:endParaRPr lang="en-US" altLang="zh-CN" sz="1600" dirty="0"/>
@@ -13668,7 +10095,6 @@
               <a:rPr lang="en-US" altLang="zh-CN" sz="1600" dirty="0"/>
               <a:t>    double f3 = f2 + 1.0/9.0;</a:t>
             </a:r>
-            <a:endParaRPr lang="en-US" altLang="zh-CN" sz="1600" dirty="0"/>
           </a:p>
           <a:p>
             <a:r>
@@ -13691,7 +10117,6 @@
               <a:rPr lang="en-US" altLang="zh-CN" sz="1600" dirty="0"/>
               <a:t>;</a:t>
             </a:r>
-            <a:endParaRPr lang="en-US" altLang="zh-CN" sz="1600" dirty="0"/>
           </a:p>
           <a:p>
             <a:r>
@@ -13714,7 +10139,6 @@
               <a:rPr lang="en-US" altLang="zh-CN" sz="1600" dirty="0"/>
               <a:t>;</a:t>
             </a:r>
-            <a:endParaRPr lang="en-US" altLang="zh-CN" sz="1600" dirty="0"/>
           </a:p>
           <a:p>
             <a:endParaRPr lang="en-US" altLang="zh-CN" sz="1600" dirty="0"/>
@@ -13724,7 +10148,6 @@
               <a:rPr lang="en-US" altLang="zh-CN" sz="1600" dirty="0"/>
               <a:t>    double f4 = 2.3e-4;</a:t>
             </a:r>
-            <a:endParaRPr lang="en-US" altLang="zh-CN" sz="1600" dirty="0"/>
           </a:p>
           <a:p>
             <a:r>
@@ -13747,7 +10170,6 @@
               <a:rPr lang="en-US" altLang="zh-CN" sz="1600" dirty="0"/>
               <a:t>;</a:t>
             </a:r>
-            <a:endParaRPr lang="en-US" altLang="zh-CN" sz="1600" dirty="0"/>
           </a:p>
           <a:p>
             <a:r>
@@ -13770,7 +10192,6 @@
               <a:rPr lang="en-US" altLang="zh-CN" sz="1600" dirty="0"/>
               <a:t>;</a:t>
             </a:r>
-            <a:endParaRPr lang="en-US" altLang="zh-CN" sz="1600" dirty="0"/>
           </a:p>
           <a:p>
             <a:endParaRPr lang="en-US" altLang="zh-CN" sz="1600" dirty="0"/>
@@ -13780,7 +10201,6 @@
               <a:rPr lang="en-US" altLang="zh-CN" sz="1600" dirty="0"/>
               <a:t>    return 0;</a:t>
             </a:r>
-            <a:endParaRPr lang="en-US" altLang="zh-CN" sz="1600" dirty="0"/>
           </a:p>
           <a:p>
             <a:r>
@@ -13800,7 +10220,7 @@
           <p:nvPr/>
         </p:nvPicPr>
         <p:blipFill>
-          <a:blip r:embed="rId1"/>
+          <a:blip r:embed="rId3"/>
           <a:stretch>
             <a:fillRect/>
           </a:stretch>
@@ -14067,11 +10487,6 @@
               </a:rPr>
               <a:t>class</a:t>
             </a:r>
-            <a:endParaRPr lang="en-US" altLang="zh-CN" sz="2800" b="1" i="1" dirty="0">
-              <a:solidFill>
-                <a:prstClr val="black"/>
-              </a:solidFill>
-            </a:endParaRPr>
           </a:p>
         </p:txBody>
       </p:sp>
@@ -14140,11 +10555,6 @@
               </a:rPr>
               <a:t>() function has two prototypes,the first one is:</a:t>
             </a:r>
-            <a:endParaRPr lang="en-US" altLang="zh-CN" sz="2400" dirty="0">
-              <a:solidFill>
-                <a:prstClr val="black"/>
-              </a:solidFill>
-            </a:endParaRPr>
           </a:p>
           <a:p>
             <a:r>
@@ -14187,11 +10597,6 @@
               </a:rPr>
               <a:t>);</a:t>
             </a:r>
-            <a:endParaRPr lang="en-US" altLang="zh-CN" sz="2400" dirty="0">
-              <a:solidFill>
-                <a:prstClr val="black"/>
-              </a:solidFill>
-            </a:endParaRPr>
           </a:p>
         </p:txBody>
       </p:sp>
@@ -14241,11 +10646,6 @@
               </a:rPr>
               <a:t>output formats</a:t>
             </a:r>
-            <a:endParaRPr lang="en-US" altLang="zh-CN" sz="2800" b="1" dirty="0">
-              <a:solidFill>
-                <a:srgbClr val="00B0F0"/>
-              </a:solidFill>
-            </a:endParaRPr>
           </a:p>
           <a:p>
             <a:pPr indent="0">
@@ -14284,11 +10684,6 @@
               </a:rPr>
               <a:t>class</a:t>
             </a:r>
-            <a:endParaRPr lang="en-US" altLang="zh-CN" sz="2800" b="1" i="1" dirty="0">
-              <a:solidFill>
-                <a:prstClr val="black"/>
-              </a:solidFill>
-            </a:endParaRPr>
           </a:p>
           <a:p>
             <a:pPr indent="0">
@@ -14344,7 +10739,7 @@
           <p:nvPr/>
         </p:nvPicPr>
         <p:blipFill>
-          <a:blip r:embed="rId1"/>
+          <a:blip r:embed="rId3"/>
           <a:stretch>
             <a:fillRect/>
           </a:stretch>
@@ -14368,7 +10763,7 @@
           <p:nvPr/>
         </p:nvPicPr>
         <p:blipFill>
-          <a:blip r:embed="rId2"/>
+          <a:blip r:embed="rId4"/>
           <a:stretch>
             <a:fillRect/>
           </a:stretch>
@@ -14403,6 +10798,7 @@
           <a:bodyPr wrap="square" rtlCol="0">
             <a:spAutoFit/>
           </a:bodyPr>
+          <a:lstStyle/>
           <a:p>
             <a:endParaRPr lang="zh-CN" altLang="en-US"/>
           </a:p>
@@ -14652,11 +11048,6 @@
               </a:rPr>
               <a:t> class</a:t>
             </a:r>
-            <a:endParaRPr lang="en-US" altLang="zh-CN" sz="2800" b="1" i="1" dirty="0">
-              <a:solidFill>
-                <a:prstClr val="black"/>
-              </a:solidFill>
-            </a:endParaRPr>
           </a:p>
         </p:txBody>
       </p:sp>
@@ -14690,11 +11081,6 @@
               </a:rPr>
               <a:t>The second  one is:</a:t>
             </a:r>
-            <a:endParaRPr lang="en-US" altLang="zh-CN" sz="2400" dirty="0">
-              <a:solidFill>
-                <a:prstClr val="black"/>
-              </a:solidFill>
-            </a:endParaRPr>
           </a:p>
           <a:p>
             <a:r>
@@ -14737,11 +11123,6 @@
               </a:rPr>
               <a:t>);</a:t>
             </a:r>
-            <a:endParaRPr lang="en-US" altLang="zh-CN" sz="2400" dirty="0">
-              <a:solidFill>
-                <a:prstClr val="black"/>
-              </a:solidFill>
-            </a:endParaRPr>
           </a:p>
         </p:txBody>
       </p:sp>
@@ -14754,7 +11135,7 @@
           <p:nvPr/>
         </p:nvPicPr>
         <p:blipFill>
-          <a:blip r:embed="rId1">
+          <a:blip r:embed="rId3">
             <a:extLst>
               <a:ext uri="{28A0092B-C50C-407E-A947-70E740481C1C}">
                 <a14:useLocalDpi xmlns:a14="http://schemas.microsoft.com/office/drawing/2010/main" val="0"/>
@@ -14966,7 +11347,7 @@
           <p:nvPr/>
         </p:nvPicPr>
         <p:blipFill>
-          <a:blip r:embed="rId1"/>
+          <a:blip r:embed="rId3"/>
           <a:stretch>
             <a:fillRect/>
           </a:stretch>
@@ -15017,14 +11398,12 @@
               <a:rPr lang="en-US" altLang="zh-CN" dirty="0"/>
               <a:t>#include &lt;iostream&gt;</a:t>
             </a:r>
-            <a:endParaRPr lang="en-US" altLang="zh-CN" dirty="0"/>
           </a:p>
           <a:p>
             <a:r>
               <a:rPr lang="en-US" altLang="zh-CN" dirty="0"/>
               <a:t>using namespace std;</a:t>
             </a:r>
-            <a:endParaRPr lang="en-US" altLang="zh-CN" dirty="0"/>
           </a:p>
           <a:p>
             <a:endParaRPr lang="en-US" altLang="zh-CN" dirty="0"/>
@@ -15034,14 +11413,12 @@
               <a:rPr lang="en-US" altLang="zh-CN" dirty="0"/>
               <a:t>int main()</a:t>
             </a:r>
-            <a:endParaRPr lang="en-US" altLang="zh-CN" dirty="0"/>
           </a:p>
           <a:p>
             <a:r>
               <a:rPr lang="en-US" altLang="zh-CN" dirty="0"/>
               <a:t>{</a:t>
             </a:r>
-            <a:endParaRPr lang="en-US" altLang="zh-CN" dirty="0"/>
           </a:p>
           <a:p>
             <a:r>
@@ -15064,7 +11441,6 @@
               <a:rPr lang="en-US" altLang="zh-CN" dirty="0"/>
               <a:t>;</a:t>
             </a:r>
-            <a:endParaRPr lang="en-US" altLang="zh-CN" dirty="0"/>
           </a:p>
           <a:p>
             <a:r>
@@ -15079,7 +11455,6 @@
               <a:rPr lang="en-US" altLang="zh-CN" dirty="0"/>
               <a:t>(12);</a:t>
             </a:r>
-            <a:endParaRPr lang="en-US" altLang="zh-CN" dirty="0"/>
           </a:p>
           <a:p>
             <a:r>
@@ -15094,7 +11469,6 @@
               <a:rPr lang="en-US" altLang="zh-CN" dirty="0"/>
               <a:t>('+');</a:t>
             </a:r>
-            <a:endParaRPr lang="en-US" altLang="zh-CN" dirty="0"/>
           </a:p>
           <a:p>
             <a:r>
@@ -15117,7 +11491,6 @@
               <a:rPr lang="en-US" altLang="zh-CN" dirty="0"/>
               <a:t>;</a:t>
             </a:r>
-            <a:endParaRPr lang="en-US" altLang="zh-CN" dirty="0"/>
           </a:p>
           <a:p>
             <a:endParaRPr lang="en-US" altLang="zh-CN" dirty="0"/>
@@ -15135,7 +11508,6 @@
               <a:rPr lang="en-US" altLang="zh-CN" dirty="0"/>
               <a:t>(2);</a:t>
             </a:r>
-            <a:endParaRPr lang="en-US" altLang="zh-CN" dirty="0"/>
           </a:p>
           <a:p>
             <a:r>
@@ -15158,7 +11530,6 @@
               <a:rPr lang="en-US" altLang="zh-CN" dirty="0"/>
               <a:t>;</a:t>
             </a:r>
-            <a:endParaRPr lang="en-US" altLang="zh-CN" dirty="0"/>
           </a:p>
           <a:p>
             <a:r>
@@ -15173,7 +11544,6 @@
               <a:rPr lang="en-US" altLang="zh-CN" dirty="0"/>
               <a:t>(5);</a:t>
             </a:r>
-            <a:endParaRPr lang="en-US" altLang="zh-CN" dirty="0"/>
           </a:p>
           <a:p>
             <a:r>
@@ -15196,7 +11566,6 @@
               <a:rPr lang="en-US" altLang="zh-CN" dirty="0"/>
               <a:t>;</a:t>
             </a:r>
-            <a:endParaRPr lang="en-US" altLang="zh-CN" dirty="0"/>
           </a:p>
           <a:p>
             <a:endParaRPr lang="en-US" altLang="zh-CN" dirty="0"/>
@@ -15206,7 +11575,6 @@
               <a:rPr lang="en-US" altLang="zh-CN" dirty="0"/>
               <a:t>    return 0;</a:t>
             </a:r>
-            <a:endParaRPr lang="en-US" altLang="zh-CN" dirty="0"/>
           </a:p>
           <a:p>
             <a:r>
@@ -15267,11 +11635,6 @@
               </a:rPr>
               <a:t> class</a:t>
             </a:r>
-            <a:endParaRPr lang="en-US" altLang="zh-CN" sz="2800" b="1" i="1" dirty="0">
-              <a:solidFill>
-                <a:prstClr val="black"/>
-              </a:solidFill>
-            </a:endParaRPr>
           </a:p>
         </p:txBody>
       </p:sp>
@@ -15353,11 +11716,6 @@
               </a:rPr>
               <a:t>//set the field width</a:t>
             </a:r>
-            <a:endParaRPr lang="en-US" altLang="zh-CN" sz="2000" dirty="0">
-              <a:solidFill>
-                <a:srgbClr val="00B050"/>
-              </a:solidFill>
-            </a:endParaRPr>
           </a:p>
           <a:p>
             <a:r>
@@ -15416,11 +11774,6 @@
               </a:rPr>
               <a:t>// fill character to be used with justified field</a:t>
             </a:r>
-            <a:endParaRPr lang="en-US" altLang="zh-CN" sz="2000" dirty="0">
-              <a:solidFill>
-                <a:srgbClr val="00B050"/>
-              </a:solidFill>
-            </a:endParaRPr>
           </a:p>
           <a:p>
             <a:r>
@@ -15463,11 +11816,6 @@
               </a:rPr>
               <a:t>// set the precision of floating-point numbers</a:t>
             </a:r>
-            <a:endParaRPr lang="en-US" altLang="zh-CN" sz="2000" dirty="0">
-              <a:solidFill>
-                <a:srgbClr val="00B050"/>
-              </a:solidFill>
-            </a:endParaRPr>
           </a:p>
           <a:p>
             <a:endParaRPr lang="en-US" altLang="zh-CN" sz="2000" dirty="0">
@@ -15744,14 +12092,12 @@
               <a:rPr lang="en-US" altLang="zh-CN" dirty="0"/>
               <a:t>#include &lt;iostream&gt;</a:t>
             </a:r>
-            <a:endParaRPr lang="en-US" altLang="zh-CN" dirty="0"/>
           </a:p>
           <a:p>
             <a:r>
               <a:rPr lang="en-US" altLang="zh-CN" dirty="0"/>
               <a:t>using namespace std;</a:t>
             </a:r>
-            <a:endParaRPr lang="en-US" altLang="zh-CN" dirty="0"/>
           </a:p>
           <a:p>
             <a:endParaRPr lang="en-US" altLang="zh-CN" dirty="0"/>
@@ -15761,14 +12107,12 @@
               <a:rPr lang="en-US" altLang="zh-CN" dirty="0"/>
               <a:t>int main()</a:t>
             </a:r>
-            <a:endParaRPr lang="en-US" altLang="zh-CN" dirty="0"/>
           </a:p>
           <a:p>
             <a:r>
               <a:rPr lang="en-US" altLang="zh-CN" dirty="0"/>
               <a:t>{</a:t>
             </a:r>
-            <a:endParaRPr lang="en-US" altLang="zh-CN" dirty="0"/>
           </a:p>
           <a:p>
             <a:r>
@@ -15807,7 +12151,6 @@
               <a:rPr lang="en-US" altLang="zh-CN" b="1" dirty="0"/>
               <a:t>);</a:t>
             </a:r>
-            <a:endParaRPr lang="en-US" altLang="zh-CN" b="1" dirty="0"/>
           </a:p>
           <a:p>
             <a:r>
@@ -15830,7 +12173,6 @@
               <a:rPr lang="en-US" altLang="zh-CN" dirty="0"/>
               <a:t>;</a:t>
             </a:r>
-            <a:endParaRPr lang="en-US" altLang="zh-CN" dirty="0"/>
           </a:p>
           <a:p>
             <a:r>
@@ -15845,7 +12187,6 @@
               <a:rPr lang="en-US" altLang="zh-CN" dirty="0"/>
               <a:t>(12);</a:t>
             </a:r>
-            <a:endParaRPr lang="en-US" altLang="zh-CN" dirty="0"/>
           </a:p>
           <a:p>
             <a:r>
@@ -15860,7 +12201,6 @@
               <a:rPr lang="en-US" altLang="zh-CN" dirty="0"/>
               <a:t>('+');</a:t>
             </a:r>
-            <a:endParaRPr lang="en-US" altLang="zh-CN" dirty="0"/>
           </a:p>
           <a:p>
             <a:r>
@@ -15883,7 +12223,6 @@
               <a:rPr lang="en-US" altLang="zh-CN" dirty="0"/>
               <a:t>;</a:t>
             </a:r>
-            <a:endParaRPr lang="en-US" altLang="zh-CN" dirty="0"/>
           </a:p>
           <a:p>
             <a:endParaRPr lang="en-US" altLang="zh-CN" dirty="0"/>
@@ -15901,7 +12240,6 @@
               <a:rPr lang="en-US" altLang="zh-CN" dirty="0"/>
               <a:t>(2);</a:t>
             </a:r>
-            <a:endParaRPr lang="en-US" altLang="zh-CN" dirty="0"/>
           </a:p>
           <a:p>
             <a:r>
@@ -15924,7 +12262,6 @@
               <a:rPr lang="en-US" altLang="zh-CN" dirty="0"/>
               <a:t>;</a:t>
             </a:r>
-            <a:endParaRPr lang="en-US" altLang="zh-CN" dirty="0"/>
           </a:p>
           <a:p>
             <a:r>
@@ -15939,7 +12276,6 @@
               <a:rPr lang="en-US" altLang="zh-CN" dirty="0"/>
               <a:t>(5);</a:t>
             </a:r>
-            <a:endParaRPr lang="en-US" altLang="zh-CN" dirty="0"/>
           </a:p>
           <a:p>
             <a:r>
@@ -15962,7 +12298,6 @@
               <a:rPr lang="en-US" altLang="zh-CN" dirty="0"/>
               <a:t>;</a:t>
             </a:r>
-            <a:endParaRPr lang="en-US" altLang="zh-CN" dirty="0"/>
           </a:p>
           <a:p>
             <a:endParaRPr lang="en-US" altLang="zh-CN" dirty="0"/>
@@ -15972,7 +12307,6 @@
               <a:rPr lang="en-US" altLang="zh-CN" dirty="0"/>
               <a:t>    return 0;</a:t>
             </a:r>
-            <a:endParaRPr lang="en-US" altLang="zh-CN" dirty="0"/>
           </a:p>
           <a:p>
             <a:r>
@@ -15992,7 +12326,7 @@
           <p:nvPr/>
         </p:nvPicPr>
         <p:blipFill>
-          <a:blip r:embed="rId2"/>
+          <a:blip r:embed="rId4"/>
           <a:stretch>
             <a:fillRect/>
           </a:stretch>
@@ -16394,7 +12728,6 @@
                 <a:rPr lang="en-US" altLang="zh-CN" dirty="0"/>
                 <a:t>precision of </a:t>
               </a:r>
-              <a:endParaRPr lang="en-US" altLang="zh-CN" dirty="0"/>
             </a:p>
             <a:p>
               <a:r>
@@ -17051,14 +13384,12 @@
               <a:rPr lang="en-US" altLang="zh-CN" dirty="0"/>
               <a:t>#include &lt;iostream&gt;</a:t>
             </a:r>
-            <a:endParaRPr lang="en-US" altLang="zh-CN" dirty="0"/>
           </a:p>
           <a:p>
             <a:r>
               <a:rPr lang="en-US" altLang="zh-CN" dirty="0"/>
               <a:t>using namespace std;</a:t>
             </a:r>
-            <a:endParaRPr lang="en-US" altLang="zh-CN" dirty="0"/>
           </a:p>
           <a:p>
             <a:endParaRPr lang="en-US" altLang="zh-CN" dirty="0"/>
@@ -17068,28 +13399,24 @@
               <a:rPr lang="en-US" altLang="zh-CN" dirty="0"/>
               <a:t>int main()</a:t>
             </a:r>
-            <a:endParaRPr lang="en-US" altLang="zh-CN" dirty="0"/>
           </a:p>
           <a:p>
             <a:r>
               <a:rPr lang="en-US" altLang="zh-CN" dirty="0"/>
               <a:t>{</a:t>
             </a:r>
-            <a:endParaRPr lang="en-US" altLang="zh-CN" dirty="0"/>
           </a:p>
           <a:p>
             <a:r>
               <a:rPr lang="en-US" altLang="zh-CN" dirty="0"/>
               <a:t>    bool flag = true;</a:t>
             </a:r>
-            <a:endParaRPr lang="en-US" altLang="zh-CN" dirty="0"/>
           </a:p>
           <a:p>
             <a:r>
               <a:rPr lang="en-US" altLang="zh-CN" dirty="0"/>
               <a:t>    float f = 0.20f;</a:t>
             </a:r>
-            <a:endParaRPr lang="en-US" altLang="zh-CN" dirty="0"/>
           </a:p>
           <a:p>
             <a:endParaRPr lang="en-US" altLang="zh-CN" dirty="0"/>
@@ -17123,7 +13450,6 @@
               <a:rPr lang="en-US" altLang="zh-CN" dirty="0"/>
               <a:t>);</a:t>
             </a:r>
-            <a:endParaRPr lang="en-US" altLang="zh-CN" dirty="0"/>
           </a:p>
           <a:p>
             <a:r>
@@ -17154,7 +13480,6 @@
               <a:rPr lang="en-US" altLang="zh-CN" dirty="0"/>
               <a:t>);</a:t>
             </a:r>
-            <a:endParaRPr lang="en-US" altLang="zh-CN" dirty="0"/>
           </a:p>
           <a:p>
             <a:r>
@@ -17177,7 +13502,6 @@
               <a:rPr lang="en-US" altLang="zh-CN" dirty="0"/>
               <a:t>;</a:t>
             </a:r>
-            <a:endParaRPr lang="en-US" altLang="zh-CN" dirty="0"/>
           </a:p>
           <a:p>
             <a:r>
@@ -17200,7 +13524,6 @@
               <a:rPr lang="en-US" altLang="zh-CN" dirty="0"/>
               <a:t>;</a:t>
             </a:r>
-            <a:endParaRPr lang="en-US" altLang="zh-CN" dirty="0"/>
           </a:p>
           <a:p>
             <a:endParaRPr lang="en-US" altLang="zh-CN" dirty="0"/>
@@ -17234,7 +13557,6 @@
               <a:rPr lang="en-US" altLang="zh-CN" dirty="0"/>
               <a:t>);</a:t>
             </a:r>
-            <a:endParaRPr lang="en-US" altLang="zh-CN" dirty="0"/>
           </a:p>
           <a:p>
             <a:r>
@@ -17265,7 +13587,6 @@
               <a:rPr lang="en-US" altLang="zh-CN" dirty="0"/>
               <a:t>);</a:t>
             </a:r>
-            <a:endParaRPr lang="en-US" altLang="zh-CN" dirty="0"/>
           </a:p>
           <a:p>
             <a:r>
@@ -17288,7 +13609,6 @@
               <a:rPr lang="en-US" altLang="zh-CN" dirty="0"/>
               <a:t>;</a:t>
             </a:r>
-            <a:endParaRPr lang="en-US" altLang="zh-CN" dirty="0"/>
           </a:p>
           <a:p>
             <a:r>
@@ -17311,7 +13631,6 @@
               <a:rPr lang="en-US" altLang="zh-CN" dirty="0"/>
               <a:t>;</a:t>
             </a:r>
-            <a:endParaRPr lang="en-US" altLang="zh-CN" dirty="0"/>
           </a:p>
           <a:p>
             <a:endParaRPr lang="en-US" altLang="zh-CN" dirty="0"/>
@@ -17321,7 +13640,6 @@
               <a:rPr lang="en-US" altLang="zh-CN" dirty="0"/>
               <a:t>    return 0;</a:t>
             </a:r>
-            <a:endParaRPr lang="en-US" altLang="zh-CN" dirty="0"/>
           </a:p>
           <a:p>
             <a:r>
@@ -17341,7 +13659,7 @@
           <p:nvPr/>
         </p:nvPicPr>
         <p:blipFill>
-          <a:blip r:embed="rId1"/>
+          <a:blip r:embed="rId3"/>
           <a:stretch>
             <a:fillRect/>
           </a:stretch>
@@ -17915,7 +14233,7 @@
             <p:nvPr/>
           </p:nvPicPr>
           <p:blipFill>
-            <a:blip r:embed="rId1"/>
+            <a:blip r:embed="rId3"/>
             <a:stretch>
               <a:fillRect/>
             </a:stretch>
@@ -17939,7 +14257,7 @@
             <p:nvPr/>
           </p:nvPicPr>
           <p:blipFill>
-            <a:blip r:embed="rId2"/>
+            <a:blip r:embed="rId4"/>
             <a:stretch>
               <a:fillRect/>
             </a:stretch>
@@ -17978,7 +14296,7 @@
             <p:nvPr/>
           </p:nvPicPr>
           <p:blipFill>
-            <a:blip r:embed="rId3"/>
+            <a:blip r:embed="rId5"/>
             <a:stretch>
               <a:fillRect/>
             </a:stretch>
@@ -18002,7 +14320,7 @@
             <p:nvPr/>
           </p:nvPicPr>
           <p:blipFill>
-            <a:blip r:embed="rId4"/>
+            <a:blip r:embed="rId6"/>
             <a:stretch>
               <a:fillRect/>
             </a:stretch>
@@ -18181,14 +14499,12 @@
               <a:rPr lang="en-US" altLang="zh-CN" dirty="0"/>
               <a:t>#include &lt;iostream&gt;</a:t>
             </a:r>
-            <a:endParaRPr lang="en-US" altLang="zh-CN" dirty="0"/>
           </a:p>
           <a:p>
             <a:r>
               <a:rPr lang="en-US" altLang="zh-CN" dirty="0"/>
               <a:t>using namespace std;</a:t>
             </a:r>
-            <a:endParaRPr lang="en-US" altLang="zh-CN" dirty="0"/>
           </a:p>
           <a:p>
             <a:endParaRPr lang="en-US" altLang="zh-CN" dirty="0"/>
@@ -18198,35 +14514,30 @@
               <a:rPr lang="en-US" altLang="zh-CN" dirty="0"/>
               <a:t>int main()</a:t>
             </a:r>
-            <a:endParaRPr lang="en-US" altLang="zh-CN" dirty="0"/>
           </a:p>
           <a:p>
             <a:r>
               <a:rPr lang="en-US" altLang="zh-CN" dirty="0"/>
               <a:t>{</a:t>
             </a:r>
-            <a:endParaRPr lang="en-US" altLang="zh-CN" dirty="0"/>
           </a:p>
           <a:p>
             <a:r>
               <a:rPr lang="en-US" altLang="zh-CN" dirty="0"/>
               <a:t>    bool flag = false;</a:t>
             </a:r>
-            <a:endParaRPr lang="en-US" altLang="zh-CN" dirty="0"/>
           </a:p>
           <a:p>
             <a:r>
               <a:rPr lang="en-US" altLang="zh-CN" dirty="0"/>
               <a:t>    double a = 2.3876;</a:t>
             </a:r>
-            <a:endParaRPr lang="en-US" altLang="zh-CN" dirty="0"/>
           </a:p>
           <a:p>
             <a:r>
               <a:rPr lang="en-US" altLang="zh-CN" dirty="0"/>
               <a:t>    double b = 0.46e2;</a:t>
             </a:r>
-            <a:endParaRPr lang="en-US" altLang="zh-CN" dirty="0"/>
           </a:p>
           <a:p>
             <a:endParaRPr lang="en-US" altLang="zh-CN" dirty="0"/>
@@ -18260,7 +14571,6 @@
               <a:rPr lang="en-US" altLang="zh-CN" dirty="0"/>
               <a:t>;</a:t>
             </a:r>
-            <a:endParaRPr lang="en-US" altLang="zh-CN" dirty="0"/>
           </a:p>
           <a:p>
             <a:r>
@@ -18283,7 +14593,6 @@
               <a:rPr lang="en-US" altLang="zh-CN" dirty="0"/>
               <a:t>;</a:t>
             </a:r>
-            <a:endParaRPr lang="en-US" altLang="zh-CN" dirty="0"/>
           </a:p>
           <a:p>
             <a:r>
@@ -18306,14 +14615,12 @@
               <a:rPr lang="en-US" altLang="zh-CN" dirty="0"/>
               <a:t>;</a:t>
             </a:r>
-            <a:endParaRPr lang="en-US" altLang="zh-CN" dirty="0"/>
           </a:p>
           <a:p>
             <a:r>
               <a:rPr lang="en-US" altLang="zh-CN" dirty="0"/>
               <a:t>   </a:t>
             </a:r>
-            <a:endParaRPr lang="en-US" altLang="zh-CN" dirty="0"/>
           </a:p>
           <a:p>
             <a:r>
@@ -18344,7 +14651,6 @@
               <a:rPr lang="en-US" altLang="zh-CN" dirty="0"/>
               <a:t>;</a:t>
             </a:r>
-            <a:endParaRPr lang="en-US" altLang="zh-CN" dirty="0"/>
           </a:p>
           <a:p>
             <a:r>
@@ -18367,7 +14673,6 @@
               <a:rPr lang="en-US" altLang="zh-CN" dirty="0"/>
               <a:t>::fixed);</a:t>
             </a:r>
-            <a:endParaRPr lang="en-US" altLang="zh-CN" dirty="0"/>
           </a:p>
           <a:p>
             <a:r>
@@ -18390,7 +14695,6 @@
               <a:rPr lang="en-US" altLang="zh-CN" dirty="0"/>
               <a:t>;</a:t>
             </a:r>
-            <a:endParaRPr lang="en-US" altLang="zh-CN" dirty="0"/>
           </a:p>
           <a:p>
             <a:r>
@@ -18413,7 +14717,6 @@
               <a:rPr lang="en-US" altLang="zh-CN" dirty="0"/>
               <a:t>;</a:t>
             </a:r>
-            <a:endParaRPr lang="en-US" altLang="zh-CN" dirty="0"/>
           </a:p>
           <a:p>
             <a:endParaRPr lang="en-US" altLang="zh-CN" dirty="0"/>
@@ -18423,7 +14726,6 @@
               <a:rPr lang="en-US" altLang="zh-CN" dirty="0"/>
               <a:t>    return 0;</a:t>
             </a:r>
-            <a:endParaRPr lang="en-US" altLang="zh-CN" dirty="0"/>
           </a:p>
           <a:p>
             <a:r>
@@ -18443,7 +14745,7 @@
           <p:nvPr/>
         </p:nvPicPr>
         <p:blipFill>
-          <a:blip r:embed="rId1"/>
+          <a:blip r:embed="rId3"/>
           <a:stretch>
             <a:fillRect/>
           </a:stretch>
@@ -18862,20 +15164,8 @@
 </file>
 
 <file path=ppt/tags/tag1.xml><?xml version="1.0" encoding="utf-8"?>
-<p:tagLst xmlns:p="http://schemas.openxmlformats.org/presentationml/2006/main">
-  <p:tag name="KSO_WM_BEAUTIFY_FLAG" val=""/>
-</p:tagLst>
-</file>
-
-<file path=ppt/tags/tag2.xml><?xml version="1.0" encoding="utf-8"?>
-<p:tagLst xmlns:p="http://schemas.openxmlformats.org/presentationml/2006/main">
-  <p:tag name="KSO_WM_BEAUTIFY_FLAG" val=""/>
-</p:tagLst>
-</file>
-
-<file path=ppt/tags/tag3.xml><?xml version="1.0" encoding="utf-8"?>
-<p:tagLst xmlns:p="http://schemas.openxmlformats.org/presentationml/2006/main">
-  <p:tag name="commondata" val="eyJoZGlkIjoiMTM4NzBlMWU3ODgyMDBmYTBjYWFjMTgxZWUwMmYyNDEifQ=="/>
+<p:tagLst xmlns:a="http://schemas.openxmlformats.org/drawingml/2006/main" xmlns:r="http://schemas.openxmlformats.org/officeDocument/2006/relationships" xmlns:p="http://schemas.openxmlformats.org/presentationml/2006/main">
+  <p:tag name="COMMONDATA" val="eyJoZGlkIjoiMTM4NzBlMWU3ODgyMDBmYTBjYWFjMTgxZWUwMmYyNDEifQ=="/>
 </p:tagLst>
 </file>
 
@@ -19130,6 +15420,8 @@
       </a:bgFillStyleLst>
     </a:fmtScheme>
   </a:themeElements>
+  <a:objectDefaults/>
+  <a:extraClrSchemeLst/>
   <a:extLst>
     <a:ext uri="{05A4C25C-085E-4340-85A3-A5531E510DB2}">
       <thm15:themeFamily xmlns:thm15="http://schemas.microsoft.com/office/thememl/2012/main" name="Office Theme" id="{62F939B6-93AF-4DB8-9C6B-D6C7DFDC589F}" vid="{4A3C46E8-61CC-4603-A589-7422A47A8E4A}"/>
@@ -19389,6 +15681,8 @@
       </a:bgFillStyleLst>
     </a:fmtScheme>
   </a:themeElements>
+  <a:objectDefaults/>
+  <a:extraClrSchemeLst/>
   <a:extLst>
     <a:ext uri="{05A4C25C-085E-4340-85A3-A5531E510DB2}">
       <thm15:themeFamily xmlns:thm15="http://schemas.microsoft.com/office/thememl/2012/main" name="Office Theme" id="{62F939B6-93AF-4DB8-9C6B-D6C7DFDC589F}" vid="{4A3C46E8-61CC-4603-A589-7422A47A8E4A}"/>
